--- a/Fase4/03_results/Evaluación AgenteRL_F4A_Agente600– Plataformaplana.pptx
+++ b/Fase4/03_results/Evaluación AgenteRL_F4A_Agente600– Plataformaplana.pptx
@@ -113,6 +113,11 @@
       </a:defRPr>
     </a:lvl9pPr>
   </p:defaultTextStyle>
+  <p:extLst>
+    <p:ext uri="{EFAFB233-063F-42B5-8137-9DF3F51BA10A}">
+      <p15:sldGuideLst xmlns:p15="http://schemas.microsoft.com/office/powerpoint/2012/main"/>
+    </p:ext>
+  </p:extLst>
 </p:presentation>
 </file>
 
@@ -265,7 +270,7 @@
           <a:p>
             <a:fld id="{486E49E1-B6AC-7545-825E-B0154656A4CF}" type="datetimeFigureOut">
               <a:rPr lang="es-ES_tradnl" smtClean="0"/>
-              <a:t>29/3/26</a:t>
+              <a:t>7/4/26</a:t>
             </a:fld>
             <a:endParaRPr lang="es-ES_tradnl"/>
           </a:p>
@@ -465,7 +470,7 @@
           <a:p>
             <a:fld id="{486E49E1-B6AC-7545-825E-B0154656A4CF}" type="datetimeFigureOut">
               <a:rPr lang="es-ES_tradnl" smtClean="0"/>
-              <a:t>29/3/26</a:t>
+              <a:t>7/4/26</a:t>
             </a:fld>
             <a:endParaRPr lang="es-ES_tradnl"/>
           </a:p>
@@ -675,7 +680,7 @@
           <a:p>
             <a:fld id="{486E49E1-B6AC-7545-825E-B0154656A4CF}" type="datetimeFigureOut">
               <a:rPr lang="es-ES_tradnl" smtClean="0"/>
-              <a:t>29/3/26</a:t>
+              <a:t>7/4/26</a:t>
             </a:fld>
             <a:endParaRPr lang="es-ES_tradnl"/>
           </a:p>
@@ -1729,7 +1734,7 @@
           <a:p>
             <a:fld id="{486E49E1-B6AC-7545-825E-B0154656A4CF}" type="datetimeFigureOut">
               <a:rPr lang="es-ES_tradnl" smtClean="0"/>
-              <a:t>29/3/26</a:t>
+              <a:t>7/4/26</a:t>
             </a:fld>
             <a:endParaRPr lang="es-ES_tradnl"/>
           </a:p>
@@ -2005,7 +2010,7 @@
           <a:p>
             <a:fld id="{486E49E1-B6AC-7545-825E-B0154656A4CF}" type="datetimeFigureOut">
               <a:rPr lang="es-ES_tradnl" smtClean="0"/>
-              <a:t>29/3/26</a:t>
+              <a:t>7/4/26</a:t>
             </a:fld>
             <a:endParaRPr lang="es-ES_tradnl"/>
           </a:p>
@@ -2273,7 +2278,7 @@
           <a:p>
             <a:fld id="{486E49E1-B6AC-7545-825E-B0154656A4CF}" type="datetimeFigureOut">
               <a:rPr lang="es-ES_tradnl" smtClean="0"/>
-              <a:t>29/3/26</a:t>
+              <a:t>7/4/26</a:t>
             </a:fld>
             <a:endParaRPr lang="es-ES_tradnl"/>
           </a:p>
@@ -2688,7 +2693,7 @@
           <a:p>
             <a:fld id="{486E49E1-B6AC-7545-825E-B0154656A4CF}" type="datetimeFigureOut">
               <a:rPr lang="es-ES_tradnl" smtClean="0"/>
-              <a:t>29/3/26</a:t>
+              <a:t>7/4/26</a:t>
             </a:fld>
             <a:endParaRPr lang="es-ES_tradnl"/>
           </a:p>
@@ -2830,7 +2835,7 @@
           <a:p>
             <a:fld id="{486E49E1-B6AC-7545-825E-B0154656A4CF}" type="datetimeFigureOut">
               <a:rPr lang="es-ES_tradnl" smtClean="0"/>
-              <a:t>29/3/26</a:t>
+              <a:t>7/4/26</a:t>
             </a:fld>
             <a:endParaRPr lang="es-ES_tradnl"/>
           </a:p>
@@ -2943,7 +2948,7 @@
           <a:p>
             <a:fld id="{486E49E1-B6AC-7545-825E-B0154656A4CF}" type="datetimeFigureOut">
               <a:rPr lang="es-ES_tradnl" smtClean="0"/>
-              <a:t>29/3/26</a:t>
+              <a:t>7/4/26</a:t>
             </a:fld>
             <a:endParaRPr lang="es-ES_tradnl"/>
           </a:p>
@@ -3256,7 +3261,7 @@
           <a:p>
             <a:fld id="{486E49E1-B6AC-7545-825E-B0154656A4CF}" type="datetimeFigureOut">
               <a:rPr lang="es-ES_tradnl" smtClean="0"/>
-              <a:t>29/3/26</a:t>
+              <a:t>7/4/26</a:t>
             </a:fld>
             <a:endParaRPr lang="es-ES_tradnl"/>
           </a:p>
@@ -3545,7 +3550,7 @@
           <a:p>
             <a:fld id="{486E49E1-B6AC-7545-825E-B0154656A4CF}" type="datetimeFigureOut">
               <a:rPr lang="es-ES_tradnl" smtClean="0"/>
-              <a:t>29/3/26</a:t>
+              <a:t>7/4/26</a:t>
             </a:fld>
             <a:endParaRPr lang="es-ES_tradnl"/>
           </a:p>
@@ -3788,7 +3793,7 @@
           <a:p>
             <a:fld id="{486E49E1-B6AC-7545-825E-B0154656A4CF}" type="datetimeFigureOut">
               <a:rPr lang="es-ES_tradnl" smtClean="0"/>
-              <a:t>29/3/26</a:t>
+              <a:t>7/4/26</a:t>
             </a:fld>
             <a:endParaRPr lang="es-ES_tradnl"/>
           </a:p>
@@ -4350,38 +4355,6 @@
           </a:p>
         </p:txBody>
       </p:sp>
-      <p:pic>
-        <p:nvPicPr>
-          <p:cNvPr id="8" name="Onlinebild-Platzhalter 7">
-            <a:extLst>
-              <a:ext uri="{FF2B5EF4-FFF2-40B4-BE49-F238E27FC236}">
-                <a16:creationId xmlns:a16="http://schemas.microsoft.com/office/drawing/2014/main" id="{34EAF9D8-59FE-A480-DFDF-94678F4CD809}"/>
-              </a:ext>
-            </a:extLst>
-          </p:cNvPr>
-          <p:cNvPicPr>
-            <a:picLocks noGrp="1" noChangeAspect="1"/>
-          </p:cNvPicPr>
-          <p:nvPr>
-            <p:ph type="clipArt" sz="quarter" idx="15"/>
-          </p:nvPr>
-        </p:nvPicPr>
-        <p:blipFill>
-          <a:blip r:embed="rId2"/>
-          <a:stretch>
-            <a:fillRect/>
-          </a:stretch>
-        </p:blipFill>
-        <p:spPr>
-          <a:xfrm>
-            <a:off x="520700" y="2548869"/>
-            <a:ext cx="5365750" cy="3212825"/>
-          </a:xfrm>
-          <a:prstGeom prst="rect">
-            <a:avLst/>
-          </a:prstGeom>
-        </p:spPr>
-      </p:pic>
       <p:sp>
         <p:nvSpPr>
           <p:cNvPr id="4" name="Fußzeilenplatzhalter 2">
@@ -4511,6 +4484,38 @@
           </a:p>
         </p:txBody>
       </p:sp>
+      <p:pic>
+        <p:nvPicPr>
+          <p:cNvPr id="9" name="Onlinebild-Platzhalter 8">
+            <a:extLst>
+              <a:ext uri="{FF2B5EF4-FFF2-40B4-BE49-F238E27FC236}">
+                <a16:creationId xmlns:a16="http://schemas.microsoft.com/office/drawing/2014/main" id="{9CA23819-1477-CF0D-6DB3-C536B9C50DEA}"/>
+              </a:ext>
+            </a:extLst>
+          </p:cNvPr>
+          <p:cNvPicPr>
+            <a:picLocks noGrp="1" noChangeAspect="1"/>
+          </p:cNvPicPr>
+          <p:nvPr>
+            <p:ph type="clipArt" sz="quarter" idx="15"/>
+          </p:nvPr>
+        </p:nvPicPr>
+        <p:blipFill>
+          <a:blip r:embed="rId2"/>
+          <a:stretch>
+            <a:fillRect/>
+          </a:stretch>
+        </p:blipFill>
+        <p:spPr>
+          <a:xfrm>
+            <a:off x="815491" y="2151063"/>
+            <a:ext cx="4776167" cy="4008437"/>
+          </a:xfrm>
+          <a:prstGeom prst="rect">
+            <a:avLst/>
+          </a:prstGeom>
+        </p:spPr>
+      </p:pic>
     </p:spTree>
     <p:extLst>
       <p:ext uri="{BB962C8B-B14F-4D97-AF65-F5344CB8AC3E}">
@@ -4748,98 +4753,6 @@
           </a:p>
         </p:txBody>
       </p:sp>
-      <p:pic>
-        <p:nvPicPr>
-          <p:cNvPr id="6" name="Onlinebild-Platzhalter 6">
-            <a:extLst>
-              <a:ext uri="{FF2B5EF4-FFF2-40B4-BE49-F238E27FC236}">
-                <a16:creationId xmlns:a16="http://schemas.microsoft.com/office/drawing/2014/main" id="{AF71C577-6E9F-055B-FFDB-ECD951F28EFA}"/>
-              </a:ext>
-            </a:extLst>
-          </p:cNvPr>
-          <p:cNvPicPr>
-            <a:picLocks noChangeAspect="1"/>
-          </p:cNvPicPr>
-          <p:nvPr/>
-        </p:nvPicPr>
-        <p:blipFill>
-          <a:blip r:embed="rId2"/>
-          <a:stretch>
-            <a:fillRect/>
-          </a:stretch>
-        </p:blipFill>
-        <p:spPr>
-          <a:xfrm>
-            <a:off x="7918704" y="2353397"/>
-            <a:ext cx="3699081" cy="2574398"/>
-          </a:xfrm>
-          <a:prstGeom prst="rect">
-            <a:avLst/>
-          </a:prstGeom>
-        </p:spPr>
-      </p:pic>
-      <p:pic>
-        <p:nvPicPr>
-          <p:cNvPr id="9" name="Onlinebild-Platzhalter 4">
-            <a:extLst>
-              <a:ext uri="{FF2B5EF4-FFF2-40B4-BE49-F238E27FC236}">
-                <a16:creationId xmlns:a16="http://schemas.microsoft.com/office/drawing/2014/main" id="{7207B11F-CB08-6602-AB6F-772261B0EAF2}"/>
-              </a:ext>
-            </a:extLst>
-          </p:cNvPr>
-          <p:cNvPicPr>
-            <a:picLocks noGrp="1" noChangeAspect="1"/>
-          </p:cNvPicPr>
-          <p:nvPr>
-            <p:ph type="clipArt" sz="quarter" idx="15"/>
-          </p:nvPr>
-        </p:nvPicPr>
-        <p:blipFill>
-          <a:blip r:embed="rId3"/>
-          <a:stretch>
-            <a:fillRect/>
-          </a:stretch>
-        </p:blipFill>
-        <p:spPr>
-          <a:xfrm>
-            <a:off x="4018114" y="2354089"/>
-            <a:ext cx="3811022" cy="2483779"/>
-          </a:xfrm>
-          <a:prstGeom prst="rect">
-            <a:avLst/>
-          </a:prstGeom>
-        </p:spPr>
-      </p:pic>
-      <p:pic>
-        <p:nvPicPr>
-          <p:cNvPr id="10" name="Onlinebild-Platzhalter 7">
-            <a:extLst>
-              <a:ext uri="{FF2B5EF4-FFF2-40B4-BE49-F238E27FC236}">
-                <a16:creationId xmlns:a16="http://schemas.microsoft.com/office/drawing/2014/main" id="{245B2172-CC51-F2D0-AF56-DEFF090E7591}"/>
-              </a:ext>
-            </a:extLst>
-          </p:cNvPr>
-          <p:cNvPicPr>
-            <a:picLocks noChangeAspect="1"/>
-          </p:cNvPicPr>
-          <p:nvPr/>
-        </p:nvPicPr>
-        <p:blipFill>
-          <a:blip r:embed="rId4"/>
-          <a:stretch>
-            <a:fillRect/>
-          </a:stretch>
-        </p:blipFill>
-        <p:spPr>
-          <a:xfrm>
-            <a:off x="431773" y="2325740"/>
-            <a:ext cx="3496773" cy="2572484"/>
-          </a:xfrm>
-          <a:prstGeom prst="rect">
-            <a:avLst/>
-          </a:prstGeom>
-        </p:spPr>
-      </p:pic>
       <p:sp>
         <p:nvSpPr>
           <p:cNvPr id="2" name="Fußzeilenplatzhalter 2">
@@ -4969,6 +4882,98 @@
           </a:p>
         </p:txBody>
       </p:sp>
+      <p:pic>
+        <p:nvPicPr>
+          <p:cNvPr id="4" name="Onlinebild-Platzhalter 7">
+            <a:extLst>
+              <a:ext uri="{FF2B5EF4-FFF2-40B4-BE49-F238E27FC236}">
+                <a16:creationId xmlns:a16="http://schemas.microsoft.com/office/drawing/2014/main" id="{D082C108-5415-255E-E67B-0F69B2562870}"/>
+              </a:ext>
+            </a:extLst>
+          </p:cNvPr>
+          <p:cNvPicPr>
+            <a:picLocks noChangeAspect="1"/>
+          </p:cNvPicPr>
+          <p:nvPr/>
+        </p:nvPicPr>
+        <p:blipFill>
+          <a:blip r:embed="rId2"/>
+          <a:stretch>
+            <a:fillRect/>
+          </a:stretch>
+        </p:blipFill>
+        <p:spPr>
+          <a:xfrm>
+            <a:off x="7997653" y="2354089"/>
+            <a:ext cx="3608193" cy="2544135"/>
+          </a:xfrm>
+          <a:prstGeom prst="rect">
+            <a:avLst/>
+          </a:prstGeom>
+        </p:spPr>
+      </p:pic>
+      <p:pic>
+        <p:nvPicPr>
+          <p:cNvPr id="8" name="Onlinebild-Platzhalter 6">
+            <a:extLst>
+              <a:ext uri="{FF2B5EF4-FFF2-40B4-BE49-F238E27FC236}">
+                <a16:creationId xmlns:a16="http://schemas.microsoft.com/office/drawing/2014/main" id="{2ACECDB0-DB68-ADA1-77BC-167DE7F4A3AE}"/>
+              </a:ext>
+            </a:extLst>
+          </p:cNvPr>
+          <p:cNvPicPr>
+            <a:picLocks noChangeAspect="1"/>
+          </p:cNvPicPr>
+          <p:nvPr/>
+        </p:nvPicPr>
+        <p:blipFill>
+          <a:blip r:embed="rId3"/>
+          <a:stretch>
+            <a:fillRect/>
+          </a:stretch>
+        </p:blipFill>
+        <p:spPr>
+          <a:xfrm>
+            <a:off x="4194348" y="2325741"/>
+            <a:ext cx="3803305" cy="2592622"/>
+          </a:xfrm>
+          <a:prstGeom prst="rect">
+            <a:avLst/>
+          </a:prstGeom>
+        </p:spPr>
+      </p:pic>
+      <p:pic>
+        <p:nvPicPr>
+          <p:cNvPr id="11" name="Onlinebild-Platzhalter 8">
+            <a:extLst>
+              <a:ext uri="{FF2B5EF4-FFF2-40B4-BE49-F238E27FC236}">
+                <a16:creationId xmlns:a16="http://schemas.microsoft.com/office/drawing/2014/main" id="{F5CEC1BA-A216-4C8A-59E8-7E279215607D}"/>
+              </a:ext>
+            </a:extLst>
+          </p:cNvPr>
+          <p:cNvPicPr>
+            <a:picLocks noGrp="1" noChangeAspect="1"/>
+          </p:cNvPicPr>
+          <p:nvPr>
+            <p:ph type="clipArt" sz="quarter" idx="15"/>
+          </p:nvPr>
+        </p:nvPicPr>
+        <p:blipFill>
+          <a:blip r:embed="rId4"/>
+          <a:stretch>
+            <a:fillRect/>
+          </a:stretch>
+        </p:blipFill>
+        <p:spPr>
+          <a:xfrm>
+            <a:off x="426999" y="2325741"/>
+            <a:ext cx="3591115" cy="2572483"/>
+          </a:xfrm>
+          <a:prstGeom prst="rect">
+            <a:avLst/>
+          </a:prstGeom>
+        </p:spPr>
+      </p:pic>
     </p:spTree>
     <p:extLst>
       <p:ext uri="{BB962C8B-B14F-4D97-AF65-F5344CB8AC3E}">
@@ -5059,14 +5064,14 @@
             <p:ph sz="quarter" idx="14"/>
             <p:extLst>
               <p:ext uri="{D42A27DB-BD31-4B8C-83A1-F6EECF244321}">
-                <p14:modId xmlns:p14="http://schemas.microsoft.com/office/powerpoint/2010/main" val="966736324"/>
+                <p14:modId xmlns:p14="http://schemas.microsoft.com/office/powerpoint/2010/main" val="4148130779"/>
               </p:ext>
             </p:extLst>
           </p:nvPr>
         </p:nvGraphicFramePr>
         <p:xfrm>
           <a:off x="561487" y="4637083"/>
-          <a:ext cx="10532960" cy="1590040"/>
+          <a:ext cx="10532960" cy="1299845"/>
         </p:xfrm>
         <a:graphic>
           <a:graphicData uri="http://schemas.openxmlformats.org/drawingml/2006/table">
@@ -5198,7 +5203,7 @@
                         <a:buNone/>
                       </a:pPr>
                       <a:r>
-                        <a:rPr lang="es-ES_tradnl" sz="1000" noProof="1">
+                        <a:rPr lang="es-ES_tradnl" sz="900" noProof="1">
                           <a:solidFill>
                             <a:schemeClr val="tx1"/>
                           </a:solidFill>
@@ -5208,7 +5213,7 @@
                         </a:rPr>
                         <a:t>Rank</a:t>
                       </a:r>
-                      <a:endParaRPr lang="es-ES_tradnl" sz="1000" noProof="1">
+                      <a:endParaRPr lang="es-ES_tradnl" sz="900" noProof="1">
                         <a:solidFill>
                           <a:schemeClr val="tx1"/>
                         </a:solidFill>
@@ -5250,7 +5255,7 @@
                         <a:buNone/>
                       </a:pPr>
                       <a:r>
-                        <a:rPr lang="es-ES_tradnl" sz="1000" noProof="1">
+                        <a:rPr lang="es-ES_tradnl" sz="900" noProof="1">
                           <a:solidFill>
                             <a:schemeClr val="tx1"/>
                           </a:solidFill>
@@ -5260,7 +5265,7 @@
                         </a:rPr>
                         <a:t>Sweep Val</a:t>
                       </a:r>
-                      <a:endParaRPr lang="es-ES_tradnl" sz="1000" noProof="1">
+                      <a:endParaRPr lang="es-ES_tradnl" sz="900" noProof="1">
                         <a:solidFill>
                           <a:schemeClr val="tx1"/>
                         </a:solidFill>
@@ -5302,7 +5307,7 @@
                         <a:buNone/>
                       </a:pPr>
                       <a:r>
-                        <a:rPr lang="es-ES_tradnl" sz="1000" noProof="1">
+                        <a:rPr lang="es-ES_tradnl" sz="900" noProof="1">
                           <a:solidFill>
                             <a:schemeClr val="tx1"/>
                           </a:solidFill>
@@ -5312,7 +5317,7 @@
                         </a:rPr>
                         <a:t>O1_final</a:t>
                       </a:r>
-                      <a:endParaRPr lang="es-ES_tradnl" sz="1000" noProof="1">
+                      <a:endParaRPr lang="es-ES_tradnl" sz="900" noProof="1">
                         <a:solidFill>
                           <a:schemeClr val="tx1"/>
                         </a:solidFill>
@@ -5357,7 +5362,7 @@
                         <a:buNone/>
                       </a:pPr>
                       <a:r>
-                        <a:rPr lang="es-ES_tradnl" sz="1000" noProof="1">
+                        <a:rPr lang="es-ES_tradnl" sz="900" noProof="1">
                           <a:solidFill>
                             <a:schemeClr val="tx1"/>
                           </a:solidFill>
@@ -5367,7 +5372,7 @@
                         </a:rPr>
                         <a:t>Mp [°]</a:t>
                       </a:r>
-                      <a:endParaRPr lang="es-ES_tradnl" sz="1000" noProof="1">
+                      <a:endParaRPr lang="es-ES_tradnl" sz="900" noProof="1">
                         <a:solidFill>
                           <a:schemeClr val="tx1"/>
                         </a:solidFill>
@@ -5409,7 +5414,7 @@
                         <a:buNone/>
                       </a:pPr>
                       <a:r>
-                        <a:rPr lang="es-ES_tradnl" sz="1000" noProof="1">
+                        <a:rPr lang="es-ES_tradnl" sz="900" noProof="1">
                           <a:solidFill>
                             <a:schemeClr val="tx1"/>
                           </a:solidFill>
@@ -5419,7 +5424,7 @@
                         </a:rPr>
                         <a:t>Mp[%]</a:t>
                       </a:r>
-                      <a:endParaRPr lang="es-ES_tradnl" sz="1000" noProof="1">
+                      <a:endParaRPr lang="es-ES_tradnl" sz="900" noProof="1">
                         <a:solidFill>
                           <a:schemeClr val="tx1"/>
                         </a:solidFill>
@@ -5464,7 +5469,7 @@
                         <a:buNone/>
                       </a:pPr>
                       <a:r>
-                        <a:rPr lang="es-ES_tradnl" sz="1000" noProof="1">
+                        <a:rPr lang="es-ES_tradnl" sz="900" noProof="1">
                           <a:solidFill>
                             <a:schemeClr val="tx1"/>
                           </a:solidFill>
@@ -5474,7 +5479,7 @@
                         </a:rPr>
                         <a:t>T[s]</a:t>
                       </a:r>
-                      <a:endParaRPr lang="es-ES_tradnl" sz="1000" noProof="1">
+                      <a:endParaRPr lang="es-ES_tradnl" sz="900" noProof="1">
                         <a:solidFill>
                           <a:schemeClr val="tx1"/>
                         </a:solidFill>
@@ -5519,7 +5524,7 @@
                         <a:buNone/>
                       </a:pPr>
                       <a:r>
-                        <a:rPr lang="es-ES_tradnl" sz="1000" noProof="1">
+                        <a:rPr lang="es-ES_tradnl" sz="900" noProof="1">
                           <a:solidFill>
                             <a:schemeClr val="tx1"/>
                           </a:solidFill>
@@ -5529,7 +5534,7 @@
                         </a:rPr>
                         <a:t>e_ss_abs[°]</a:t>
                       </a:r>
-                      <a:endParaRPr lang="es-ES_tradnl" sz="1000" noProof="1">
+                      <a:endParaRPr lang="es-ES_tradnl" sz="900" noProof="1">
                         <a:solidFill>
                           <a:schemeClr val="tx1"/>
                         </a:solidFill>
@@ -5571,7 +5576,7 @@
                         <a:buNone/>
                       </a:pPr>
                       <a:r>
-                        <a:rPr lang="es-ES_tradnl" sz="1000" noProof="1">
+                        <a:rPr lang="es-ES_tradnl" sz="900" noProof="1">
                           <a:solidFill>
                             <a:schemeClr val="tx1"/>
                           </a:solidFill>
@@ -5581,7 +5586,7 @@
                         </a:rPr>
                         <a:t>RMSE[°]</a:t>
                       </a:r>
-                      <a:endParaRPr lang="es-ES_tradnl" sz="1000" noProof="1">
+                      <a:endParaRPr lang="es-ES_tradnl" sz="900" noProof="1">
                         <a:solidFill>
                           <a:schemeClr val="tx1"/>
                         </a:solidFill>
@@ -5623,7 +5628,7 @@
                         <a:buNone/>
                       </a:pPr>
                       <a:r>
-                        <a:rPr lang="es-ES_tradnl" sz="1000" noProof="1">
+                        <a:rPr lang="es-ES_tradnl" sz="900" noProof="1">
                           <a:solidFill>
                             <a:schemeClr val="tx1"/>
                           </a:solidFill>
@@ -5633,7 +5638,7 @@
                         </a:rPr>
                         <a:t>ITAE[°s]</a:t>
                       </a:r>
-                      <a:endParaRPr lang="es-ES_tradnl" sz="1000" noProof="1">
+                      <a:endParaRPr lang="es-ES_tradnl" sz="900" noProof="1">
                         <a:solidFill>
                           <a:schemeClr val="tx1"/>
                         </a:solidFill>
@@ -5675,7 +5680,7 @@
                         <a:buNone/>
                       </a:pPr>
                       <a:r>
-                        <a:rPr lang="es-ES_tradnl" sz="1000" noProof="1">
+                        <a:rPr lang="es-ES_tradnl" sz="900" noProof="1">
                           <a:solidFill>
                             <a:schemeClr val="tx1"/>
                           </a:solidFill>
@@ -5685,7 +5690,7 @@
                         </a:rPr>
                         <a:t>Tr[s]</a:t>
                       </a:r>
-                      <a:endParaRPr lang="es-ES_tradnl" sz="1000" noProof="1">
+                      <a:endParaRPr lang="es-ES_tradnl" sz="900" noProof="1">
                         <a:solidFill>
                           <a:schemeClr val="tx1"/>
                         </a:solidFill>
@@ -5727,7 +5732,7 @@
                         <a:buNone/>
                       </a:pPr>
                       <a:r>
-                        <a:rPr lang="es-ES_tradnl" sz="1000" noProof="1">
+                        <a:rPr lang="es-ES_tradnl" sz="900" noProof="1">
                           <a:solidFill>
                             <a:schemeClr val="tx1"/>
                           </a:solidFill>
@@ -5737,7 +5742,7 @@
                         </a:rPr>
                         <a:t>Iosc</a:t>
                       </a:r>
-                      <a:endParaRPr lang="es-ES_tradnl" sz="1000" noProof="1">
+                      <a:endParaRPr lang="es-ES_tradnl" sz="900" noProof="1">
                         <a:solidFill>
                           <a:schemeClr val="tx1"/>
                         </a:solidFill>
@@ -5779,7 +5784,7 @@
                         <a:buNone/>
                       </a:pPr>
                       <a:r>
-                        <a:rPr lang="es-ES_tradnl" sz="1000" noProof="1">
+                        <a:rPr lang="es-ES_tradnl" sz="900" noProof="1">
                           <a:solidFill>
                             <a:schemeClr val="tx1"/>
                           </a:solidFill>
@@ -5789,7 +5794,7 @@
                         </a:rPr>
                         <a:t>U_peak</a:t>
                       </a:r>
-                      <a:endParaRPr lang="es-ES_tradnl" sz="1000" noProof="1">
+                      <a:endParaRPr lang="es-ES_tradnl" sz="900" noProof="1">
                         <a:solidFill>
                           <a:schemeClr val="tx1"/>
                         </a:solidFill>
@@ -5831,7 +5836,7 @@
                         <a:buNone/>
                       </a:pPr>
                       <a:r>
-                        <a:rPr lang="es-ES_tradnl" sz="1000" noProof="1">
+                        <a:rPr lang="es-ES_tradnl" sz="900" noProof="1">
                           <a:solidFill>
                             <a:schemeClr val="tx1"/>
                           </a:solidFill>
@@ -5841,7 +5846,7 @@
                         </a:rPr>
                         <a:t>U_rms</a:t>
                       </a:r>
-                      <a:endParaRPr lang="es-ES_tradnl" sz="1000" noProof="1">
+                      <a:endParaRPr lang="es-ES_tradnl" sz="900" noProof="1">
                         <a:solidFill>
                           <a:schemeClr val="tx1"/>
                         </a:solidFill>
@@ -5883,7 +5888,7 @@
                         <a:buNone/>
                       </a:pPr>
                       <a:r>
-                        <a:rPr lang="es-ES_tradnl" sz="1000" noProof="1">
+                        <a:rPr lang="es-ES_tradnl" sz="900" noProof="1">
                           <a:solidFill>
                             <a:schemeClr val="tx1"/>
                           </a:solidFill>
@@ -5893,7 +5898,7 @@
                         </a:rPr>
                         <a:t>U_energy</a:t>
                       </a:r>
-                      <a:endParaRPr lang="es-ES_tradnl" sz="1000" noProof="1">
+                      <a:endParaRPr lang="es-ES_tradnl" sz="900" noProof="1">
                         <a:solidFill>
                           <a:schemeClr val="tx1"/>
                         </a:solidFill>
@@ -5935,7 +5940,7 @@
                         <a:buNone/>
                       </a:pPr>
                       <a:r>
-                        <a:rPr lang="es-ES_tradnl" sz="1000" noProof="1">
+                        <a:rPr lang="es-ES_tradnl" sz="900" noProof="1">
                           <a:solidFill>
                             <a:schemeClr val="tx1"/>
                           </a:solidFill>
@@ -5945,7 +5950,7 @@
                         </a:rPr>
                         <a:t>U_abs</a:t>
                       </a:r>
-                      <a:endParaRPr lang="es-ES_tradnl" sz="1000" noProof="1">
+                      <a:endParaRPr lang="es-ES_tradnl" sz="900" noProof="1">
                         <a:solidFill>
                           <a:schemeClr val="tx1"/>
                         </a:solidFill>
@@ -5987,7 +5992,7 @@
                         <a:buNone/>
                       </a:pPr>
                       <a:r>
-                        <a:rPr lang="es-ES_tradnl" sz="1000" noProof="1">
+                        <a:rPr lang="es-ES_tradnl" sz="900" noProof="1">
                           <a:solidFill>
                             <a:schemeClr val="tx1"/>
                           </a:solidFill>
@@ -5997,7 +6002,7 @@
                         </a:rPr>
                         <a:t>U_TV</a:t>
                       </a:r>
-                      <a:endParaRPr lang="es-ES_tradnl" sz="1000" noProof="1">
+                      <a:endParaRPr lang="es-ES_tradnl" sz="900" noProof="1">
                         <a:solidFill>
                           <a:schemeClr val="tx1"/>
                         </a:solidFill>
@@ -6046,7 +6051,7 @@
                         <a:buNone/>
                       </a:pPr>
                       <a:r>
-                        <a:rPr lang="es-ES_tradnl" sz="1000" b="0" noProof="1">
+                        <a:rPr lang="es-ES_tradnl" sz="900" b="0" noProof="1">
                           <a:solidFill>
                             <a:schemeClr val="tx1"/>
                           </a:solidFill>
@@ -6056,7 +6061,7 @@
                         </a:rPr>
                         <a:t>1</a:t>
                       </a:r>
-                      <a:endParaRPr lang="es-ES_tradnl" sz="1000" b="0" noProof="1">
+                      <a:endParaRPr lang="es-ES_tradnl" sz="900" b="0" noProof="1">
                         <a:solidFill>
                           <a:schemeClr val="tx1"/>
                         </a:solidFill>
@@ -6089,7 +6094,7 @@
                         <a:buNone/>
                       </a:pPr>
                       <a:r>
-                        <a:rPr lang="es-ES_tradnl" sz="1000" dirty="0">
+                        <a:rPr lang="es-ES_tradnl" sz="900" dirty="0">
                           <a:effectLst/>
                           <a:latin typeface="Times New Roman" panose="02020603050405020304" pitchFamily="18" charset="0"/>
                           <a:ea typeface="Times New Roman" panose="02020603050405020304" pitchFamily="18" charset="0"/>
@@ -6121,7 +6126,7 @@
                         <a:buNone/>
                       </a:pPr>
                       <a:r>
-                        <a:rPr lang="es-ES_tradnl" sz="1000" dirty="0">
+                        <a:rPr lang="es-ES_tradnl" sz="900" dirty="0">
                           <a:effectLst/>
                           <a:latin typeface="Times New Roman" panose="02020603050405020304" pitchFamily="18" charset="0"/>
                           <a:ea typeface="Times New Roman" panose="02020603050405020304" pitchFamily="18" charset="0"/>
@@ -6153,7 +6158,7 @@
                         <a:buNone/>
                       </a:pPr>
                       <a:r>
-                        <a:rPr lang="es-ES_tradnl" sz="1000" dirty="0">
+                        <a:rPr lang="es-ES_tradnl" sz="900" dirty="0">
                           <a:effectLst/>
                           <a:latin typeface="Times New Roman" panose="02020603050405020304" pitchFamily="18" charset="0"/>
                           <a:ea typeface="Times New Roman" panose="02020603050405020304" pitchFamily="18" charset="0"/>
@@ -6185,7 +6190,7 @@
                         <a:buNone/>
                       </a:pPr>
                       <a:r>
-                        <a:rPr lang="es-ES_tradnl" sz="1000" dirty="0">
+                        <a:rPr lang="es-ES_tradnl" sz="900" dirty="0">
                           <a:effectLst/>
                           <a:latin typeface="Times New Roman" panose="02020603050405020304" pitchFamily="18" charset="0"/>
                           <a:ea typeface="Times New Roman" panose="02020603050405020304" pitchFamily="18" charset="0"/>
@@ -6217,7 +6222,7 @@
                         <a:buNone/>
                       </a:pPr>
                       <a:r>
-                        <a:rPr lang="es-ES_tradnl" sz="1000" dirty="0">
+                        <a:rPr lang="es-ES_tradnl" sz="900" dirty="0">
                           <a:effectLst/>
                           <a:latin typeface="Times New Roman" panose="02020603050405020304" pitchFamily="18" charset="0"/>
                           <a:ea typeface="Times New Roman" panose="02020603050405020304" pitchFamily="18" charset="0"/>
@@ -6249,7 +6254,7 @@
                         <a:buNone/>
                       </a:pPr>
                       <a:r>
-                        <a:rPr lang="es-ES_tradnl" sz="1000" dirty="0">
+                        <a:rPr lang="es-ES_tradnl" sz="900" dirty="0">
                           <a:effectLst/>
                           <a:latin typeface="Times New Roman" panose="02020603050405020304" pitchFamily="18" charset="0"/>
                           <a:ea typeface="Times New Roman" panose="02020603050405020304" pitchFamily="18" charset="0"/>
@@ -6281,7 +6286,7 @@
                         <a:buNone/>
                       </a:pPr>
                       <a:r>
-                        <a:rPr lang="es-ES_tradnl" sz="1000" dirty="0">
+                        <a:rPr lang="es-ES_tradnl" sz="900" dirty="0">
                           <a:effectLst/>
                           <a:latin typeface="Times New Roman" panose="02020603050405020304" pitchFamily="18" charset="0"/>
                           <a:ea typeface="Times New Roman" panose="02020603050405020304" pitchFamily="18" charset="0"/>
@@ -6313,7 +6318,7 @@
                         <a:buNone/>
                       </a:pPr>
                       <a:r>
-                        <a:rPr lang="es-ES_tradnl" sz="1000" dirty="0">
+                        <a:rPr lang="es-ES_tradnl" sz="900" dirty="0">
                           <a:effectLst/>
                           <a:latin typeface="Times New Roman" panose="02020603050405020304" pitchFamily="18" charset="0"/>
                           <a:ea typeface="Times New Roman" panose="02020603050405020304" pitchFamily="18" charset="0"/>
@@ -6345,7 +6350,7 @@
                         <a:buNone/>
                       </a:pPr>
                       <a:r>
-                        <a:rPr lang="es-ES_tradnl" sz="1000" dirty="0">
+                        <a:rPr lang="es-ES_tradnl" sz="900" dirty="0">
                           <a:effectLst/>
                           <a:latin typeface="Times New Roman" panose="02020603050405020304" pitchFamily="18" charset="0"/>
                           <a:ea typeface="Times New Roman" panose="02020603050405020304" pitchFamily="18" charset="0"/>
@@ -6377,7 +6382,7 @@
                         <a:buNone/>
                       </a:pPr>
                       <a:r>
-                        <a:rPr lang="es-ES_tradnl" sz="1000" dirty="0">
+                        <a:rPr lang="es-ES_tradnl" sz="900" dirty="0">
                           <a:effectLst/>
                           <a:latin typeface="Times New Roman" panose="02020603050405020304" pitchFamily="18" charset="0"/>
                           <a:ea typeface="Times New Roman" panose="02020603050405020304" pitchFamily="18" charset="0"/>
@@ -6409,17 +6414,23 @@
                         <a:buNone/>
                       </a:pPr>
                       <a:r>
-                        <a:rPr lang="es-ES_tradnl" sz="1000" dirty="0">
-                          <a:effectLst/>
-                          <a:latin typeface="Times New Roman" panose="02020603050405020304" pitchFamily="18" charset="0"/>
-                          <a:ea typeface="Times New Roman" panose="02020603050405020304" pitchFamily="18" charset="0"/>
-                          <a:cs typeface="Times New Roman" panose="02020603050405020304" pitchFamily="18" charset="0"/>
-                        </a:rPr>
-                        <a:t>9.90</a:t>
-                      </a:r>
-                    </a:p>
-                  </a:txBody>
-                  <a:tcPr marL="68580" marR="68580" marT="0" marB="0" anchor="ctr">
+                        <a:rPr lang="es-ES" sz="900">
+                          <a:effectLst/>
+                          <a:latin typeface="Times New Roman" panose="02020603050405020304" pitchFamily="18" charset="0"/>
+                          <a:ea typeface="Times New Roman" panose="02020603050405020304" pitchFamily="18" charset="0"/>
+                          <a:cs typeface="Times New Roman" panose="02020603050405020304" pitchFamily="18" charset="0"/>
+                        </a:rPr>
+                        <a:t>6.00</a:t>
+                      </a:r>
+                      <a:endParaRPr lang="de-DE" sz="900">
+                        <a:effectLst/>
+                        <a:latin typeface="Times New Roman" panose="02020603050405020304" pitchFamily="18" charset="0"/>
+                        <a:ea typeface="Times New Roman" panose="02020603050405020304" pitchFamily="18" charset="0"/>
+                        <a:cs typeface="Times New Roman" panose="02020603050405020304" pitchFamily="18" charset="0"/>
+                      </a:endParaRPr>
+                    </a:p>
+                  </a:txBody>
+                  <a:tcPr marL="68580" marR="68580" marT="0" marB="0">
                     <a:lnT w="12700" cap="flat" cmpd="sng" algn="ctr">
                       <a:solidFill>
                         <a:schemeClr val="tx1"/>
@@ -6441,17 +6452,23 @@
                         <a:buNone/>
                       </a:pPr>
                       <a:r>
-                        <a:rPr lang="es-ES_tradnl" sz="1000" dirty="0">
-                          <a:effectLst/>
-                          <a:latin typeface="Times New Roman" panose="02020603050405020304" pitchFamily="18" charset="0"/>
-                          <a:ea typeface="Times New Roman" panose="02020603050405020304" pitchFamily="18" charset="0"/>
-                          <a:cs typeface="Times New Roman" panose="02020603050405020304" pitchFamily="18" charset="0"/>
-                        </a:rPr>
-                        <a:t>2.63</a:t>
-                      </a:r>
-                    </a:p>
-                  </a:txBody>
-                  <a:tcPr marL="68580" marR="68580" marT="0" marB="0" anchor="ctr">
+                        <a:rPr lang="es-ES" sz="900">
+                          <a:effectLst/>
+                          <a:latin typeface="Times New Roman" panose="02020603050405020304" pitchFamily="18" charset="0"/>
+                          <a:ea typeface="Times New Roman" panose="02020603050405020304" pitchFamily="18" charset="0"/>
+                          <a:cs typeface="Times New Roman" panose="02020603050405020304" pitchFamily="18" charset="0"/>
+                        </a:rPr>
+                        <a:t>1.99</a:t>
+                      </a:r>
+                      <a:endParaRPr lang="de-DE" sz="900">
+                        <a:effectLst/>
+                        <a:latin typeface="Times New Roman" panose="02020603050405020304" pitchFamily="18" charset="0"/>
+                        <a:ea typeface="Times New Roman" panose="02020603050405020304" pitchFamily="18" charset="0"/>
+                        <a:cs typeface="Times New Roman" panose="02020603050405020304" pitchFamily="18" charset="0"/>
+                      </a:endParaRPr>
+                    </a:p>
+                  </a:txBody>
+                  <a:tcPr marL="68580" marR="68580" marT="0" marB="0">
                     <a:lnT w="12700" cap="flat" cmpd="sng" algn="ctr">
                       <a:solidFill>
                         <a:schemeClr val="tx1"/>
@@ -6473,17 +6490,23 @@
                         <a:buNone/>
                       </a:pPr>
                       <a:r>
-                        <a:rPr lang="es-ES_tradnl" sz="1000" dirty="0">
-                          <a:effectLst/>
-                          <a:latin typeface="Times New Roman" panose="02020603050405020304" pitchFamily="18" charset="0"/>
-                          <a:ea typeface="Times New Roman" panose="02020603050405020304" pitchFamily="18" charset="0"/>
-                          <a:cs typeface="Times New Roman" panose="02020603050405020304" pitchFamily="18" charset="0"/>
-                        </a:rPr>
-                        <a:t>35.17</a:t>
-                      </a:r>
-                    </a:p>
-                  </a:txBody>
-                  <a:tcPr marL="68580" marR="68580" marT="0" marB="0" anchor="ctr">
+                        <a:rPr lang="es-ES" sz="900">
+                          <a:effectLst/>
+                          <a:latin typeface="Times New Roman" panose="02020603050405020304" pitchFamily="18" charset="0"/>
+                          <a:ea typeface="Times New Roman" panose="02020603050405020304" pitchFamily="18" charset="0"/>
+                          <a:cs typeface="Times New Roman" panose="02020603050405020304" pitchFamily="18" charset="0"/>
+                        </a:rPr>
+                        <a:t>20.71</a:t>
+                      </a:r>
+                      <a:endParaRPr lang="de-DE" sz="900">
+                        <a:effectLst/>
+                        <a:latin typeface="Times New Roman" panose="02020603050405020304" pitchFamily="18" charset="0"/>
+                        <a:ea typeface="Times New Roman" panose="02020603050405020304" pitchFamily="18" charset="0"/>
+                        <a:cs typeface="Times New Roman" panose="02020603050405020304" pitchFamily="18" charset="0"/>
+                      </a:endParaRPr>
+                    </a:p>
+                  </a:txBody>
+                  <a:tcPr marL="68580" marR="68580" marT="0" marB="0">
                     <a:lnT w="12700" cap="flat" cmpd="sng" algn="ctr">
                       <a:solidFill>
                         <a:schemeClr val="tx1"/>
@@ -6505,17 +6528,23 @@
                         <a:buNone/>
                       </a:pPr>
                       <a:r>
-                        <a:rPr lang="es-ES_tradnl" sz="1000" dirty="0">
-                          <a:effectLst/>
-                          <a:latin typeface="Times New Roman" panose="02020603050405020304" pitchFamily="18" charset="0"/>
-                          <a:ea typeface="Times New Roman" panose="02020603050405020304" pitchFamily="18" charset="0"/>
-                          <a:cs typeface="Times New Roman" panose="02020603050405020304" pitchFamily="18" charset="0"/>
-                        </a:rPr>
-                        <a:t>4.98</a:t>
-                      </a:r>
-                    </a:p>
-                  </a:txBody>
-                  <a:tcPr marL="68580" marR="68580" marT="0" marB="0" anchor="ctr">
+                        <a:rPr lang="es-ES" sz="900">
+                          <a:effectLst/>
+                          <a:latin typeface="Times New Roman" panose="02020603050405020304" pitchFamily="18" charset="0"/>
+                          <a:ea typeface="Times New Roman" panose="02020603050405020304" pitchFamily="18" charset="0"/>
+                          <a:cs typeface="Times New Roman" panose="02020603050405020304" pitchFamily="18" charset="0"/>
+                        </a:rPr>
+                        <a:t>4.27</a:t>
+                      </a:r>
+                      <a:endParaRPr lang="de-DE" sz="900">
+                        <a:effectLst/>
+                        <a:latin typeface="Times New Roman" panose="02020603050405020304" pitchFamily="18" charset="0"/>
+                        <a:ea typeface="Times New Roman" panose="02020603050405020304" pitchFamily="18" charset="0"/>
+                        <a:cs typeface="Times New Roman" panose="02020603050405020304" pitchFamily="18" charset="0"/>
+                      </a:endParaRPr>
+                    </a:p>
+                  </a:txBody>
+                  <a:tcPr marL="68580" marR="68580" marT="0" marB="0">
                     <a:lnT w="12700" cap="flat" cmpd="sng" algn="ctr">
                       <a:solidFill>
                         <a:schemeClr val="tx1"/>
@@ -6537,17 +6566,23 @@
                         <a:buNone/>
                       </a:pPr>
                       <a:r>
-                        <a:rPr lang="es-ES_tradnl" sz="1000" dirty="0">
-                          <a:effectLst/>
-                          <a:latin typeface="Times New Roman" panose="02020603050405020304" pitchFamily="18" charset="0"/>
-                          <a:ea typeface="Times New Roman" panose="02020603050405020304" pitchFamily="18" charset="0"/>
-                          <a:cs typeface="Times New Roman" panose="02020603050405020304" pitchFamily="18" charset="0"/>
-                        </a:rPr>
-                        <a:t>40.63</a:t>
-                      </a:r>
-                    </a:p>
-                  </a:txBody>
-                  <a:tcPr marL="68580" marR="68580" marT="0" marB="0" anchor="ctr">
+                        <a:rPr lang="es-ES" sz="900">
+                          <a:effectLst/>
+                          <a:latin typeface="Times New Roman" panose="02020603050405020304" pitchFamily="18" charset="0"/>
+                          <a:ea typeface="Times New Roman" panose="02020603050405020304" pitchFamily="18" charset="0"/>
+                          <a:cs typeface="Times New Roman" panose="02020603050405020304" pitchFamily="18" charset="0"/>
+                        </a:rPr>
+                        <a:t>40.11</a:t>
+                      </a:r>
+                      <a:endParaRPr lang="de-DE" sz="900">
+                        <a:effectLst/>
+                        <a:latin typeface="Times New Roman" panose="02020603050405020304" pitchFamily="18" charset="0"/>
+                        <a:ea typeface="Times New Roman" panose="02020603050405020304" pitchFamily="18" charset="0"/>
+                        <a:cs typeface="Times New Roman" panose="02020603050405020304" pitchFamily="18" charset="0"/>
+                      </a:endParaRPr>
+                    </a:p>
+                  </a:txBody>
+                  <a:tcPr marL="68580" marR="68580" marT="0" marB="0">
                     <a:lnT w="12700" cap="flat" cmpd="sng" algn="ctr">
                       <a:solidFill>
                         <a:schemeClr val="tx1"/>
@@ -6576,7 +6611,7 @@
                         <a:buNone/>
                       </a:pPr>
                       <a:r>
-                        <a:rPr lang="es-ES_tradnl" sz="1000" b="0" noProof="1">
+                        <a:rPr lang="es-ES_tradnl" sz="900" b="0" noProof="1">
                           <a:solidFill>
                             <a:schemeClr val="tx1"/>
                           </a:solidFill>
@@ -6602,7 +6637,7 @@
                         <a:buNone/>
                       </a:pPr>
                       <a:r>
-                        <a:rPr lang="es-ES_tradnl" sz="1000" dirty="0">
+                        <a:rPr lang="es-ES_tradnl" sz="900" dirty="0">
                           <a:effectLst/>
                           <a:latin typeface="Times New Roman" panose="02020603050405020304" pitchFamily="18" charset="0"/>
                           <a:ea typeface="Times New Roman" panose="02020603050405020304" pitchFamily="18" charset="0"/>
@@ -6625,7 +6660,7 @@
                         <a:buNone/>
                       </a:pPr>
                       <a:r>
-                        <a:rPr lang="es-ES_tradnl" sz="1000" dirty="0">
+                        <a:rPr lang="es-ES_tradnl" sz="900" dirty="0">
                           <a:effectLst/>
                           <a:latin typeface="Times New Roman" panose="02020603050405020304" pitchFamily="18" charset="0"/>
                           <a:ea typeface="Times New Roman" panose="02020603050405020304" pitchFamily="18" charset="0"/>
@@ -6648,7 +6683,7 @@
                         <a:buNone/>
                       </a:pPr>
                       <a:r>
-                        <a:rPr lang="es-ES_tradnl" sz="1000" dirty="0">
+                        <a:rPr lang="es-ES_tradnl" sz="900" dirty="0">
                           <a:effectLst/>
                           <a:latin typeface="Times New Roman" panose="02020603050405020304" pitchFamily="18" charset="0"/>
                           <a:ea typeface="Times New Roman" panose="02020603050405020304" pitchFamily="18" charset="0"/>
@@ -6671,7 +6706,7 @@
                         <a:buNone/>
                       </a:pPr>
                       <a:r>
-                        <a:rPr lang="es-ES_tradnl" sz="1000" dirty="0">
+                        <a:rPr lang="es-ES_tradnl" sz="900" dirty="0">
                           <a:effectLst/>
                           <a:latin typeface="Times New Roman" panose="02020603050405020304" pitchFamily="18" charset="0"/>
                           <a:ea typeface="Times New Roman" panose="02020603050405020304" pitchFamily="18" charset="0"/>
@@ -6694,7 +6729,7 @@
                         <a:buNone/>
                       </a:pPr>
                       <a:r>
-                        <a:rPr lang="es-ES_tradnl" sz="1000" dirty="0">
+                        <a:rPr lang="es-ES_tradnl" sz="900" dirty="0">
                           <a:effectLst/>
                           <a:latin typeface="Times New Roman" panose="02020603050405020304" pitchFamily="18" charset="0"/>
                           <a:ea typeface="Times New Roman" panose="02020603050405020304" pitchFamily="18" charset="0"/>
@@ -6717,7 +6752,7 @@
                         <a:buNone/>
                       </a:pPr>
                       <a:r>
-                        <a:rPr lang="es-ES_tradnl" sz="1000" dirty="0">
+                        <a:rPr lang="es-ES_tradnl" sz="900" dirty="0">
                           <a:effectLst/>
                           <a:latin typeface="Times New Roman" panose="02020603050405020304" pitchFamily="18" charset="0"/>
                           <a:ea typeface="Times New Roman" panose="02020603050405020304" pitchFamily="18" charset="0"/>
@@ -6740,7 +6775,7 @@
                         <a:buNone/>
                       </a:pPr>
                       <a:r>
-                        <a:rPr lang="es-ES_tradnl" sz="1000" dirty="0">
+                        <a:rPr lang="es-ES_tradnl" sz="900" dirty="0">
                           <a:effectLst/>
                           <a:latin typeface="Times New Roman" panose="02020603050405020304" pitchFamily="18" charset="0"/>
                           <a:ea typeface="Times New Roman" panose="02020603050405020304" pitchFamily="18" charset="0"/>
@@ -6763,7 +6798,7 @@
                         <a:buNone/>
                       </a:pPr>
                       <a:r>
-                        <a:rPr lang="es-ES_tradnl" sz="1000" dirty="0">
+                        <a:rPr lang="es-ES_tradnl" sz="900" dirty="0">
                           <a:effectLst/>
                           <a:latin typeface="Times New Roman" panose="02020603050405020304" pitchFamily="18" charset="0"/>
                           <a:ea typeface="Times New Roman" panose="02020603050405020304" pitchFamily="18" charset="0"/>
@@ -6786,7 +6821,7 @@
                         <a:buNone/>
                       </a:pPr>
                       <a:r>
-                        <a:rPr lang="es-ES_tradnl" sz="1000" dirty="0">
+                        <a:rPr lang="es-ES_tradnl" sz="900" dirty="0">
                           <a:effectLst/>
                           <a:latin typeface="Times New Roman" panose="02020603050405020304" pitchFamily="18" charset="0"/>
                           <a:ea typeface="Times New Roman" panose="02020603050405020304" pitchFamily="18" charset="0"/>
@@ -6809,7 +6844,7 @@
                         <a:buNone/>
                       </a:pPr>
                       <a:r>
-                        <a:rPr lang="es-ES_tradnl" sz="1000" dirty="0">
+                        <a:rPr lang="es-ES_tradnl" sz="900" dirty="0">
                           <a:effectLst/>
                           <a:latin typeface="Times New Roman" panose="02020603050405020304" pitchFamily="18" charset="0"/>
                           <a:ea typeface="Times New Roman" panose="02020603050405020304" pitchFamily="18" charset="0"/>
@@ -6832,109 +6867,139 @@
                         <a:buNone/>
                       </a:pPr>
                       <a:r>
-                        <a:rPr lang="es-ES_tradnl" sz="1000" dirty="0">
-                          <a:effectLst/>
-                          <a:latin typeface="Times New Roman" panose="02020603050405020304" pitchFamily="18" charset="0"/>
-                          <a:ea typeface="Times New Roman" panose="02020603050405020304" pitchFamily="18" charset="0"/>
-                          <a:cs typeface="Times New Roman" panose="02020603050405020304" pitchFamily="18" charset="0"/>
-                        </a:rPr>
-                        <a:t>10.00</a:t>
-                      </a:r>
-                    </a:p>
-                  </a:txBody>
-                  <a:tcPr marL="68580" marR="68580" marT="0" marB="0" anchor="ctr">
-                    <a:noFill/>
-                  </a:tcPr>
-                </a:tc>
-                <a:tc>
-                  <a:txBody>
-                    <a:bodyPr/>
-                    <a:lstStyle/>
-                    <a:p>
-                      <a:pPr algn="ctr">
-                        <a:buNone/>
-                      </a:pPr>
-                      <a:r>
-                        <a:rPr lang="es-ES_tradnl" sz="1000" dirty="0">
-                          <a:effectLst/>
-                          <a:latin typeface="Times New Roman" panose="02020603050405020304" pitchFamily="18" charset="0"/>
-                          <a:ea typeface="Times New Roman" panose="02020603050405020304" pitchFamily="18" charset="0"/>
-                          <a:cs typeface="Times New Roman" panose="02020603050405020304" pitchFamily="18" charset="0"/>
-                        </a:rPr>
-                        <a:t>2.40</a:t>
-                      </a:r>
-                    </a:p>
-                  </a:txBody>
-                  <a:tcPr marL="68580" marR="68580" marT="0" marB="0" anchor="ctr">
-                    <a:noFill/>
-                  </a:tcPr>
-                </a:tc>
-                <a:tc>
-                  <a:txBody>
-                    <a:bodyPr/>
-                    <a:lstStyle/>
-                    <a:p>
-                      <a:pPr algn="ctr">
-                        <a:buNone/>
-                      </a:pPr>
-                      <a:r>
-                        <a:rPr lang="es-ES_tradnl" sz="1000" dirty="0">
-                          <a:effectLst/>
-                          <a:latin typeface="Times New Roman" panose="02020603050405020304" pitchFamily="18" charset="0"/>
-                          <a:ea typeface="Times New Roman" panose="02020603050405020304" pitchFamily="18" charset="0"/>
-                          <a:cs typeface="Times New Roman" panose="02020603050405020304" pitchFamily="18" charset="0"/>
-                        </a:rPr>
-                        <a:t>28.28</a:t>
-                      </a:r>
-                    </a:p>
-                  </a:txBody>
-                  <a:tcPr marL="68580" marR="68580" marT="0" marB="0" anchor="ctr">
-                    <a:noFill/>
-                  </a:tcPr>
-                </a:tc>
-                <a:tc>
-                  <a:txBody>
-                    <a:bodyPr/>
-                    <a:lstStyle/>
-                    <a:p>
-                      <a:pPr algn="ctr">
-                        <a:buNone/>
-                      </a:pPr>
-                      <a:r>
-                        <a:rPr lang="es-ES_tradnl" sz="1000" dirty="0">
-                          <a:effectLst/>
-                          <a:latin typeface="Times New Roman" panose="02020603050405020304" pitchFamily="18" charset="0"/>
-                          <a:ea typeface="Times New Roman" panose="02020603050405020304" pitchFamily="18" charset="0"/>
-                          <a:cs typeface="Times New Roman" panose="02020603050405020304" pitchFamily="18" charset="0"/>
-                        </a:rPr>
-                        <a:t>4.46</a:t>
-                      </a:r>
-                    </a:p>
-                  </a:txBody>
-                  <a:tcPr marL="68580" marR="68580" marT="0" marB="0" anchor="ctr">
-                    <a:noFill/>
-                  </a:tcPr>
-                </a:tc>
-                <a:tc>
-                  <a:txBody>
-                    <a:bodyPr/>
-                    <a:lstStyle/>
-                    <a:p>
-                      <a:pPr algn="ctr">
-                        <a:buNone/>
-                      </a:pPr>
-                      <a:r>
-                        <a:rPr lang="es-ES_tradnl" sz="1000" dirty="0">
-                          <a:effectLst/>
-                          <a:latin typeface="Times New Roman" panose="02020603050405020304" pitchFamily="18" charset="0"/>
-                          <a:ea typeface="Times New Roman" panose="02020603050405020304" pitchFamily="18" charset="0"/>
-                          <a:cs typeface="Times New Roman" panose="02020603050405020304" pitchFamily="18" charset="0"/>
-                        </a:rPr>
-                        <a:t>38.47</a:t>
-                      </a:r>
-                    </a:p>
-                  </a:txBody>
-                  <a:tcPr marL="68580" marR="68580" marT="0" marB="0" anchor="ctr">
+                        <a:rPr lang="es-ES" sz="900">
+                          <a:effectLst/>
+                          <a:latin typeface="Times New Roman" panose="02020603050405020304" pitchFamily="18" charset="0"/>
+                          <a:ea typeface="Times New Roman" panose="02020603050405020304" pitchFamily="18" charset="0"/>
+                          <a:cs typeface="Times New Roman" panose="02020603050405020304" pitchFamily="18" charset="0"/>
+                        </a:rPr>
+                        <a:t>6.00</a:t>
+                      </a:r>
+                      <a:endParaRPr lang="de-DE" sz="900">
+                        <a:effectLst/>
+                        <a:latin typeface="Times New Roman" panose="02020603050405020304" pitchFamily="18" charset="0"/>
+                        <a:ea typeface="Times New Roman" panose="02020603050405020304" pitchFamily="18" charset="0"/>
+                        <a:cs typeface="Times New Roman" panose="02020603050405020304" pitchFamily="18" charset="0"/>
+                      </a:endParaRPr>
+                    </a:p>
+                  </a:txBody>
+                  <a:tcPr marL="68580" marR="68580" marT="0" marB="0">
+                    <a:noFill/>
+                  </a:tcPr>
+                </a:tc>
+                <a:tc>
+                  <a:txBody>
+                    <a:bodyPr/>
+                    <a:lstStyle/>
+                    <a:p>
+                      <a:pPr algn="ctr">
+                        <a:buNone/>
+                      </a:pPr>
+                      <a:r>
+                        <a:rPr lang="es-ES" sz="900">
+                          <a:effectLst/>
+                          <a:latin typeface="Times New Roman" panose="02020603050405020304" pitchFamily="18" charset="0"/>
+                          <a:ea typeface="Times New Roman" panose="02020603050405020304" pitchFamily="18" charset="0"/>
+                          <a:cs typeface="Times New Roman" panose="02020603050405020304" pitchFamily="18" charset="0"/>
+                        </a:rPr>
+                        <a:t>1.90</a:t>
+                      </a:r>
+                      <a:endParaRPr lang="de-DE" sz="900">
+                        <a:effectLst/>
+                        <a:latin typeface="Times New Roman" panose="02020603050405020304" pitchFamily="18" charset="0"/>
+                        <a:ea typeface="Times New Roman" panose="02020603050405020304" pitchFamily="18" charset="0"/>
+                        <a:cs typeface="Times New Roman" panose="02020603050405020304" pitchFamily="18" charset="0"/>
+                      </a:endParaRPr>
+                    </a:p>
+                  </a:txBody>
+                  <a:tcPr marL="68580" marR="68580" marT="0" marB="0">
+                    <a:noFill/>
+                  </a:tcPr>
+                </a:tc>
+                <a:tc>
+                  <a:txBody>
+                    <a:bodyPr/>
+                    <a:lstStyle/>
+                    <a:p>
+                      <a:pPr algn="ctr">
+                        <a:buNone/>
+                      </a:pPr>
+                      <a:r>
+                        <a:rPr lang="es-ES" sz="900">
+                          <a:effectLst/>
+                          <a:latin typeface="Times New Roman" panose="02020603050405020304" pitchFamily="18" charset="0"/>
+                          <a:ea typeface="Times New Roman" panose="02020603050405020304" pitchFamily="18" charset="0"/>
+                          <a:cs typeface="Times New Roman" panose="02020603050405020304" pitchFamily="18" charset="0"/>
+                        </a:rPr>
+                        <a:t>18.86</a:t>
+                      </a:r>
+                      <a:endParaRPr lang="de-DE" sz="900">
+                        <a:effectLst/>
+                        <a:latin typeface="Times New Roman" panose="02020603050405020304" pitchFamily="18" charset="0"/>
+                        <a:ea typeface="Times New Roman" panose="02020603050405020304" pitchFamily="18" charset="0"/>
+                        <a:cs typeface="Times New Roman" panose="02020603050405020304" pitchFamily="18" charset="0"/>
+                      </a:endParaRPr>
+                    </a:p>
+                  </a:txBody>
+                  <a:tcPr marL="68580" marR="68580" marT="0" marB="0">
+                    <a:noFill/>
+                  </a:tcPr>
+                </a:tc>
+                <a:tc>
+                  <a:txBody>
+                    <a:bodyPr/>
+                    <a:lstStyle/>
+                    <a:p>
+                      <a:pPr algn="ctr">
+                        <a:buNone/>
+                      </a:pPr>
+                      <a:r>
+                        <a:rPr lang="es-ES" sz="900">
+                          <a:effectLst/>
+                          <a:latin typeface="Times New Roman" panose="02020603050405020304" pitchFamily="18" charset="0"/>
+                          <a:ea typeface="Times New Roman" panose="02020603050405020304" pitchFamily="18" charset="0"/>
+                          <a:cs typeface="Times New Roman" panose="02020603050405020304" pitchFamily="18" charset="0"/>
+                        </a:rPr>
+                        <a:t>3.90</a:t>
+                      </a:r>
+                      <a:endParaRPr lang="de-DE" sz="900">
+                        <a:effectLst/>
+                        <a:latin typeface="Times New Roman" panose="02020603050405020304" pitchFamily="18" charset="0"/>
+                        <a:ea typeface="Times New Roman" panose="02020603050405020304" pitchFamily="18" charset="0"/>
+                        <a:cs typeface="Times New Roman" panose="02020603050405020304" pitchFamily="18" charset="0"/>
+                      </a:endParaRPr>
+                    </a:p>
+                  </a:txBody>
+                  <a:tcPr marL="68580" marR="68580" marT="0" marB="0">
+                    <a:noFill/>
+                  </a:tcPr>
+                </a:tc>
+                <a:tc>
+                  <a:txBody>
+                    <a:bodyPr/>
+                    <a:lstStyle/>
+                    <a:p>
+                      <a:pPr algn="ctr">
+                        <a:buNone/>
+                      </a:pPr>
+                      <a:r>
+                        <a:rPr lang="es-ES" sz="900">
+                          <a:effectLst/>
+                          <a:latin typeface="Times New Roman" panose="02020603050405020304" pitchFamily="18" charset="0"/>
+                          <a:ea typeface="Times New Roman" panose="02020603050405020304" pitchFamily="18" charset="0"/>
+                          <a:cs typeface="Times New Roman" panose="02020603050405020304" pitchFamily="18" charset="0"/>
+                        </a:rPr>
+                        <a:t>27.31</a:t>
+                      </a:r>
+                      <a:endParaRPr lang="de-DE" sz="900">
+                        <a:effectLst/>
+                        <a:latin typeface="Times New Roman" panose="02020603050405020304" pitchFamily="18" charset="0"/>
+                        <a:ea typeface="Times New Roman" panose="02020603050405020304" pitchFamily="18" charset="0"/>
+                        <a:cs typeface="Times New Roman" panose="02020603050405020304" pitchFamily="18" charset="0"/>
+                      </a:endParaRPr>
+                    </a:p>
+                  </a:txBody>
+                  <a:tcPr marL="68580" marR="68580" marT="0" marB="0">
                     <a:noFill/>
                   </a:tcPr>
                 </a:tc>
@@ -6954,7 +7019,7 @@
                         <a:buNone/>
                       </a:pPr>
                       <a:r>
-                        <a:rPr lang="es-ES_tradnl" sz="1000" b="0" noProof="1">
+                        <a:rPr lang="es-ES_tradnl" sz="900" b="0" noProof="1">
                           <a:solidFill>
                             <a:schemeClr val="tx1"/>
                           </a:solidFill>
@@ -6980,7 +7045,7 @@
                         <a:buNone/>
                       </a:pPr>
                       <a:r>
-                        <a:rPr lang="es-ES_tradnl" sz="1000" dirty="0">
+                        <a:rPr lang="es-ES_tradnl" sz="900" dirty="0">
                           <a:effectLst/>
                           <a:latin typeface="Times New Roman" panose="02020603050405020304" pitchFamily="18" charset="0"/>
                           <a:ea typeface="Times New Roman" panose="02020603050405020304" pitchFamily="18" charset="0"/>
@@ -7003,7 +7068,7 @@
                         <a:buNone/>
                       </a:pPr>
                       <a:r>
-                        <a:rPr lang="es-ES_tradnl" sz="1000" dirty="0">
+                        <a:rPr lang="es-ES_tradnl" sz="900" dirty="0">
                           <a:effectLst/>
                           <a:latin typeface="Times New Roman" panose="02020603050405020304" pitchFamily="18" charset="0"/>
                           <a:ea typeface="Times New Roman" panose="02020603050405020304" pitchFamily="18" charset="0"/>
@@ -7026,7 +7091,7 @@
                         <a:buNone/>
                       </a:pPr>
                       <a:r>
-                        <a:rPr lang="es-ES_tradnl" sz="1000" dirty="0">
+                        <a:rPr lang="es-ES_tradnl" sz="900" dirty="0">
                           <a:effectLst/>
                           <a:latin typeface="Times New Roman" panose="02020603050405020304" pitchFamily="18" charset="0"/>
                           <a:ea typeface="Times New Roman" panose="02020603050405020304" pitchFamily="18" charset="0"/>
@@ -7049,7 +7114,7 @@
                         <a:buNone/>
                       </a:pPr>
                       <a:r>
-                        <a:rPr lang="es-ES_tradnl" sz="1000" dirty="0">
+                        <a:rPr lang="es-ES_tradnl" sz="900" dirty="0">
                           <a:effectLst/>
                           <a:latin typeface="Times New Roman" panose="02020603050405020304" pitchFamily="18" charset="0"/>
                           <a:ea typeface="Times New Roman" panose="02020603050405020304" pitchFamily="18" charset="0"/>
@@ -7072,7 +7137,7 @@
                         <a:buNone/>
                       </a:pPr>
                       <a:r>
-                        <a:rPr lang="es-ES_tradnl" sz="1000" dirty="0">
+                        <a:rPr lang="es-ES_tradnl" sz="900" dirty="0">
                           <a:effectLst/>
                           <a:latin typeface="Times New Roman" panose="02020603050405020304" pitchFamily="18" charset="0"/>
                           <a:ea typeface="Times New Roman" panose="02020603050405020304" pitchFamily="18" charset="0"/>
@@ -7095,7 +7160,7 @@
                         <a:buNone/>
                       </a:pPr>
                       <a:r>
-                        <a:rPr lang="es-ES_tradnl" sz="1000" dirty="0">
+                        <a:rPr lang="es-ES_tradnl" sz="900" dirty="0">
                           <a:effectLst/>
                           <a:latin typeface="Times New Roman" panose="02020603050405020304" pitchFamily="18" charset="0"/>
                           <a:ea typeface="Times New Roman" panose="02020603050405020304" pitchFamily="18" charset="0"/>
@@ -7118,7 +7183,7 @@
                         <a:buNone/>
                       </a:pPr>
                       <a:r>
-                        <a:rPr lang="es-ES_tradnl" sz="1000" dirty="0">
+                        <a:rPr lang="es-ES_tradnl" sz="900" dirty="0">
                           <a:effectLst/>
                           <a:latin typeface="Times New Roman" panose="02020603050405020304" pitchFamily="18" charset="0"/>
                           <a:ea typeface="Times New Roman" panose="02020603050405020304" pitchFamily="18" charset="0"/>
@@ -7141,7 +7206,7 @@
                         <a:buNone/>
                       </a:pPr>
                       <a:r>
-                        <a:rPr lang="es-ES_tradnl" sz="1000" dirty="0">
+                        <a:rPr lang="es-ES_tradnl" sz="900" dirty="0">
                           <a:effectLst/>
                           <a:latin typeface="Times New Roman" panose="02020603050405020304" pitchFamily="18" charset="0"/>
                           <a:ea typeface="Times New Roman" panose="02020603050405020304" pitchFamily="18" charset="0"/>
@@ -7164,7 +7229,7 @@
                         <a:buNone/>
                       </a:pPr>
                       <a:r>
-                        <a:rPr lang="es-ES_tradnl" sz="1000" dirty="0">
+                        <a:rPr lang="es-ES_tradnl" sz="900" dirty="0">
                           <a:effectLst/>
                           <a:latin typeface="Times New Roman" panose="02020603050405020304" pitchFamily="18" charset="0"/>
                           <a:ea typeface="Times New Roman" panose="02020603050405020304" pitchFamily="18" charset="0"/>
@@ -7187,7 +7252,7 @@
                         <a:buNone/>
                       </a:pPr>
                       <a:r>
-                        <a:rPr lang="es-ES_tradnl" sz="1000" dirty="0">
+                        <a:rPr lang="es-ES_tradnl" sz="900" dirty="0">
                           <a:effectLst/>
                           <a:latin typeface="Times New Roman" panose="02020603050405020304" pitchFamily="18" charset="0"/>
                           <a:ea typeface="Times New Roman" panose="02020603050405020304" pitchFamily="18" charset="0"/>
@@ -7210,109 +7275,139 @@
                         <a:buNone/>
                       </a:pPr>
                       <a:r>
-                        <a:rPr lang="es-ES_tradnl" sz="1000" dirty="0">
-                          <a:effectLst/>
-                          <a:latin typeface="Times New Roman" panose="02020603050405020304" pitchFamily="18" charset="0"/>
-                          <a:ea typeface="Times New Roman" panose="02020603050405020304" pitchFamily="18" charset="0"/>
-                          <a:cs typeface="Times New Roman" panose="02020603050405020304" pitchFamily="18" charset="0"/>
-                        </a:rPr>
-                        <a:t>4.64</a:t>
-                      </a:r>
-                    </a:p>
-                  </a:txBody>
-                  <a:tcPr marL="68580" marR="68580" marT="0" marB="0" anchor="ctr">
-                    <a:noFill/>
-                  </a:tcPr>
-                </a:tc>
-                <a:tc>
-                  <a:txBody>
-                    <a:bodyPr/>
-                    <a:lstStyle/>
-                    <a:p>
-                      <a:pPr algn="ctr">
-                        <a:buNone/>
-                      </a:pPr>
-                      <a:r>
-                        <a:rPr lang="es-ES_tradnl" sz="1000" dirty="0">
-                          <a:effectLst/>
-                          <a:latin typeface="Times New Roman" panose="02020603050405020304" pitchFamily="18" charset="0"/>
-                          <a:ea typeface="Times New Roman" panose="02020603050405020304" pitchFamily="18" charset="0"/>
-                          <a:cs typeface="Times New Roman" panose="02020603050405020304" pitchFamily="18" charset="0"/>
-                        </a:rPr>
-                        <a:t>127.42</a:t>
-                      </a:r>
-                    </a:p>
-                  </a:txBody>
-                  <a:tcPr marL="68580" marR="68580" marT="0" marB="0" anchor="ctr">
-                    <a:noFill/>
-                  </a:tcPr>
-                </a:tc>
-                <a:tc>
-                  <a:txBody>
-                    <a:bodyPr/>
-                    <a:lstStyle/>
-                    <a:p>
-                      <a:pPr algn="ctr">
-                        <a:buNone/>
-                      </a:pPr>
-                      <a:r>
-                        <a:rPr lang="es-ES_tradnl" sz="1000" dirty="0">
-                          <a:effectLst/>
-                          <a:latin typeface="Times New Roman" panose="02020603050405020304" pitchFamily="18" charset="0"/>
-                          <a:ea typeface="Times New Roman" panose="02020603050405020304" pitchFamily="18" charset="0"/>
-                          <a:cs typeface="Times New Roman" panose="02020603050405020304" pitchFamily="18" charset="0"/>
-                        </a:rPr>
-                        <a:t>15.74</a:t>
-                      </a:r>
-                    </a:p>
-                  </a:txBody>
-                  <a:tcPr marL="68580" marR="68580" marT="0" marB="0" anchor="ctr">
-                    <a:noFill/>
-                  </a:tcPr>
-                </a:tc>
-                <a:tc>
-                  <a:txBody>
-                    <a:bodyPr/>
-                    <a:lstStyle/>
-                    <a:p>
-                      <a:pPr algn="ctr">
-                        <a:buNone/>
-                      </a:pPr>
-                      <a:r>
-                        <a:rPr lang="es-ES_tradnl" sz="1000" dirty="0">
-                          <a:effectLst/>
-                          <a:latin typeface="Times New Roman" panose="02020603050405020304" pitchFamily="18" charset="0"/>
-                          <a:ea typeface="Times New Roman" panose="02020603050405020304" pitchFamily="18" charset="0"/>
-                          <a:cs typeface="Times New Roman" panose="02020603050405020304" pitchFamily="18" charset="0"/>
-                        </a:rPr>
-                        <a:t>63.28</a:t>
-                      </a:r>
-                    </a:p>
-                  </a:txBody>
-                  <a:tcPr marL="68580" marR="68580" marT="0" marB="0" anchor="ctr">
-                    <a:noFill/>
-                  </a:tcPr>
-                </a:tc>
-                <a:tc>
-                  <a:txBody>
-                    <a:bodyPr/>
-                    <a:lstStyle/>
-                    <a:p>
-                      <a:pPr algn="ctr">
-                        <a:buNone/>
-                      </a:pPr>
-                      <a:r>
-                        <a:rPr lang="es-ES_tradnl" sz="1000" dirty="0">
-                          <a:effectLst/>
-                          <a:latin typeface="Times New Roman" panose="02020603050405020304" pitchFamily="18" charset="0"/>
-                          <a:ea typeface="Times New Roman" panose="02020603050405020304" pitchFamily="18" charset="0"/>
-                          <a:cs typeface="Times New Roman" panose="02020603050405020304" pitchFamily="18" charset="0"/>
-                        </a:rPr>
-                        <a:t>NaN</a:t>
-                      </a:r>
-                    </a:p>
-                  </a:txBody>
-                  <a:tcPr marL="68580" marR="68580" marT="0" marB="0" anchor="ctr">
+                        <a:rPr lang="es-ES" sz="900">
+                          <a:effectLst/>
+                          <a:latin typeface="Times New Roman" panose="02020603050405020304" pitchFamily="18" charset="0"/>
+                          <a:ea typeface="Times New Roman" panose="02020603050405020304" pitchFamily="18" charset="0"/>
+                          <a:cs typeface="Times New Roman" panose="02020603050405020304" pitchFamily="18" charset="0"/>
+                        </a:rPr>
+                        <a:t>6.00</a:t>
+                      </a:r>
+                      <a:endParaRPr lang="de-DE" sz="900">
+                        <a:effectLst/>
+                        <a:latin typeface="Times New Roman" panose="02020603050405020304" pitchFamily="18" charset="0"/>
+                        <a:ea typeface="Times New Roman" panose="02020603050405020304" pitchFamily="18" charset="0"/>
+                        <a:cs typeface="Times New Roman" panose="02020603050405020304" pitchFamily="18" charset="0"/>
+                      </a:endParaRPr>
+                    </a:p>
+                  </a:txBody>
+                  <a:tcPr marL="68580" marR="68580" marT="0" marB="0">
+                    <a:noFill/>
+                  </a:tcPr>
+                </a:tc>
+                <a:tc>
+                  <a:txBody>
+                    <a:bodyPr/>
+                    <a:lstStyle/>
+                    <a:p>
+                      <a:pPr algn="ctr">
+                        <a:buNone/>
+                      </a:pPr>
+                      <a:r>
+                        <a:rPr lang="es-ES" sz="900">
+                          <a:effectLst/>
+                          <a:latin typeface="Times New Roman" panose="02020603050405020304" pitchFamily="18" charset="0"/>
+                          <a:ea typeface="Times New Roman" panose="02020603050405020304" pitchFamily="18" charset="0"/>
+                          <a:cs typeface="Times New Roman" panose="02020603050405020304" pitchFamily="18" charset="0"/>
+                        </a:rPr>
+                        <a:t>3.20</a:t>
+                      </a:r>
+                      <a:endParaRPr lang="de-DE" sz="900">
+                        <a:effectLst/>
+                        <a:latin typeface="Times New Roman" panose="02020603050405020304" pitchFamily="18" charset="0"/>
+                        <a:ea typeface="Times New Roman" panose="02020603050405020304" pitchFamily="18" charset="0"/>
+                        <a:cs typeface="Times New Roman" panose="02020603050405020304" pitchFamily="18" charset="0"/>
+                      </a:endParaRPr>
+                    </a:p>
+                  </a:txBody>
+                  <a:tcPr marL="68580" marR="68580" marT="0" marB="0">
+                    <a:noFill/>
+                  </a:tcPr>
+                </a:tc>
+                <a:tc>
+                  <a:txBody>
+                    <a:bodyPr/>
+                    <a:lstStyle/>
+                    <a:p>
+                      <a:pPr algn="ctr">
+                        <a:buNone/>
+                      </a:pPr>
+                      <a:r>
+                        <a:rPr lang="es-ES" sz="900">
+                          <a:effectLst/>
+                          <a:latin typeface="Times New Roman" panose="02020603050405020304" pitchFamily="18" charset="0"/>
+                          <a:ea typeface="Times New Roman" panose="02020603050405020304" pitchFamily="18" charset="0"/>
+                          <a:cs typeface="Times New Roman" panose="02020603050405020304" pitchFamily="18" charset="0"/>
+                        </a:rPr>
+                        <a:t>59.33</a:t>
+                      </a:r>
+                      <a:endParaRPr lang="de-DE" sz="900">
+                        <a:effectLst/>
+                        <a:latin typeface="Times New Roman" panose="02020603050405020304" pitchFamily="18" charset="0"/>
+                        <a:ea typeface="Times New Roman" panose="02020603050405020304" pitchFamily="18" charset="0"/>
+                        <a:cs typeface="Times New Roman" panose="02020603050405020304" pitchFamily="18" charset="0"/>
+                      </a:endParaRPr>
+                    </a:p>
+                  </a:txBody>
+                  <a:tcPr marL="68580" marR="68580" marT="0" marB="0">
+                    <a:noFill/>
+                  </a:tcPr>
+                </a:tc>
+                <a:tc>
+                  <a:txBody>
+                    <a:bodyPr/>
+                    <a:lstStyle/>
+                    <a:p>
+                      <a:pPr algn="ctr">
+                        <a:buNone/>
+                      </a:pPr>
+                      <a:r>
+                        <a:rPr lang="es-ES" sz="900">
+                          <a:effectLst/>
+                          <a:latin typeface="Times New Roman" panose="02020603050405020304" pitchFamily="18" charset="0"/>
+                          <a:ea typeface="Times New Roman" panose="02020603050405020304" pitchFamily="18" charset="0"/>
+                          <a:cs typeface="Times New Roman" panose="02020603050405020304" pitchFamily="18" charset="0"/>
+                        </a:rPr>
+                        <a:t>10.78</a:t>
+                      </a:r>
+                      <a:endParaRPr lang="de-DE" sz="900">
+                        <a:effectLst/>
+                        <a:latin typeface="Times New Roman" panose="02020603050405020304" pitchFamily="18" charset="0"/>
+                        <a:ea typeface="Times New Roman" panose="02020603050405020304" pitchFamily="18" charset="0"/>
+                        <a:cs typeface="Times New Roman" panose="02020603050405020304" pitchFamily="18" charset="0"/>
+                      </a:endParaRPr>
+                    </a:p>
+                  </a:txBody>
+                  <a:tcPr marL="68580" marR="68580" marT="0" marB="0">
+                    <a:noFill/>
+                  </a:tcPr>
+                </a:tc>
+                <a:tc>
+                  <a:txBody>
+                    <a:bodyPr/>
+                    <a:lstStyle/>
+                    <a:p>
+                      <a:pPr algn="ctr">
+                        <a:buNone/>
+                      </a:pPr>
+                      <a:r>
+                        <a:rPr lang="es-ES" sz="900" dirty="0">
+                          <a:effectLst/>
+                          <a:latin typeface="Times New Roman" panose="02020603050405020304" pitchFamily="18" charset="0"/>
+                          <a:ea typeface="Times New Roman" panose="02020603050405020304" pitchFamily="18" charset="0"/>
+                          <a:cs typeface="Times New Roman" panose="02020603050405020304" pitchFamily="18" charset="0"/>
+                        </a:rPr>
+                        <a:t>25.74</a:t>
+                      </a:r>
+                      <a:endParaRPr lang="de-DE" sz="900" dirty="0">
+                        <a:effectLst/>
+                        <a:latin typeface="Times New Roman" panose="02020603050405020304" pitchFamily="18" charset="0"/>
+                        <a:ea typeface="Times New Roman" panose="02020603050405020304" pitchFamily="18" charset="0"/>
+                        <a:cs typeface="Times New Roman" panose="02020603050405020304" pitchFamily="18" charset="0"/>
+                      </a:endParaRPr>
+                    </a:p>
+                  </a:txBody>
+                  <a:tcPr marL="68580" marR="68580" marT="0" marB="0">
                     <a:noFill/>
                   </a:tcPr>
                 </a:tc>
@@ -7331,7 +7426,7 @@
                       <a:pPr algn="ctr">
                         <a:buNone/>
                       </a:pPr>
-                      <a:endParaRPr lang="es-ES_tradnl" sz="1000" b="0" noProof="1">
+                      <a:endParaRPr lang="es-ES_tradnl" sz="900" b="0" noProof="1">
                         <a:solidFill>
                           <a:schemeClr val="tx1"/>
                         </a:solidFill>
@@ -7354,287 +7449,287 @@
                       <a:pPr algn="ctr">
                         <a:buNone/>
                       </a:pPr>
-                      <a:endParaRPr lang="es-ES_tradnl" sz="1000" dirty="0">
-                        <a:effectLst/>
-                        <a:latin typeface="Times New Roman" panose="02020603050405020304" pitchFamily="18" charset="0"/>
-                        <a:ea typeface="Times New Roman" panose="02020603050405020304" pitchFamily="18" charset="0"/>
-                        <a:cs typeface="Times New Roman" panose="02020603050405020304" pitchFamily="18" charset="0"/>
-                      </a:endParaRPr>
-                    </a:p>
-                  </a:txBody>
-                  <a:tcPr marL="68580" marR="68580" marT="0" marB="0" anchor="ctr">
-                    <a:noFill/>
-                  </a:tcPr>
-                </a:tc>
-                <a:tc>
-                  <a:txBody>
-                    <a:bodyPr/>
-                    <a:lstStyle/>
-                    <a:p>
-                      <a:pPr algn="ctr">
-                        <a:buNone/>
-                      </a:pPr>
-                      <a:endParaRPr lang="es-ES_tradnl" sz="1000" dirty="0">
-                        <a:effectLst/>
-                        <a:latin typeface="Times New Roman" panose="02020603050405020304" pitchFamily="18" charset="0"/>
-                        <a:ea typeface="Times New Roman" panose="02020603050405020304" pitchFamily="18" charset="0"/>
-                        <a:cs typeface="Times New Roman" panose="02020603050405020304" pitchFamily="18" charset="0"/>
-                      </a:endParaRPr>
-                    </a:p>
-                  </a:txBody>
-                  <a:tcPr marL="68580" marR="68580" marT="0" marB="0" anchor="ctr">
-                    <a:noFill/>
-                  </a:tcPr>
-                </a:tc>
-                <a:tc>
-                  <a:txBody>
-                    <a:bodyPr/>
-                    <a:lstStyle/>
-                    <a:p>
-                      <a:pPr algn="ctr">
-                        <a:buNone/>
-                      </a:pPr>
-                      <a:endParaRPr lang="es-ES_tradnl" sz="1000" dirty="0">
-                        <a:effectLst/>
-                        <a:latin typeface="Times New Roman" panose="02020603050405020304" pitchFamily="18" charset="0"/>
-                        <a:ea typeface="Times New Roman" panose="02020603050405020304" pitchFamily="18" charset="0"/>
-                        <a:cs typeface="Times New Roman" panose="02020603050405020304" pitchFamily="18" charset="0"/>
-                      </a:endParaRPr>
-                    </a:p>
-                  </a:txBody>
-                  <a:tcPr marL="68580" marR="68580" marT="0" marB="0" anchor="ctr">
-                    <a:noFill/>
-                  </a:tcPr>
-                </a:tc>
-                <a:tc>
-                  <a:txBody>
-                    <a:bodyPr/>
-                    <a:lstStyle/>
-                    <a:p>
-                      <a:pPr algn="ctr">
-                        <a:buNone/>
-                      </a:pPr>
-                      <a:endParaRPr lang="es-ES_tradnl" sz="1000" dirty="0">
-                        <a:effectLst/>
-                        <a:latin typeface="Times New Roman" panose="02020603050405020304" pitchFamily="18" charset="0"/>
-                        <a:ea typeface="Times New Roman" panose="02020603050405020304" pitchFamily="18" charset="0"/>
-                        <a:cs typeface="Times New Roman" panose="02020603050405020304" pitchFamily="18" charset="0"/>
-                      </a:endParaRPr>
-                    </a:p>
-                  </a:txBody>
-                  <a:tcPr marL="68580" marR="68580" marT="0" marB="0" anchor="ctr">
-                    <a:noFill/>
-                  </a:tcPr>
-                </a:tc>
-                <a:tc>
-                  <a:txBody>
-                    <a:bodyPr/>
-                    <a:lstStyle/>
-                    <a:p>
-                      <a:pPr algn="ctr">
-                        <a:buNone/>
-                      </a:pPr>
-                      <a:endParaRPr lang="es-ES_tradnl" sz="1000" dirty="0">
-                        <a:effectLst/>
-                        <a:latin typeface="Times New Roman" panose="02020603050405020304" pitchFamily="18" charset="0"/>
-                        <a:ea typeface="Times New Roman" panose="02020603050405020304" pitchFamily="18" charset="0"/>
-                        <a:cs typeface="Times New Roman" panose="02020603050405020304" pitchFamily="18" charset="0"/>
-                      </a:endParaRPr>
-                    </a:p>
-                  </a:txBody>
-                  <a:tcPr marL="68580" marR="68580" marT="0" marB="0" anchor="ctr">
-                    <a:noFill/>
-                  </a:tcPr>
-                </a:tc>
-                <a:tc>
-                  <a:txBody>
-                    <a:bodyPr/>
-                    <a:lstStyle/>
-                    <a:p>
-                      <a:pPr algn="ctr">
-                        <a:buNone/>
-                      </a:pPr>
-                      <a:endParaRPr lang="es-ES_tradnl" sz="1000" dirty="0">
-                        <a:effectLst/>
-                        <a:latin typeface="Times New Roman" panose="02020603050405020304" pitchFamily="18" charset="0"/>
-                        <a:ea typeface="Times New Roman" panose="02020603050405020304" pitchFamily="18" charset="0"/>
-                        <a:cs typeface="Times New Roman" panose="02020603050405020304" pitchFamily="18" charset="0"/>
-                      </a:endParaRPr>
-                    </a:p>
-                  </a:txBody>
-                  <a:tcPr marL="68580" marR="68580" marT="0" marB="0" anchor="ctr">
-                    <a:noFill/>
-                  </a:tcPr>
-                </a:tc>
-                <a:tc>
-                  <a:txBody>
-                    <a:bodyPr/>
-                    <a:lstStyle/>
-                    <a:p>
-                      <a:pPr algn="ctr">
-                        <a:buNone/>
-                      </a:pPr>
-                      <a:endParaRPr lang="es-ES_tradnl" sz="1000" dirty="0">
-                        <a:effectLst/>
-                        <a:latin typeface="Times New Roman" panose="02020603050405020304" pitchFamily="18" charset="0"/>
-                        <a:ea typeface="Times New Roman" panose="02020603050405020304" pitchFamily="18" charset="0"/>
-                        <a:cs typeface="Times New Roman" panose="02020603050405020304" pitchFamily="18" charset="0"/>
-                      </a:endParaRPr>
-                    </a:p>
-                  </a:txBody>
-                  <a:tcPr marL="68580" marR="68580" marT="0" marB="0" anchor="ctr">
-                    <a:noFill/>
-                  </a:tcPr>
-                </a:tc>
-                <a:tc>
-                  <a:txBody>
-                    <a:bodyPr/>
-                    <a:lstStyle/>
-                    <a:p>
-                      <a:pPr algn="ctr">
-                        <a:buNone/>
-                      </a:pPr>
-                      <a:endParaRPr lang="es-ES_tradnl" sz="1000" dirty="0">
-                        <a:effectLst/>
-                        <a:latin typeface="Times New Roman" panose="02020603050405020304" pitchFamily="18" charset="0"/>
-                        <a:ea typeface="Times New Roman" panose="02020603050405020304" pitchFamily="18" charset="0"/>
-                        <a:cs typeface="Times New Roman" panose="02020603050405020304" pitchFamily="18" charset="0"/>
-                      </a:endParaRPr>
-                    </a:p>
-                  </a:txBody>
-                  <a:tcPr marL="68580" marR="68580" marT="0" marB="0" anchor="ctr">
-                    <a:noFill/>
-                  </a:tcPr>
-                </a:tc>
-                <a:tc>
-                  <a:txBody>
-                    <a:bodyPr/>
-                    <a:lstStyle/>
-                    <a:p>
-                      <a:pPr algn="ctr">
-                        <a:buNone/>
-                      </a:pPr>
-                      <a:endParaRPr lang="es-ES_tradnl" sz="1000" dirty="0">
-                        <a:effectLst/>
-                        <a:latin typeface="Times New Roman" panose="02020603050405020304" pitchFamily="18" charset="0"/>
-                        <a:ea typeface="Times New Roman" panose="02020603050405020304" pitchFamily="18" charset="0"/>
-                        <a:cs typeface="Times New Roman" panose="02020603050405020304" pitchFamily="18" charset="0"/>
-                      </a:endParaRPr>
-                    </a:p>
-                  </a:txBody>
-                  <a:tcPr marL="68580" marR="68580" marT="0" marB="0" anchor="ctr">
-                    <a:noFill/>
-                  </a:tcPr>
-                </a:tc>
-                <a:tc>
-                  <a:txBody>
-                    <a:bodyPr/>
-                    <a:lstStyle/>
-                    <a:p>
-                      <a:pPr algn="ctr">
-                        <a:buNone/>
-                      </a:pPr>
-                      <a:endParaRPr lang="es-ES_tradnl" sz="1000" dirty="0">
-                        <a:effectLst/>
-                        <a:latin typeface="Times New Roman" panose="02020603050405020304" pitchFamily="18" charset="0"/>
-                        <a:ea typeface="Times New Roman" panose="02020603050405020304" pitchFamily="18" charset="0"/>
-                        <a:cs typeface="Times New Roman" panose="02020603050405020304" pitchFamily="18" charset="0"/>
-                      </a:endParaRPr>
-                    </a:p>
-                  </a:txBody>
-                  <a:tcPr marL="68580" marR="68580" marT="0" marB="0" anchor="ctr">
-                    <a:noFill/>
-                  </a:tcPr>
-                </a:tc>
-                <a:tc>
-                  <a:txBody>
-                    <a:bodyPr/>
-                    <a:lstStyle/>
-                    <a:p>
-                      <a:pPr algn="ctr">
-                        <a:buNone/>
-                      </a:pPr>
-                      <a:endParaRPr lang="es-ES_tradnl" sz="1000" dirty="0">
-                        <a:effectLst/>
-                        <a:latin typeface="Times New Roman" panose="02020603050405020304" pitchFamily="18" charset="0"/>
-                        <a:ea typeface="Times New Roman" panose="02020603050405020304" pitchFamily="18" charset="0"/>
-                        <a:cs typeface="Times New Roman" panose="02020603050405020304" pitchFamily="18" charset="0"/>
-                      </a:endParaRPr>
-                    </a:p>
-                  </a:txBody>
-                  <a:tcPr marL="68580" marR="68580" marT="0" marB="0" anchor="ctr">
-                    <a:noFill/>
-                  </a:tcPr>
-                </a:tc>
-                <a:tc>
-                  <a:txBody>
-                    <a:bodyPr/>
-                    <a:lstStyle/>
-                    <a:p>
-                      <a:pPr algn="ctr">
-                        <a:buNone/>
-                      </a:pPr>
-                      <a:endParaRPr lang="es-ES_tradnl" sz="1000" dirty="0">
-                        <a:effectLst/>
-                        <a:latin typeface="Times New Roman" panose="02020603050405020304" pitchFamily="18" charset="0"/>
-                        <a:ea typeface="Times New Roman" panose="02020603050405020304" pitchFamily="18" charset="0"/>
-                        <a:cs typeface="Times New Roman" panose="02020603050405020304" pitchFamily="18" charset="0"/>
-                      </a:endParaRPr>
-                    </a:p>
-                  </a:txBody>
-                  <a:tcPr marL="68580" marR="68580" marT="0" marB="0" anchor="ctr">
-                    <a:noFill/>
-                  </a:tcPr>
-                </a:tc>
-                <a:tc>
-                  <a:txBody>
-                    <a:bodyPr/>
-                    <a:lstStyle/>
-                    <a:p>
-                      <a:pPr algn="ctr">
-                        <a:buNone/>
-                      </a:pPr>
-                      <a:endParaRPr lang="es-ES_tradnl" sz="1000" dirty="0">
-                        <a:effectLst/>
-                        <a:latin typeface="Times New Roman" panose="02020603050405020304" pitchFamily="18" charset="0"/>
-                        <a:ea typeface="Times New Roman" panose="02020603050405020304" pitchFamily="18" charset="0"/>
-                        <a:cs typeface="Times New Roman" panose="02020603050405020304" pitchFamily="18" charset="0"/>
-                      </a:endParaRPr>
-                    </a:p>
-                  </a:txBody>
-                  <a:tcPr marL="68580" marR="68580" marT="0" marB="0" anchor="ctr">
-                    <a:noFill/>
-                  </a:tcPr>
-                </a:tc>
-                <a:tc>
-                  <a:txBody>
-                    <a:bodyPr/>
-                    <a:lstStyle/>
-                    <a:p>
-                      <a:pPr algn="ctr">
-                        <a:buNone/>
-                      </a:pPr>
-                      <a:endParaRPr lang="es-ES_tradnl" sz="1000" dirty="0">
-                        <a:effectLst/>
-                        <a:latin typeface="Times New Roman" panose="02020603050405020304" pitchFamily="18" charset="0"/>
-                        <a:ea typeface="Times New Roman" panose="02020603050405020304" pitchFamily="18" charset="0"/>
-                        <a:cs typeface="Times New Roman" panose="02020603050405020304" pitchFamily="18" charset="0"/>
-                      </a:endParaRPr>
-                    </a:p>
-                  </a:txBody>
-                  <a:tcPr marL="68580" marR="68580" marT="0" marB="0" anchor="ctr">
-                    <a:noFill/>
-                  </a:tcPr>
-                </a:tc>
-                <a:tc>
-                  <a:txBody>
-                    <a:bodyPr/>
-                    <a:lstStyle/>
-                    <a:p>
-                      <a:pPr algn="ctr">
-                        <a:buNone/>
-                      </a:pPr>
-                      <a:endParaRPr lang="es-ES_tradnl" sz="1000" dirty="0">
+                      <a:endParaRPr lang="es-ES_tradnl" sz="900" dirty="0">
+                        <a:effectLst/>
+                        <a:latin typeface="Times New Roman" panose="02020603050405020304" pitchFamily="18" charset="0"/>
+                        <a:ea typeface="Times New Roman" panose="02020603050405020304" pitchFamily="18" charset="0"/>
+                        <a:cs typeface="Times New Roman" panose="02020603050405020304" pitchFamily="18" charset="0"/>
+                      </a:endParaRPr>
+                    </a:p>
+                  </a:txBody>
+                  <a:tcPr marL="68580" marR="68580" marT="0" marB="0" anchor="ctr">
+                    <a:noFill/>
+                  </a:tcPr>
+                </a:tc>
+                <a:tc>
+                  <a:txBody>
+                    <a:bodyPr/>
+                    <a:lstStyle/>
+                    <a:p>
+                      <a:pPr algn="ctr">
+                        <a:buNone/>
+                      </a:pPr>
+                      <a:endParaRPr lang="es-ES_tradnl" sz="900" dirty="0">
+                        <a:effectLst/>
+                        <a:latin typeface="Times New Roman" panose="02020603050405020304" pitchFamily="18" charset="0"/>
+                        <a:ea typeface="Times New Roman" panose="02020603050405020304" pitchFamily="18" charset="0"/>
+                        <a:cs typeface="Times New Roman" panose="02020603050405020304" pitchFamily="18" charset="0"/>
+                      </a:endParaRPr>
+                    </a:p>
+                  </a:txBody>
+                  <a:tcPr marL="68580" marR="68580" marT="0" marB="0" anchor="ctr">
+                    <a:noFill/>
+                  </a:tcPr>
+                </a:tc>
+                <a:tc>
+                  <a:txBody>
+                    <a:bodyPr/>
+                    <a:lstStyle/>
+                    <a:p>
+                      <a:pPr algn="ctr">
+                        <a:buNone/>
+                      </a:pPr>
+                      <a:endParaRPr lang="es-ES_tradnl" sz="900" dirty="0">
+                        <a:effectLst/>
+                        <a:latin typeface="Times New Roman" panose="02020603050405020304" pitchFamily="18" charset="0"/>
+                        <a:ea typeface="Times New Roman" panose="02020603050405020304" pitchFamily="18" charset="0"/>
+                        <a:cs typeface="Times New Roman" panose="02020603050405020304" pitchFamily="18" charset="0"/>
+                      </a:endParaRPr>
+                    </a:p>
+                  </a:txBody>
+                  <a:tcPr marL="68580" marR="68580" marT="0" marB="0" anchor="ctr">
+                    <a:noFill/>
+                  </a:tcPr>
+                </a:tc>
+                <a:tc>
+                  <a:txBody>
+                    <a:bodyPr/>
+                    <a:lstStyle/>
+                    <a:p>
+                      <a:pPr algn="ctr">
+                        <a:buNone/>
+                      </a:pPr>
+                      <a:endParaRPr lang="es-ES_tradnl" sz="900" dirty="0">
+                        <a:effectLst/>
+                        <a:latin typeface="Times New Roman" panose="02020603050405020304" pitchFamily="18" charset="0"/>
+                        <a:ea typeface="Times New Roman" panose="02020603050405020304" pitchFamily="18" charset="0"/>
+                        <a:cs typeface="Times New Roman" panose="02020603050405020304" pitchFamily="18" charset="0"/>
+                      </a:endParaRPr>
+                    </a:p>
+                  </a:txBody>
+                  <a:tcPr marL="68580" marR="68580" marT="0" marB="0" anchor="ctr">
+                    <a:noFill/>
+                  </a:tcPr>
+                </a:tc>
+                <a:tc>
+                  <a:txBody>
+                    <a:bodyPr/>
+                    <a:lstStyle/>
+                    <a:p>
+                      <a:pPr algn="ctr">
+                        <a:buNone/>
+                      </a:pPr>
+                      <a:endParaRPr lang="es-ES_tradnl" sz="900" dirty="0">
+                        <a:effectLst/>
+                        <a:latin typeface="Times New Roman" panose="02020603050405020304" pitchFamily="18" charset="0"/>
+                        <a:ea typeface="Times New Roman" panose="02020603050405020304" pitchFamily="18" charset="0"/>
+                        <a:cs typeface="Times New Roman" panose="02020603050405020304" pitchFamily="18" charset="0"/>
+                      </a:endParaRPr>
+                    </a:p>
+                  </a:txBody>
+                  <a:tcPr marL="68580" marR="68580" marT="0" marB="0" anchor="ctr">
+                    <a:noFill/>
+                  </a:tcPr>
+                </a:tc>
+                <a:tc>
+                  <a:txBody>
+                    <a:bodyPr/>
+                    <a:lstStyle/>
+                    <a:p>
+                      <a:pPr algn="ctr">
+                        <a:buNone/>
+                      </a:pPr>
+                      <a:endParaRPr lang="es-ES_tradnl" sz="900" dirty="0">
+                        <a:effectLst/>
+                        <a:latin typeface="Times New Roman" panose="02020603050405020304" pitchFamily="18" charset="0"/>
+                        <a:ea typeface="Times New Roman" panose="02020603050405020304" pitchFamily="18" charset="0"/>
+                        <a:cs typeface="Times New Roman" panose="02020603050405020304" pitchFamily="18" charset="0"/>
+                      </a:endParaRPr>
+                    </a:p>
+                  </a:txBody>
+                  <a:tcPr marL="68580" marR="68580" marT="0" marB="0" anchor="ctr">
+                    <a:noFill/>
+                  </a:tcPr>
+                </a:tc>
+                <a:tc>
+                  <a:txBody>
+                    <a:bodyPr/>
+                    <a:lstStyle/>
+                    <a:p>
+                      <a:pPr algn="ctr">
+                        <a:buNone/>
+                      </a:pPr>
+                      <a:endParaRPr lang="es-ES_tradnl" sz="900" dirty="0">
+                        <a:effectLst/>
+                        <a:latin typeface="Times New Roman" panose="02020603050405020304" pitchFamily="18" charset="0"/>
+                        <a:ea typeface="Times New Roman" panose="02020603050405020304" pitchFamily="18" charset="0"/>
+                        <a:cs typeface="Times New Roman" panose="02020603050405020304" pitchFamily="18" charset="0"/>
+                      </a:endParaRPr>
+                    </a:p>
+                  </a:txBody>
+                  <a:tcPr marL="68580" marR="68580" marT="0" marB="0" anchor="ctr">
+                    <a:noFill/>
+                  </a:tcPr>
+                </a:tc>
+                <a:tc>
+                  <a:txBody>
+                    <a:bodyPr/>
+                    <a:lstStyle/>
+                    <a:p>
+                      <a:pPr algn="ctr">
+                        <a:buNone/>
+                      </a:pPr>
+                      <a:endParaRPr lang="es-ES_tradnl" sz="900" dirty="0">
+                        <a:effectLst/>
+                        <a:latin typeface="Times New Roman" panose="02020603050405020304" pitchFamily="18" charset="0"/>
+                        <a:ea typeface="Times New Roman" panose="02020603050405020304" pitchFamily="18" charset="0"/>
+                        <a:cs typeface="Times New Roman" panose="02020603050405020304" pitchFamily="18" charset="0"/>
+                      </a:endParaRPr>
+                    </a:p>
+                  </a:txBody>
+                  <a:tcPr marL="68580" marR="68580" marT="0" marB="0" anchor="ctr">
+                    <a:noFill/>
+                  </a:tcPr>
+                </a:tc>
+                <a:tc>
+                  <a:txBody>
+                    <a:bodyPr/>
+                    <a:lstStyle/>
+                    <a:p>
+                      <a:pPr algn="ctr">
+                        <a:buNone/>
+                      </a:pPr>
+                      <a:endParaRPr lang="es-ES_tradnl" sz="900" dirty="0">
+                        <a:effectLst/>
+                        <a:latin typeface="Times New Roman" panose="02020603050405020304" pitchFamily="18" charset="0"/>
+                        <a:ea typeface="Times New Roman" panose="02020603050405020304" pitchFamily="18" charset="0"/>
+                        <a:cs typeface="Times New Roman" panose="02020603050405020304" pitchFamily="18" charset="0"/>
+                      </a:endParaRPr>
+                    </a:p>
+                  </a:txBody>
+                  <a:tcPr marL="68580" marR="68580" marT="0" marB="0" anchor="ctr">
+                    <a:noFill/>
+                  </a:tcPr>
+                </a:tc>
+                <a:tc>
+                  <a:txBody>
+                    <a:bodyPr/>
+                    <a:lstStyle/>
+                    <a:p>
+                      <a:pPr algn="ctr">
+                        <a:buNone/>
+                      </a:pPr>
+                      <a:endParaRPr lang="es-ES_tradnl" sz="900" dirty="0">
+                        <a:effectLst/>
+                        <a:latin typeface="Times New Roman" panose="02020603050405020304" pitchFamily="18" charset="0"/>
+                        <a:ea typeface="Times New Roman" panose="02020603050405020304" pitchFamily="18" charset="0"/>
+                        <a:cs typeface="Times New Roman" panose="02020603050405020304" pitchFamily="18" charset="0"/>
+                      </a:endParaRPr>
+                    </a:p>
+                  </a:txBody>
+                  <a:tcPr marL="68580" marR="68580" marT="0" marB="0" anchor="ctr">
+                    <a:noFill/>
+                  </a:tcPr>
+                </a:tc>
+                <a:tc>
+                  <a:txBody>
+                    <a:bodyPr/>
+                    <a:lstStyle/>
+                    <a:p>
+                      <a:pPr algn="ctr">
+                        <a:buNone/>
+                      </a:pPr>
+                      <a:endParaRPr lang="es-ES_tradnl" sz="900" dirty="0">
+                        <a:effectLst/>
+                        <a:latin typeface="Times New Roman" panose="02020603050405020304" pitchFamily="18" charset="0"/>
+                        <a:ea typeface="Times New Roman" panose="02020603050405020304" pitchFamily="18" charset="0"/>
+                        <a:cs typeface="Times New Roman" panose="02020603050405020304" pitchFamily="18" charset="0"/>
+                      </a:endParaRPr>
+                    </a:p>
+                  </a:txBody>
+                  <a:tcPr marL="68580" marR="68580" marT="0" marB="0" anchor="ctr">
+                    <a:noFill/>
+                  </a:tcPr>
+                </a:tc>
+                <a:tc>
+                  <a:txBody>
+                    <a:bodyPr/>
+                    <a:lstStyle/>
+                    <a:p>
+                      <a:pPr algn="ctr">
+                        <a:buNone/>
+                      </a:pPr>
+                      <a:endParaRPr lang="es-ES_tradnl" sz="900" dirty="0">
+                        <a:effectLst/>
+                        <a:latin typeface="Times New Roman" panose="02020603050405020304" pitchFamily="18" charset="0"/>
+                        <a:ea typeface="Times New Roman" panose="02020603050405020304" pitchFamily="18" charset="0"/>
+                        <a:cs typeface="Times New Roman" panose="02020603050405020304" pitchFamily="18" charset="0"/>
+                      </a:endParaRPr>
+                    </a:p>
+                  </a:txBody>
+                  <a:tcPr marL="68580" marR="68580" marT="0" marB="0" anchor="ctr">
+                    <a:noFill/>
+                  </a:tcPr>
+                </a:tc>
+                <a:tc>
+                  <a:txBody>
+                    <a:bodyPr/>
+                    <a:lstStyle/>
+                    <a:p>
+                      <a:pPr algn="ctr">
+                        <a:buNone/>
+                      </a:pPr>
+                      <a:endParaRPr lang="es-ES_tradnl" sz="900" dirty="0">
+                        <a:effectLst/>
+                        <a:latin typeface="Times New Roman" panose="02020603050405020304" pitchFamily="18" charset="0"/>
+                        <a:ea typeface="Times New Roman" panose="02020603050405020304" pitchFamily="18" charset="0"/>
+                        <a:cs typeface="Times New Roman" panose="02020603050405020304" pitchFamily="18" charset="0"/>
+                      </a:endParaRPr>
+                    </a:p>
+                  </a:txBody>
+                  <a:tcPr marL="68580" marR="68580" marT="0" marB="0" anchor="ctr">
+                    <a:noFill/>
+                  </a:tcPr>
+                </a:tc>
+                <a:tc>
+                  <a:txBody>
+                    <a:bodyPr/>
+                    <a:lstStyle/>
+                    <a:p>
+                      <a:pPr algn="ctr">
+                        <a:buNone/>
+                      </a:pPr>
+                      <a:endParaRPr lang="es-ES_tradnl" sz="900" dirty="0">
+                        <a:effectLst/>
+                        <a:latin typeface="Times New Roman" panose="02020603050405020304" pitchFamily="18" charset="0"/>
+                        <a:ea typeface="Times New Roman" panose="02020603050405020304" pitchFamily="18" charset="0"/>
+                        <a:cs typeface="Times New Roman" panose="02020603050405020304" pitchFamily="18" charset="0"/>
+                      </a:endParaRPr>
+                    </a:p>
+                  </a:txBody>
+                  <a:tcPr marL="68580" marR="68580" marT="0" marB="0" anchor="ctr">
+                    <a:noFill/>
+                  </a:tcPr>
+                </a:tc>
+                <a:tc>
+                  <a:txBody>
+                    <a:bodyPr/>
+                    <a:lstStyle/>
+                    <a:p>
+                      <a:pPr algn="ctr">
+                        <a:buNone/>
+                      </a:pPr>
+                      <a:endParaRPr lang="es-ES_tradnl" sz="900" dirty="0">
                         <a:effectLst/>
                         <a:latin typeface="Times New Roman" panose="02020603050405020304" pitchFamily="18" charset="0"/>
                         <a:ea typeface="Times New Roman" panose="02020603050405020304" pitchFamily="18" charset="0"/>
@@ -7661,7 +7756,7 @@
                       <a:pPr algn="ctr">
                         <a:buNone/>
                       </a:pPr>
-                      <a:endParaRPr lang="es-ES_tradnl" sz="1000" b="0" noProof="1">
+                      <a:endParaRPr lang="es-ES_tradnl" sz="900" b="0" noProof="1">
                         <a:solidFill>
                           <a:schemeClr val="tx1"/>
                         </a:solidFill>
@@ -7693,7 +7788,7 @@
                       <a:pPr algn="ctr">
                         <a:buNone/>
                       </a:pPr>
-                      <a:endParaRPr lang="es-ES_tradnl" sz="1000" dirty="0">
+                      <a:endParaRPr lang="es-ES_tradnl" sz="900" dirty="0">
                         <a:effectLst/>
                         <a:latin typeface="Times New Roman" panose="02020603050405020304" pitchFamily="18" charset="0"/>
                         <a:ea typeface="Times New Roman" panose="02020603050405020304" pitchFamily="18" charset="0"/>
@@ -7722,7 +7817,7 @@
                       <a:pPr algn="ctr">
                         <a:buNone/>
                       </a:pPr>
-                      <a:endParaRPr lang="es-ES_tradnl" sz="1000" dirty="0">
+                      <a:endParaRPr lang="es-ES_tradnl" sz="900" dirty="0">
                         <a:effectLst/>
                         <a:latin typeface="Times New Roman" panose="02020603050405020304" pitchFamily="18" charset="0"/>
                         <a:ea typeface="Times New Roman" panose="02020603050405020304" pitchFamily="18" charset="0"/>
@@ -7751,7 +7846,7 @@
                       <a:pPr algn="ctr">
                         <a:buNone/>
                       </a:pPr>
-                      <a:endParaRPr lang="es-ES_tradnl" sz="1000" dirty="0">
+                      <a:endParaRPr lang="es-ES_tradnl" sz="900" dirty="0">
                         <a:effectLst/>
                         <a:latin typeface="Times New Roman" panose="02020603050405020304" pitchFamily="18" charset="0"/>
                         <a:ea typeface="Times New Roman" panose="02020603050405020304" pitchFamily="18" charset="0"/>
@@ -7780,7 +7875,7 @@
                       <a:pPr algn="ctr">
                         <a:buNone/>
                       </a:pPr>
-                      <a:endParaRPr lang="es-ES_tradnl" sz="1000" dirty="0">
+                      <a:endParaRPr lang="es-ES_tradnl" sz="900" dirty="0">
                         <a:effectLst/>
                         <a:latin typeface="Times New Roman" panose="02020603050405020304" pitchFamily="18" charset="0"/>
                         <a:ea typeface="Times New Roman" panose="02020603050405020304" pitchFamily="18" charset="0"/>
@@ -7809,7 +7904,7 @@
                       <a:pPr algn="ctr">
                         <a:buNone/>
                       </a:pPr>
-                      <a:endParaRPr lang="es-ES_tradnl" sz="1000" dirty="0">
+                      <a:endParaRPr lang="es-ES_tradnl" sz="900" dirty="0">
                         <a:effectLst/>
                         <a:latin typeface="Times New Roman" panose="02020603050405020304" pitchFamily="18" charset="0"/>
                         <a:ea typeface="Times New Roman" panose="02020603050405020304" pitchFamily="18" charset="0"/>
@@ -7838,7 +7933,7 @@
                       <a:pPr algn="ctr">
                         <a:buNone/>
                       </a:pPr>
-                      <a:endParaRPr lang="es-ES_tradnl" sz="1000" dirty="0">
+                      <a:endParaRPr lang="es-ES_tradnl" sz="900" dirty="0">
                         <a:effectLst/>
                         <a:latin typeface="Times New Roman" panose="02020603050405020304" pitchFamily="18" charset="0"/>
                         <a:ea typeface="Times New Roman" panose="02020603050405020304" pitchFamily="18" charset="0"/>
@@ -7867,7 +7962,7 @@
                       <a:pPr algn="ctr">
                         <a:buNone/>
                       </a:pPr>
-                      <a:endParaRPr lang="es-ES_tradnl" sz="1000" dirty="0">
+                      <a:endParaRPr lang="es-ES_tradnl" sz="900" dirty="0">
                         <a:effectLst/>
                         <a:latin typeface="Times New Roman" panose="02020603050405020304" pitchFamily="18" charset="0"/>
                         <a:ea typeface="Times New Roman" panose="02020603050405020304" pitchFamily="18" charset="0"/>
@@ -7896,7 +7991,7 @@
                       <a:pPr algn="ctr">
                         <a:buNone/>
                       </a:pPr>
-                      <a:endParaRPr lang="es-ES_tradnl" sz="1000" dirty="0">
+                      <a:endParaRPr lang="es-ES_tradnl" sz="900" dirty="0">
                         <a:effectLst/>
                         <a:latin typeface="Times New Roman" panose="02020603050405020304" pitchFamily="18" charset="0"/>
                         <a:ea typeface="Times New Roman" panose="02020603050405020304" pitchFamily="18" charset="0"/>
@@ -7925,7 +8020,7 @@
                       <a:pPr algn="ctr">
                         <a:buNone/>
                       </a:pPr>
-                      <a:endParaRPr lang="es-ES_tradnl" sz="1000" dirty="0">
+                      <a:endParaRPr lang="es-ES_tradnl" sz="900" dirty="0">
                         <a:effectLst/>
                         <a:latin typeface="Times New Roman" panose="02020603050405020304" pitchFamily="18" charset="0"/>
                         <a:ea typeface="Times New Roman" panose="02020603050405020304" pitchFamily="18" charset="0"/>
@@ -7954,7 +8049,7 @@
                       <a:pPr algn="ctr">
                         <a:buNone/>
                       </a:pPr>
-                      <a:endParaRPr lang="es-ES_tradnl" sz="1000" dirty="0">
+                      <a:endParaRPr lang="es-ES_tradnl" sz="900" dirty="0">
                         <a:effectLst/>
                         <a:latin typeface="Times New Roman" panose="02020603050405020304" pitchFamily="18" charset="0"/>
                         <a:ea typeface="Times New Roman" panose="02020603050405020304" pitchFamily="18" charset="0"/>
@@ -7983,7 +8078,7 @@
                       <a:pPr algn="ctr">
                         <a:buNone/>
                       </a:pPr>
-                      <a:endParaRPr lang="es-ES_tradnl" sz="1000" dirty="0">
+                      <a:endParaRPr lang="es-ES_tradnl" sz="900" dirty="0">
                         <a:effectLst/>
                         <a:latin typeface="Times New Roman" panose="02020603050405020304" pitchFamily="18" charset="0"/>
                         <a:ea typeface="Times New Roman" panose="02020603050405020304" pitchFamily="18" charset="0"/>
@@ -8012,7 +8107,7 @@
                       <a:pPr algn="ctr">
                         <a:buNone/>
                       </a:pPr>
-                      <a:endParaRPr lang="es-ES_tradnl" sz="1000" dirty="0">
+                      <a:endParaRPr lang="es-ES_tradnl" sz="900" dirty="0">
                         <a:effectLst/>
                         <a:latin typeface="Times New Roman" panose="02020603050405020304" pitchFamily="18" charset="0"/>
                         <a:ea typeface="Times New Roman" panose="02020603050405020304" pitchFamily="18" charset="0"/>
@@ -8041,7 +8136,7 @@
                       <a:pPr algn="ctr">
                         <a:buNone/>
                       </a:pPr>
-                      <a:endParaRPr lang="es-ES_tradnl" sz="1000" dirty="0">
+                      <a:endParaRPr lang="es-ES_tradnl" sz="900" dirty="0">
                         <a:effectLst/>
                         <a:latin typeface="Times New Roman" panose="02020603050405020304" pitchFamily="18" charset="0"/>
                         <a:ea typeface="Times New Roman" panose="02020603050405020304" pitchFamily="18" charset="0"/>
@@ -8070,7 +8165,7 @@
                       <a:pPr algn="ctr">
                         <a:buNone/>
                       </a:pPr>
-                      <a:endParaRPr lang="es-ES_tradnl" sz="1000" dirty="0">
+                      <a:endParaRPr lang="es-ES_tradnl" sz="900" dirty="0">
                         <a:effectLst/>
                         <a:latin typeface="Times New Roman" panose="02020603050405020304" pitchFamily="18" charset="0"/>
                         <a:ea typeface="Times New Roman" panose="02020603050405020304" pitchFamily="18" charset="0"/>
@@ -8099,7 +8194,7 @@
                       <a:pPr algn="ctr">
                         <a:buNone/>
                       </a:pPr>
-                      <a:endParaRPr lang="es-ES_tradnl" sz="1000" dirty="0">
+                      <a:endParaRPr lang="es-ES_tradnl" sz="900" dirty="0">
                         <a:effectLst/>
                         <a:latin typeface="Times New Roman" panose="02020603050405020304" pitchFamily="18" charset="0"/>
                         <a:ea typeface="Times New Roman" panose="02020603050405020304" pitchFamily="18" charset="0"/>
@@ -8444,7 +8539,7 @@
             <p:ph sz="quarter" idx="14"/>
             <p:extLst>
               <p:ext uri="{D42A27DB-BD31-4B8C-83A1-F6EECF244321}">
-                <p14:modId xmlns:p14="http://schemas.microsoft.com/office/powerpoint/2010/main" val="1477662829"/>
+                <p14:modId xmlns:p14="http://schemas.microsoft.com/office/powerpoint/2010/main" val="2397336306"/>
               </p:ext>
             </p:extLst>
           </p:nvPr>
@@ -9794,17 +9889,23 @@
                         <a:buNone/>
                       </a:pPr>
                       <a:r>
-                        <a:rPr lang="es-ES_tradnl" sz="1000" dirty="0">
-                          <a:effectLst/>
-                          <a:latin typeface="Times New Roman" panose="02020603050405020304" pitchFamily="18" charset="0"/>
-                          <a:ea typeface="Times New Roman" panose="02020603050405020304" pitchFamily="18" charset="0"/>
-                          <a:cs typeface="Times New Roman" panose="02020603050405020304" pitchFamily="18" charset="0"/>
-                        </a:rPr>
-                        <a:t>0.99</a:t>
-                      </a:r>
-                    </a:p>
-                  </a:txBody>
-                  <a:tcPr marL="68580" marR="68580" marT="0" marB="0" anchor="ctr">
+                        <a:rPr lang="es-ES" sz="1000">
+                          <a:effectLst/>
+                          <a:latin typeface="Times New Roman" panose="02020603050405020304" pitchFamily="18" charset="0"/>
+                          <a:ea typeface="Times New Roman" panose="02020603050405020304" pitchFamily="18" charset="0"/>
+                          <a:cs typeface="Times New Roman" panose="02020603050405020304" pitchFamily="18" charset="0"/>
+                        </a:rPr>
+                        <a:t>6.00</a:t>
+                      </a:r>
+                      <a:endParaRPr lang="de-DE" sz="1000">
+                        <a:effectLst/>
+                        <a:latin typeface="Times New Roman" panose="02020603050405020304" pitchFamily="18" charset="0"/>
+                        <a:ea typeface="Times New Roman" panose="02020603050405020304" pitchFamily="18" charset="0"/>
+                        <a:cs typeface="Times New Roman" panose="02020603050405020304" pitchFamily="18" charset="0"/>
+                      </a:endParaRPr>
+                    </a:p>
+                  </a:txBody>
+                  <a:tcPr marL="68580" marR="68580" marT="0" marB="0">
                     <a:lnT w="12700" cap="flat" cmpd="sng" algn="ctr">
                       <a:solidFill>
                         <a:schemeClr val="tx1"/>
@@ -9826,17 +9927,23 @@
                         <a:buNone/>
                       </a:pPr>
                       <a:r>
-                        <a:rPr lang="es-ES_tradnl" sz="1000" dirty="0">
-                          <a:effectLst/>
-                          <a:latin typeface="Times New Roman" panose="02020603050405020304" pitchFamily="18" charset="0"/>
-                          <a:ea typeface="Times New Roman" panose="02020603050405020304" pitchFamily="18" charset="0"/>
-                          <a:cs typeface="Times New Roman" panose="02020603050405020304" pitchFamily="18" charset="0"/>
-                        </a:rPr>
-                        <a:t>2.64</a:t>
-                      </a:r>
-                    </a:p>
-                  </a:txBody>
-                  <a:tcPr marL="68580" marR="68580" marT="0" marB="0" anchor="ctr">
+                        <a:rPr lang="es-ES" sz="1000">
+                          <a:effectLst/>
+                          <a:latin typeface="Times New Roman" panose="02020603050405020304" pitchFamily="18" charset="0"/>
+                          <a:ea typeface="Times New Roman" panose="02020603050405020304" pitchFamily="18" charset="0"/>
+                          <a:cs typeface="Times New Roman" panose="02020603050405020304" pitchFamily="18" charset="0"/>
+                        </a:rPr>
+                        <a:t>1.75</a:t>
+                      </a:r>
+                      <a:endParaRPr lang="de-DE" sz="1000">
+                        <a:effectLst/>
+                        <a:latin typeface="Times New Roman" panose="02020603050405020304" pitchFamily="18" charset="0"/>
+                        <a:ea typeface="Times New Roman" panose="02020603050405020304" pitchFamily="18" charset="0"/>
+                        <a:cs typeface="Times New Roman" panose="02020603050405020304" pitchFamily="18" charset="0"/>
+                      </a:endParaRPr>
+                    </a:p>
+                  </a:txBody>
+                  <a:tcPr marL="68580" marR="68580" marT="0" marB="0">
                     <a:lnT w="12700" cap="flat" cmpd="sng" algn="ctr">
                       <a:solidFill>
                         <a:schemeClr val="tx1"/>
@@ -9858,17 +9965,23 @@
                         <a:buNone/>
                       </a:pPr>
                       <a:r>
-                        <a:rPr lang="es-ES_tradnl" sz="1000" dirty="0">
-                          <a:effectLst/>
-                          <a:latin typeface="Times New Roman" panose="02020603050405020304" pitchFamily="18" charset="0"/>
-                          <a:ea typeface="Times New Roman" panose="02020603050405020304" pitchFamily="18" charset="0"/>
-                          <a:cs typeface="Times New Roman" panose="02020603050405020304" pitchFamily="18" charset="0"/>
-                        </a:rPr>
-                        <a:t>1.76</a:t>
-                      </a:r>
-                    </a:p>
-                  </a:txBody>
-                  <a:tcPr marL="68580" marR="68580" marT="0" marB="0" anchor="ctr">
+                        <a:rPr lang="es-ES" sz="1000">
+                          <a:effectLst/>
+                          <a:latin typeface="Times New Roman" panose="02020603050405020304" pitchFamily="18" charset="0"/>
+                          <a:ea typeface="Times New Roman" panose="02020603050405020304" pitchFamily="18" charset="0"/>
+                          <a:cs typeface="Times New Roman" panose="02020603050405020304" pitchFamily="18" charset="0"/>
+                        </a:rPr>
+                        <a:t>15.60</a:t>
+                      </a:r>
+                      <a:endParaRPr lang="de-DE" sz="1000">
+                        <a:effectLst/>
+                        <a:latin typeface="Times New Roman" panose="02020603050405020304" pitchFamily="18" charset="0"/>
+                        <a:ea typeface="Times New Roman" panose="02020603050405020304" pitchFamily="18" charset="0"/>
+                        <a:cs typeface="Times New Roman" panose="02020603050405020304" pitchFamily="18" charset="0"/>
+                      </a:endParaRPr>
+                    </a:p>
+                  </a:txBody>
+                  <a:tcPr marL="68580" marR="68580" marT="0" marB="0">
                     <a:lnT w="12700" cap="flat" cmpd="sng" algn="ctr">
                       <a:solidFill>
                         <a:schemeClr val="tx1"/>
@@ -9890,17 +10003,23 @@
                         <a:buNone/>
                       </a:pPr>
                       <a:r>
-                        <a:rPr lang="es-ES_tradnl" sz="1000" dirty="0">
-                          <a:effectLst/>
-                          <a:latin typeface="Times New Roman" panose="02020603050405020304" pitchFamily="18" charset="0"/>
-                          <a:ea typeface="Times New Roman" panose="02020603050405020304" pitchFamily="18" charset="0"/>
-                          <a:cs typeface="Times New Roman" panose="02020603050405020304" pitchFamily="18" charset="0"/>
-                        </a:rPr>
-                        <a:t>40.62</a:t>
-                      </a:r>
-                    </a:p>
-                  </a:txBody>
-                  <a:tcPr marL="68580" marR="68580" marT="0" marB="0" anchor="ctr">
+                        <a:rPr lang="es-ES" sz="1000">
+                          <a:effectLst/>
+                          <a:latin typeface="Times New Roman" panose="02020603050405020304" pitchFamily="18" charset="0"/>
+                          <a:ea typeface="Times New Roman" panose="02020603050405020304" pitchFamily="18" charset="0"/>
+                          <a:cs typeface="Times New Roman" panose="02020603050405020304" pitchFamily="18" charset="0"/>
+                        </a:rPr>
+                        <a:t>3.63</a:t>
+                      </a:r>
+                      <a:endParaRPr lang="de-DE" sz="1000">
+                        <a:effectLst/>
+                        <a:latin typeface="Times New Roman" panose="02020603050405020304" pitchFamily="18" charset="0"/>
+                        <a:ea typeface="Times New Roman" panose="02020603050405020304" pitchFamily="18" charset="0"/>
+                        <a:cs typeface="Times New Roman" panose="02020603050405020304" pitchFamily="18" charset="0"/>
+                      </a:endParaRPr>
+                    </a:p>
+                  </a:txBody>
+                  <a:tcPr marL="68580" marR="68580" marT="0" marB="0">
                     <a:lnT w="12700" cap="flat" cmpd="sng" algn="ctr">
                       <a:solidFill>
                         <a:schemeClr val="tx1"/>
@@ -9922,17 +10041,23 @@
                         <a:buNone/>
                       </a:pPr>
                       <a:r>
-                        <a:rPr lang="es-ES_tradnl" sz="1000" dirty="0">
-                          <a:effectLst/>
-                          <a:latin typeface="Times New Roman" panose="02020603050405020304" pitchFamily="18" charset="0"/>
-                          <a:ea typeface="Times New Roman" panose="02020603050405020304" pitchFamily="18" charset="0"/>
-                          <a:cs typeface="Times New Roman" panose="02020603050405020304" pitchFamily="18" charset="0"/>
-                        </a:rPr>
-                        <a:t>NaN</a:t>
-                      </a:r>
-                    </a:p>
-                  </a:txBody>
-                  <a:tcPr marL="68580" marR="68580" marT="0" marB="0" anchor="ctr">
+                        <a:rPr lang="es-ES" sz="1000">
+                          <a:effectLst/>
+                          <a:latin typeface="Times New Roman" panose="02020603050405020304" pitchFamily="18" charset="0"/>
+                          <a:ea typeface="Times New Roman" panose="02020603050405020304" pitchFamily="18" charset="0"/>
+                          <a:cs typeface="Times New Roman" panose="02020603050405020304" pitchFamily="18" charset="0"/>
+                        </a:rPr>
+                        <a:t>44.75</a:t>
+                      </a:r>
+                      <a:endParaRPr lang="de-DE" sz="1000">
+                        <a:effectLst/>
+                        <a:latin typeface="Times New Roman" panose="02020603050405020304" pitchFamily="18" charset="0"/>
+                        <a:ea typeface="Times New Roman" panose="02020603050405020304" pitchFamily="18" charset="0"/>
+                        <a:cs typeface="Times New Roman" panose="02020603050405020304" pitchFamily="18" charset="0"/>
+                      </a:endParaRPr>
+                    </a:p>
+                  </a:txBody>
+                  <a:tcPr marL="68580" marR="68580" marT="0" marB="0">
                     <a:lnT w="12700" cap="flat" cmpd="sng" algn="ctr">
                       <a:solidFill>
                         <a:schemeClr val="tx1"/>
@@ -10217,109 +10342,139 @@
                         <a:buNone/>
                       </a:pPr>
                       <a:r>
-                        <a:rPr lang="es-ES_tradnl" sz="1000" dirty="0">
-                          <a:effectLst/>
-                          <a:latin typeface="Times New Roman" panose="02020603050405020304" pitchFamily="18" charset="0"/>
-                          <a:ea typeface="Times New Roman" panose="02020603050405020304" pitchFamily="18" charset="0"/>
-                          <a:cs typeface="Times New Roman" panose="02020603050405020304" pitchFamily="18" charset="0"/>
-                        </a:rPr>
-                        <a:t>3.43</a:t>
-                      </a:r>
-                    </a:p>
-                  </a:txBody>
-                  <a:tcPr marL="68580" marR="68580" marT="0" marB="0" anchor="ctr">
-                    <a:noFill/>
-                  </a:tcPr>
-                </a:tc>
-                <a:tc>
-                  <a:txBody>
-                    <a:bodyPr/>
-                    <a:lstStyle/>
-                    <a:p>
-                      <a:pPr algn="ctr">
-                        <a:buNone/>
-                      </a:pPr>
-                      <a:r>
-                        <a:rPr lang="es-ES_tradnl" sz="1000" dirty="0">
-                          <a:effectLst/>
-                          <a:latin typeface="Times New Roman" panose="02020603050405020304" pitchFamily="18" charset="0"/>
-                          <a:ea typeface="Times New Roman" panose="02020603050405020304" pitchFamily="18" charset="0"/>
-                          <a:cs typeface="Times New Roman" panose="02020603050405020304" pitchFamily="18" charset="0"/>
-                        </a:rPr>
-                        <a:t>63.28</a:t>
-                      </a:r>
-                    </a:p>
-                  </a:txBody>
-                  <a:tcPr marL="68580" marR="68580" marT="0" marB="0" anchor="ctr">
-                    <a:noFill/>
-                  </a:tcPr>
-                </a:tc>
-                <a:tc>
-                  <a:txBody>
-                    <a:bodyPr/>
-                    <a:lstStyle/>
-                    <a:p>
-                      <a:pPr algn="ctr">
-                        <a:buNone/>
-                      </a:pPr>
-                      <a:r>
-                        <a:rPr lang="es-ES_tradnl" sz="1000" dirty="0">
-                          <a:effectLst/>
-                          <a:latin typeface="Times New Roman" panose="02020603050405020304" pitchFamily="18" charset="0"/>
-                          <a:ea typeface="Times New Roman" panose="02020603050405020304" pitchFamily="18" charset="0"/>
-                          <a:cs typeface="Times New Roman" panose="02020603050405020304" pitchFamily="18" charset="0"/>
-                        </a:rPr>
-                        <a:t>8.58</a:t>
-                      </a:r>
-                    </a:p>
-                  </a:txBody>
-                  <a:tcPr marL="68580" marR="68580" marT="0" marB="0" anchor="ctr">
-                    <a:noFill/>
-                  </a:tcPr>
-                </a:tc>
-                <a:tc>
-                  <a:txBody>
-                    <a:bodyPr/>
-                    <a:lstStyle/>
-                    <a:p>
-                      <a:pPr algn="ctr">
-                        <a:buNone/>
-                      </a:pPr>
-                      <a:r>
-                        <a:rPr lang="es-ES_tradnl" sz="1000" dirty="0">
-                          <a:effectLst/>
-                          <a:latin typeface="Times New Roman" panose="02020603050405020304" pitchFamily="18" charset="0"/>
-                          <a:ea typeface="Times New Roman" panose="02020603050405020304" pitchFamily="18" charset="0"/>
-                          <a:cs typeface="Times New Roman" panose="02020603050405020304" pitchFamily="18" charset="0"/>
-                        </a:rPr>
-                        <a:t>32.01</a:t>
-                      </a:r>
-                    </a:p>
-                  </a:txBody>
-                  <a:tcPr marL="68580" marR="68580" marT="0" marB="0" anchor="ctr">
-                    <a:noFill/>
-                  </a:tcPr>
-                </a:tc>
-                <a:tc>
-                  <a:txBody>
-                    <a:bodyPr/>
-                    <a:lstStyle/>
-                    <a:p>
-                      <a:pPr algn="ctr">
-                        <a:buNone/>
-                      </a:pPr>
-                      <a:r>
-                        <a:rPr lang="es-ES_tradnl" sz="1000" dirty="0">
-                          <a:effectLst/>
-                          <a:latin typeface="Times New Roman" panose="02020603050405020304" pitchFamily="18" charset="0"/>
-                          <a:ea typeface="Times New Roman" panose="02020603050405020304" pitchFamily="18" charset="0"/>
-                          <a:cs typeface="Times New Roman" panose="02020603050405020304" pitchFamily="18" charset="0"/>
-                        </a:rPr>
-                        <a:t>NaN</a:t>
-                      </a:r>
-                    </a:p>
-                  </a:txBody>
-                  <a:tcPr marL="68580" marR="68580" marT="0" marB="0" anchor="ctr">
+                        <a:rPr lang="es-ES" sz="1000">
+                          <a:effectLst/>
+                          <a:latin typeface="Times New Roman" panose="02020603050405020304" pitchFamily="18" charset="0"/>
+                          <a:ea typeface="Times New Roman" panose="02020603050405020304" pitchFamily="18" charset="0"/>
+                          <a:cs typeface="Times New Roman" panose="02020603050405020304" pitchFamily="18" charset="0"/>
+                        </a:rPr>
+                        <a:t>6.00</a:t>
+                      </a:r>
+                      <a:endParaRPr lang="de-DE" sz="1000">
+                        <a:effectLst/>
+                        <a:latin typeface="Times New Roman" panose="02020603050405020304" pitchFamily="18" charset="0"/>
+                        <a:ea typeface="Times New Roman" panose="02020603050405020304" pitchFamily="18" charset="0"/>
+                        <a:cs typeface="Times New Roman" panose="02020603050405020304" pitchFamily="18" charset="0"/>
+                      </a:endParaRPr>
+                    </a:p>
+                  </a:txBody>
+                  <a:tcPr marL="68580" marR="68580" marT="0" marB="0">
+                    <a:noFill/>
+                  </a:tcPr>
+                </a:tc>
+                <a:tc>
+                  <a:txBody>
+                    <a:bodyPr/>
+                    <a:lstStyle/>
+                    <a:p>
+                      <a:pPr algn="ctr">
+                        <a:buNone/>
+                      </a:pPr>
+                      <a:r>
+                        <a:rPr lang="es-ES" sz="1000">
+                          <a:effectLst/>
+                          <a:latin typeface="Times New Roman" panose="02020603050405020304" pitchFamily="18" charset="0"/>
+                          <a:ea typeface="Times New Roman" panose="02020603050405020304" pitchFamily="18" charset="0"/>
+                          <a:cs typeface="Times New Roman" panose="02020603050405020304" pitchFamily="18" charset="0"/>
+                        </a:rPr>
+                        <a:t>2.76</a:t>
+                      </a:r>
+                      <a:endParaRPr lang="de-DE" sz="1000">
+                        <a:effectLst/>
+                        <a:latin typeface="Times New Roman" panose="02020603050405020304" pitchFamily="18" charset="0"/>
+                        <a:ea typeface="Times New Roman" panose="02020603050405020304" pitchFamily="18" charset="0"/>
+                        <a:cs typeface="Times New Roman" panose="02020603050405020304" pitchFamily="18" charset="0"/>
+                      </a:endParaRPr>
+                    </a:p>
+                  </a:txBody>
+                  <a:tcPr marL="68580" marR="68580" marT="0" marB="0">
+                    <a:noFill/>
+                  </a:tcPr>
+                </a:tc>
+                <a:tc>
+                  <a:txBody>
+                    <a:bodyPr/>
+                    <a:lstStyle/>
+                    <a:p>
+                      <a:pPr algn="ctr">
+                        <a:buNone/>
+                      </a:pPr>
+                      <a:r>
+                        <a:rPr lang="es-ES" sz="1000">
+                          <a:effectLst/>
+                          <a:latin typeface="Times New Roman" panose="02020603050405020304" pitchFamily="18" charset="0"/>
+                          <a:ea typeface="Times New Roman" panose="02020603050405020304" pitchFamily="18" charset="0"/>
+                          <a:cs typeface="Times New Roman" panose="02020603050405020304" pitchFamily="18" charset="0"/>
+                        </a:rPr>
+                        <a:t>43.20</a:t>
+                      </a:r>
+                      <a:endParaRPr lang="de-DE" sz="1000">
+                        <a:effectLst/>
+                        <a:latin typeface="Times New Roman" panose="02020603050405020304" pitchFamily="18" charset="0"/>
+                        <a:ea typeface="Times New Roman" panose="02020603050405020304" pitchFamily="18" charset="0"/>
+                        <a:cs typeface="Times New Roman" panose="02020603050405020304" pitchFamily="18" charset="0"/>
+                      </a:endParaRPr>
+                    </a:p>
+                  </a:txBody>
+                  <a:tcPr marL="68580" marR="68580" marT="0" marB="0">
+                    <a:noFill/>
+                  </a:tcPr>
+                </a:tc>
+                <a:tc>
+                  <a:txBody>
+                    <a:bodyPr/>
+                    <a:lstStyle/>
+                    <a:p>
+                      <a:pPr algn="ctr">
+                        <a:buNone/>
+                      </a:pPr>
+                      <a:r>
+                        <a:rPr lang="es-ES" sz="1000">
+                          <a:effectLst/>
+                          <a:latin typeface="Times New Roman" panose="02020603050405020304" pitchFamily="18" charset="0"/>
+                          <a:ea typeface="Times New Roman" panose="02020603050405020304" pitchFamily="18" charset="0"/>
+                          <a:cs typeface="Times New Roman" panose="02020603050405020304" pitchFamily="18" charset="0"/>
+                        </a:rPr>
+                        <a:t>8.13</a:t>
+                      </a:r>
+                      <a:endParaRPr lang="de-DE" sz="1000">
+                        <a:effectLst/>
+                        <a:latin typeface="Times New Roman" panose="02020603050405020304" pitchFamily="18" charset="0"/>
+                        <a:ea typeface="Times New Roman" panose="02020603050405020304" pitchFamily="18" charset="0"/>
+                        <a:cs typeface="Times New Roman" panose="02020603050405020304" pitchFamily="18" charset="0"/>
+                      </a:endParaRPr>
+                    </a:p>
+                  </a:txBody>
+                  <a:tcPr marL="68580" marR="68580" marT="0" marB="0">
+                    <a:noFill/>
+                  </a:tcPr>
+                </a:tc>
+                <a:tc>
+                  <a:txBody>
+                    <a:bodyPr/>
+                    <a:lstStyle/>
+                    <a:p>
+                      <a:pPr algn="ctr">
+                        <a:buNone/>
+                      </a:pPr>
+                      <a:r>
+                        <a:rPr lang="es-ES" sz="1000">
+                          <a:effectLst/>
+                          <a:latin typeface="Times New Roman" panose="02020603050405020304" pitchFamily="18" charset="0"/>
+                          <a:ea typeface="Times New Roman" panose="02020603050405020304" pitchFamily="18" charset="0"/>
+                          <a:cs typeface="Times New Roman" panose="02020603050405020304" pitchFamily="18" charset="0"/>
+                        </a:rPr>
+                        <a:t>20.37</a:t>
+                      </a:r>
+                      <a:endParaRPr lang="de-DE" sz="1000">
+                        <a:effectLst/>
+                        <a:latin typeface="Times New Roman" panose="02020603050405020304" pitchFamily="18" charset="0"/>
+                        <a:ea typeface="Times New Roman" panose="02020603050405020304" pitchFamily="18" charset="0"/>
+                        <a:cs typeface="Times New Roman" panose="02020603050405020304" pitchFamily="18" charset="0"/>
+                      </a:endParaRPr>
+                    </a:p>
+                  </a:txBody>
+                  <a:tcPr marL="68580" marR="68580" marT="0" marB="0">
                     <a:noFill/>
                   </a:tcPr>
                 </a:tc>
@@ -10595,99 +10750,123 @@
                         <a:buNone/>
                       </a:pPr>
                       <a:r>
-                        <a:rPr lang="es-ES_tradnl" sz="1000" dirty="0">
-                          <a:effectLst/>
-                          <a:latin typeface="Times New Roman" panose="02020603050405020304" pitchFamily="18" charset="0"/>
-                          <a:ea typeface="Times New Roman" panose="02020603050405020304" pitchFamily="18" charset="0"/>
-                          <a:cs typeface="Times New Roman" panose="02020603050405020304" pitchFamily="18" charset="0"/>
-                        </a:rPr>
-                        <a:t>4.47</a:t>
-                      </a:r>
-                    </a:p>
-                  </a:txBody>
-                  <a:tcPr marL="68580" marR="68580" marT="0" marB="0" anchor="ctr">
-                    <a:noFill/>
-                  </a:tcPr>
-                </a:tc>
-                <a:tc>
-                  <a:txBody>
-                    <a:bodyPr/>
-                    <a:lstStyle/>
-                    <a:p>
-                      <a:pPr algn="ctr">
-                        <a:buNone/>
-                      </a:pPr>
-                      <a:r>
-                        <a:rPr lang="es-ES_tradnl" sz="1000" dirty="0">
-                          <a:effectLst/>
-                          <a:latin typeface="Times New Roman" panose="02020603050405020304" pitchFamily="18" charset="0"/>
-                          <a:ea typeface="Times New Roman" panose="02020603050405020304" pitchFamily="18" charset="0"/>
-                          <a:cs typeface="Times New Roman" panose="02020603050405020304" pitchFamily="18" charset="0"/>
-                        </a:rPr>
-                        <a:t>112.76</a:t>
-                      </a:r>
-                    </a:p>
-                  </a:txBody>
-                  <a:tcPr marL="68580" marR="68580" marT="0" marB="0" anchor="ctr">
-                    <a:noFill/>
-                  </a:tcPr>
-                </a:tc>
-                <a:tc>
-                  <a:txBody>
-                    <a:bodyPr/>
-                    <a:lstStyle/>
-                    <a:p>
-                      <a:pPr algn="ctr">
-                        <a:buNone/>
-                      </a:pPr>
-                      <a:r>
-                        <a:rPr lang="es-ES_tradnl" sz="1000" dirty="0">
-                          <a:effectLst/>
-                          <a:latin typeface="Times New Roman" panose="02020603050405020304" pitchFamily="18" charset="0"/>
-                          <a:ea typeface="Times New Roman" panose="02020603050405020304" pitchFamily="18" charset="0"/>
-                          <a:cs typeface="Times New Roman" panose="02020603050405020304" pitchFamily="18" charset="0"/>
-                        </a:rPr>
-                        <a:t>13.26</a:t>
-                      </a:r>
-                    </a:p>
-                  </a:txBody>
-                  <a:tcPr marL="68580" marR="68580" marT="0" marB="0" anchor="ctr">
-                    <a:noFill/>
-                  </a:tcPr>
-                </a:tc>
-                <a:tc>
-                  <a:txBody>
-                    <a:bodyPr/>
-                    <a:lstStyle/>
-                    <a:p>
-                      <a:pPr algn="ctr">
-                        <a:buNone/>
-                      </a:pPr>
-                      <a:r>
-                        <a:rPr lang="es-ES_tradnl" sz="1000" dirty="0">
-                          <a:effectLst/>
-                          <a:latin typeface="Times New Roman" panose="02020603050405020304" pitchFamily="18" charset="0"/>
-                          <a:ea typeface="Times New Roman" panose="02020603050405020304" pitchFamily="18" charset="0"/>
-                          <a:cs typeface="Times New Roman" panose="02020603050405020304" pitchFamily="18" charset="0"/>
-                        </a:rPr>
-                        <a:t>53.82</a:t>
-                      </a:r>
-                    </a:p>
-                  </a:txBody>
-                  <a:tcPr marL="68580" marR="68580" marT="0" marB="0" anchor="ctr">
-                    <a:noFill/>
-                  </a:tcPr>
-                </a:tc>
-                <a:tc>
-                  <a:txBody>
-                    <a:bodyPr/>
-                    <a:lstStyle/>
-                    <a:p>
-                      <a:pPr algn="ctr">
-                        <a:buNone/>
-                      </a:pPr>
-                      <a:r>
-                        <a:rPr lang="es-ES_tradnl" sz="1000" dirty="0">
+                        <a:rPr lang="es-ES" sz="1000">
+                          <a:effectLst/>
+                          <a:latin typeface="Times New Roman" panose="02020603050405020304" pitchFamily="18" charset="0"/>
+                          <a:ea typeface="Times New Roman" panose="02020603050405020304" pitchFamily="18" charset="0"/>
+                          <a:cs typeface="Times New Roman" panose="02020603050405020304" pitchFamily="18" charset="0"/>
+                        </a:rPr>
+                        <a:t>2.90</a:t>
+                      </a:r>
+                      <a:endParaRPr lang="de-DE" sz="1000">
+                        <a:effectLst/>
+                        <a:latin typeface="Times New Roman" panose="02020603050405020304" pitchFamily="18" charset="0"/>
+                        <a:ea typeface="Times New Roman" panose="02020603050405020304" pitchFamily="18" charset="0"/>
+                        <a:cs typeface="Times New Roman" panose="02020603050405020304" pitchFamily="18" charset="0"/>
+                      </a:endParaRPr>
+                    </a:p>
+                  </a:txBody>
+                  <a:tcPr marL="68580" marR="68580" marT="0" marB="0">
+                    <a:noFill/>
+                  </a:tcPr>
+                </a:tc>
+                <a:tc>
+                  <a:txBody>
+                    <a:bodyPr/>
+                    <a:lstStyle/>
+                    <a:p>
+                      <a:pPr algn="ctr">
+                        <a:buNone/>
+                      </a:pPr>
+                      <a:r>
+                        <a:rPr lang="es-ES" sz="1000">
+                          <a:effectLst/>
+                          <a:latin typeface="Times New Roman" panose="02020603050405020304" pitchFamily="18" charset="0"/>
+                          <a:ea typeface="Times New Roman" panose="02020603050405020304" pitchFamily="18" charset="0"/>
+                          <a:cs typeface="Times New Roman" panose="02020603050405020304" pitchFamily="18" charset="0"/>
+                        </a:rPr>
+                        <a:t>47.34</a:t>
+                      </a:r>
+                      <a:endParaRPr lang="de-DE" sz="1000">
+                        <a:effectLst/>
+                        <a:latin typeface="Times New Roman" panose="02020603050405020304" pitchFamily="18" charset="0"/>
+                        <a:ea typeface="Times New Roman" panose="02020603050405020304" pitchFamily="18" charset="0"/>
+                        <a:cs typeface="Times New Roman" panose="02020603050405020304" pitchFamily="18" charset="0"/>
+                      </a:endParaRPr>
+                    </a:p>
+                  </a:txBody>
+                  <a:tcPr marL="68580" marR="68580" marT="0" marB="0">
+                    <a:noFill/>
+                  </a:tcPr>
+                </a:tc>
+                <a:tc>
+                  <a:txBody>
+                    <a:bodyPr/>
+                    <a:lstStyle/>
+                    <a:p>
+                      <a:pPr algn="ctr">
+                        <a:buNone/>
+                      </a:pPr>
+                      <a:r>
+                        <a:rPr lang="es-ES" sz="1000">
+                          <a:effectLst/>
+                          <a:latin typeface="Times New Roman" panose="02020603050405020304" pitchFamily="18" charset="0"/>
+                          <a:ea typeface="Times New Roman" panose="02020603050405020304" pitchFamily="18" charset="0"/>
+                          <a:cs typeface="Times New Roman" panose="02020603050405020304" pitchFamily="18" charset="0"/>
+                        </a:rPr>
+                        <a:t>8.86</a:t>
+                      </a:r>
+                      <a:endParaRPr lang="de-DE" sz="1000">
+                        <a:effectLst/>
+                        <a:latin typeface="Times New Roman" panose="02020603050405020304" pitchFamily="18" charset="0"/>
+                        <a:ea typeface="Times New Roman" panose="02020603050405020304" pitchFamily="18" charset="0"/>
+                        <a:cs typeface="Times New Roman" panose="02020603050405020304" pitchFamily="18" charset="0"/>
+                      </a:endParaRPr>
+                    </a:p>
+                  </a:txBody>
+                  <a:tcPr marL="68580" marR="68580" marT="0" marB="0">
+                    <a:noFill/>
+                  </a:tcPr>
+                </a:tc>
+                <a:tc>
+                  <a:txBody>
+                    <a:bodyPr/>
+                    <a:lstStyle/>
+                    <a:p>
+                      <a:pPr algn="ctr">
+                        <a:buNone/>
+                      </a:pPr>
+                      <a:r>
+                        <a:rPr lang="es-ES" sz="1000">
+                          <a:effectLst/>
+                          <a:latin typeface="Times New Roman" panose="02020603050405020304" pitchFamily="18" charset="0"/>
+                          <a:ea typeface="Times New Roman" panose="02020603050405020304" pitchFamily="18" charset="0"/>
+                          <a:cs typeface="Times New Roman" panose="02020603050405020304" pitchFamily="18" charset="0"/>
+                        </a:rPr>
+                        <a:t>32.30</a:t>
+                      </a:r>
+                      <a:endParaRPr lang="de-DE" sz="1000">
+                        <a:effectLst/>
+                        <a:latin typeface="Times New Roman" panose="02020603050405020304" pitchFamily="18" charset="0"/>
+                        <a:ea typeface="Times New Roman" panose="02020603050405020304" pitchFamily="18" charset="0"/>
+                        <a:cs typeface="Times New Roman" panose="02020603050405020304" pitchFamily="18" charset="0"/>
+                      </a:endParaRPr>
+                    </a:p>
+                  </a:txBody>
+                  <a:tcPr marL="68580" marR="68580" marT="0" marB="0">
+                    <a:noFill/>
+                  </a:tcPr>
+                </a:tc>
+                <a:tc>
+                  <a:txBody>
+                    <a:bodyPr/>
+                    <a:lstStyle/>
+                    <a:p>
+                      <a:pPr algn="ctr">
+                        <a:buNone/>
+                      </a:pPr>
+                      <a:r>
+                        <a:rPr lang="es-ES" sz="1000" dirty="0">
                           <a:effectLst/>
                           <a:latin typeface="Times New Roman" panose="02020603050405020304" pitchFamily="18" charset="0"/>
                           <a:ea typeface="Times New Roman" panose="02020603050405020304" pitchFamily="18" charset="0"/>
@@ -10695,9 +10874,15 @@
                         </a:rPr>
                         <a:t>NaN</a:t>
                       </a:r>
-                    </a:p>
-                  </a:txBody>
-                  <a:tcPr marL="68580" marR="68580" marT="0" marB="0" anchor="ctr">
+                      <a:endParaRPr lang="de-DE" sz="1000" dirty="0">
+                        <a:effectLst/>
+                        <a:latin typeface="Times New Roman" panose="02020603050405020304" pitchFamily="18" charset="0"/>
+                        <a:ea typeface="Times New Roman" panose="02020603050405020304" pitchFamily="18" charset="0"/>
+                        <a:cs typeface="Times New Roman" panose="02020603050405020304" pitchFamily="18" charset="0"/>
+                      </a:endParaRPr>
+                    </a:p>
+                  </a:txBody>
+                  <a:tcPr marL="68580" marR="68580" marT="0" marB="0">
                     <a:noFill/>
                   </a:tcPr>
                 </a:tc>
@@ -11877,11 +12062,16 @@
           </p:cNvGraphicFramePr>
           <p:nvPr>
             <p:ph sz="quarter" idx="14"/>
+            <p:extLst>
+              <p:ext uri="{D42A27DB-BD31-4B8C-83A1-F6EECF244321}">
+                <p14:modId xmlns:p14="http://schemas.microsoft.com/office/powerpoint/2010/main" val="3742990302"/>
+              </p:ext>
+            </p:extLst>
           </p:nvPr>
         </p:nvGraphicFramePr>
         <p:xfrm>
           <a:off x="606425" y="4962525"/>
-          <a:ext cx="10532960" cy="1366520"/>
+          <a:ext cx="10532960" cy="1351280"/>
         </p:xfrm>
         <a:graphic>
           <a:graphicData uri="http://schemas.openxmlformats.org/drawingml/2006/table">
@@ -12904,7 +13094,7 @@
                         <a:buNone/>
                       </a:pPr>
                       <a:r>
-                        <a:rPr lang="es-ES_tradnl" sz="1050" dirty="0">
+                        <a:rPr lang="es-ES_tradnl" sz="1000" dirty="0">
                           <a:effectLst/>
                           <a:latin typeface="Times New Roman" panose="02020603050405020304" pitchFamily="18" charset="0"/>
                           <a:ea typeface="Times New Roman" panose="02020603050405020304" pitchFamily="18" charset="0"/>
@@ -12936,7 +13126,7 @@
                         <a:buNone/>
                       </a:pPr>
                       <a:r>
-                        <a:rPr lang="es-ES_tradnl" sz="1050" dirty="0">
+                        <a:rPr lang="es-ES_tradnl" sz="1000" dirty="0">
                           <a:effectLst/>
                           <a:latin typeface="Times New Roman" panose="02020603050405020304" pitchFamily="18" charset="0"/>
                           <a:ea typeface="Times New Roman" panose="02020603050405020304" pitchFamily="18" charset="0"/>
@@ -12968,7 +13158,7 @@
                         <a:buNone/>
                       </a:pPr>
                       <a:r>
-                        <a:rPr lang="es-ES_tradnl" sz="1050" dirty="0">
+                        <a:rPr lang="es-ES_tradnl" sz="1000" dirty="0">
                           <a:effectLst/>
                           <a:latin typeface="Times New Roman" panose="02020603050405020304" pitchFamily="18" charset="0"/>
                           <a:ea typeface="Times New Roman" panose="02020603050405020304" pitchFamily="18" charset="0"/>
@@ -13000,7 +13190,7 @@
                         <a:buNone/>
                       </a:pPr>
                       <a:r>
-                        <a:rPr lang="es-ES_tradnl" sz="1050" dirty="0">
+                        <a:rPr lang="es-ES_tradnl" sz="1000" dirty="0">
                           <a:effectLst/>
                           <a:latin typeface="Times New Roman" panose="02020603050405020304" pitchFamily="18" charset="0"/>
                           <a:ea typeface="Times New Roman" panose="02020603050405020304" pitchFamily="18" charset="0"/>
@@ -13032,7 +13222,7 @@
                         <a:buNone/>
                       </a:pPr>
                       <a:r>
-                        <a:rPr lang="es-ES_tradnl" sz="1050" dirty="0">
+                        <a:rPr lang="es-ES_tradnl" sz="1000" dirty="0">
                           <a:effectLst/>
                           <a:latin typeface="Times New Roman" panose="02020603050405020304" pitchFamily="18" charset="0"/>
                           <a:ea typeface="Times New Roman" panose="02020603050405020304" pitchFamily="18" charset="0"/>
@@ -13064,7 +13254,7 @@
                         <a:buNone/>
                       </a:pPr>
                       <a:r>
-                        <a:rPr lang="es-ES_tradnl" sz="1050" dirty="0">
+                        <a:rPr lang="es-ES_tradnl" sz="1000" dirty="0">
                           <a:effectLst/>
                           <a:latin typeface="Times New Roman" panose="02020603050405020304" pitchFamily="18" charset="0"/>
                           <a:ea typeface="Times New Roman" panose="02020603050405020304" pitchFamily="18" charset="0"/>
@@ -13096,7 +13286,7 @@
                         <a:buNone/>
                       </a:pPr>
                       <a:r>
-                        <a:rPr lang="es-ES_tradnl" sz="1050" dirty="0">
+                        <a:rPr lang="es-ES_tradnl" sz="1000" dirty="0">
                           <a:effectLst/>
                           <a:latin typeface="Times New Roman" panose="02020603050405020304" pitchFamily="18" charset="0"/>
                           <a:ea typeface="Times New Roman" panose="02020603050405020304" pitchFamily="18" charset="0"/>
@@ -13128,7 +13318,7 @@
                         <a:buNone/>
                       </a:pPr>
                       <a:r>
-                        <a:rPr lang="es-ES_tradnl" sz="1050" dirty="0">
+                        <a:rPr lang="es-ES_tradnl" sz="1000" dirty="0">
                           <a:effectLst/>
                           <a:latin typeface="Times New Roman" panose="02020603050405020304" pitchFamily="18" charset="0"/>
                           <a:ea typeface="Times New Roman" panose="02020603050405020304" pitchFamily="18" charset="0"/>
@@ -13160,7 +13350,7 @@
                         <a:buNone/>
                       </a:pPr>
                       <a:r>
-                        <a:rPr lang="es-ES_tradnl" sz="1050" dirty="0">
+                        <a:rPr lang="es-ES_tradnl" sz="1000" dirty="0">
                           <a:effectLst/>
                           <a:latin typeface="Times New Roman" panose="02020603050405020304" pitchFamily="18" charset="0"/>
                           <a:ea typeface="Times New Roman" panose="02020603050405020304" pitchFamily="18" charset="0"/>
@@ -13192,7 +13382,7 @@
                         <a:buNone/>
                       </a:pPr>
                       <a:r>
-                        <a:rPr lang="es-ES_tradnl" sz="1050" dirty="0">
+                        <a:rPr lang="es-ES_tradnl" sz="1000" dirty="0">
                           <a:effectLst/>
                           <a:latin typeface="Times New Roman" panose="02020603050405020304" pitchFamily="18" charset="0"/>
                           <a:ea typeface="Times New Roman" panose="02020603050405020304" pitchFamily="18" charset="0"/>
@@ -13224,17 +13414,23 @@
                         <a:buNone/>
                       </a:pPr>
                       <a:r>
-                        <a:rPr lang="es-ES_tradnl" sz="1050" dirty="0">
-                          <a:effectLst/>
-                          <a:latin typeface="Times New Roman" panose="02020603050405020304" pitchFamily="18" charset="0"/>
-                          <a:ea typeface="Times New Roman" panose="02020603050405020304" pitchFamily="18" charset="0"/>
-                          <a:cs typeface="Times New Roman" panose="02020603050405020304" pitchFamily="18" charset="0"/>
-                        </a:rPr>
-                        <a:t>2.61</a:t>
-                      </a:r>
-                    </a:p>
-                  </a:txBody>
-                  <a:tcPr marL="68580" marR="68580" marT="0" marB="0" anchor="ctr">
+                        <a:rPr lang="es-ES" sz="1000">
+                          <a:effectLst/>
+                          <a:latin typeface="Times New Roman" panose="02020603050405020304" pitchFamily="18" charset="0"/>
+                          <a:ea typeface="Times New Roman" panose="02020603050405020304" pitchFamily="18" charset="0"/>
+                          <a:cs typeface="Times New Roman" panose="02020603050405020304" pitchFamily="18" charset="0"/>
+                        </a:rPr>
+                        <a:t>6.00</a:t>
+                      </a:r>
+                      <a:endParaRPr lang="de-DE" sz="1000">
+                        <a:effectLst/>
+                        <a:latin typeface="Times New Roman" panose="02020603050405020304" pitchFamily="18" charset="0"/>
+                        <a:ea typeface="Times New Roman" panose="02020603050405020304" pitchFamily="18" charset="0"/>
+                        <a:cs typeface="Times New Roman" panose="02020603050405020304" pitchFamily="18" charset="0"/>
+                      </a:endParaRPr>
+                    </a:p>
+                  </a:txBody>
+                  <a:tcPr marL="68580" marR="68580" marT="0" marB="0">
                     <a:lnT w="12700" cap="flat" cmpd="sng" algn="ctr">
                       <a:solidFill>
                         <a:schemeClr val="tx1"/>
@@ -13256,17 +13452,23 @@
                         <a:buNone/>
                       </a:pPr>
                       <a:r>
-                        <a:rPr lang="es-ES_tradnl" sz="1050" dirty="0">
-                          <a:effectLst/>
-                          <a:latin typeface="Times New Roman" panose="02020603050405020304" pitchFamily="18" charset="0"/>
-                          <a:ea typeface="Times New Roman" panose="02020603050405020304" pitchFamily="18" charset="0"/>
-                          <a:cs typeface="Times New Roman" panose="02020603050405020304" pitchFamily="18" charset="0"/>
-                        </a:rPr>
-                        <a:t>34.54</a:t>
-                      </a:r>
-                    </a:p>
-                  </a:txBody>
-                  <a:tcPr marL="68580" marR="68580" marT="0" marB="0" anchor="ctr">
+                        <a:rPr lang="es-ES" sz="1000">
+                          <a:effectLst/>
+                          <a:latin typeface="Times New Roman" panose="02020603050405020304" pitchFamily="18" charset="0"/>
+                          <a:ea typeface="Times New Roman" panose="02020603050405020304" pitchFamily="18" charset="0"/>
+                          <a:cs typeface="Times New Roman" panose="02020603050405020304" pitchFamily="18" charset="0"/>
+                        </a:rPr>
+                        <a:t>2.03</a:t>
+                      </a:r>
+                      <a:endParaRPr lang="de-DE" sz="1000">
+                        <a:effectLst/>
+                        <a:latin typeface="Times New Roman" panose="02020603050405020304" pitchFamily="18" charset="0"/>
+                        <a:ea typeface="Times New Roman" panose="02020603050405020304" pitchFamily="18" charset="0"/>
+                        <a:cs typeface="Times New Roman" panose="02020603050405020304" pitchFamily="18" charset="0"/>
+                      </a:endParaRPr>
+                    </a:p>
+                  </a:txBody>
+                  <a:tcPr marL="68580" marR="68580" marT="0" marB="0">
                     <a:lnT w="12700" cap="flat" cmpd="sng" algn="ctr">
                       <a:solidFill>
                         <a:schemeClr val="tx1"/>
@@ -13288,17 +13490,23 @@
                         <a:buNone/>
                       </a:pPr>
                       <a:r>
-                        <a:rPr lang="es-ES_tradnl" sz="1050" dirty="0">
-                          <a:effectLst/>
-                          <a:latin typeface="Times New Roman" panose="02020603050405020304" pitchFamily="18" charset="0"/>
-                          <a:ea typeface="Times New Roman" panose="02020603050405020304" pitchFamily="18" charset="0"/>
-                          <a:cs typeface="Times New Roman" panose="02020603050405020304" pitchFamily="18" charset="0"/>
-                        </a:rPr>
-                        <a:t>5.68</a:t>
-                      </a:r>
-                    </a:p>
-                  </a:txBody>
-                  <a:tcPr marL="68580" marR="68580" marT="0" marB="0" anchor="ctr">
+                        <a:rPr lang="es-ES" sz="1000">
+                          <a:effectLst/>
+                          <a:latin typeface="Times New Roman" panose="02020603050405020304" pitchFamily="18" charset="0"/>
+                          <a:ea typeface="Times New Roman" panose="02020603050405020304" pitchFamily="18" charset="0"/>
+                          <a:cs typeface="Times New Roman" panose="02020603050405020304" pitchFamily="18" charset="0"/>
+                        </a:rPr>
+                        <a:t>21.15</a:t>
+                      </a:r>
+                      <a:endParaRPr lang="de-DE" sz="1000">
+                        <a:effectLst/>
+                        <a:latin typeface="Times New Roman" panose="02020603050405020304" pitchFamily="18" charset="0"/>
+                        <a:ea typeface="Times New Roman" panose="02020603050405020304" pitchFamily="18" charset="0"/>
+                        <a:cs typeface="Times New Roman" panose="02020603050405020304" pitchFamily="18" charset="0"/>
+                      </a:endParaRPr>
+                    </a:p>
+                  </a:txBody>
+                  <a:tcPr marL="68580" marR="68580" marT="0" marB="0">
                     <a:lnT w="12700" cap="flat" cmpd="sng" algn="ctr">
                       <a:solidFill>
                         <a:schemeClr val="tx1"/>
@@ -13320,17 +13528,23 @@
                         <a:buNone/>
                       </a:pPr>
                       <a:r>
-                        <a:rPr lang="es-ES_tradnl" sz="1050" dirty="0">
-                          <a:effectLst/>
-                          <a:latin typeface="Times New Roman" panose="02020603050405020304" pitchFamily="18" charset="0"/>
-                          <a:ea typeface="Times New Roman" panose="02020603050405020304" pitchFamily="18" charset="0"/>
-                          <a:cs typeface="Times New Roman" panose="02020603050405020304" pitchFamily="18" charset="0"/>
-                        </a:rPr>
-                        <a:t>53.43</a:t>
-                      </a:r>
-                    </a:p>
-                  </a:txBody>
-                  <a:tcPr marL="68580" marR="68580" marT="0" marB="0" anchor="ctr">
+                        <a:rPr lang="es-ES" sz="1000">
+                          <a:effectLst/>
+                          <a:latin typeface="Times New Roman" panose="02020603050405020304" pitchFamily="18" charset="0"/>
+                          <a:ea typeface="Times New Roman" panose="02020603050405020304" pitchFamily="18" charset="0"/>
+                          <a:cs typeface="Times New Roman" panose="02020603050405020304" pitchFamily="18" charset="0"/>
+                        </a:rPr>
+                        <a:t>4.36</a:t>
+                      </a:r>
+                      <a:endParaRPr lang="de-DE" sz="1000">
+                        <a:effectLst/>
+                        <a:latin typeface="Times New Roman" panose="02020603050405020304" pitchFamily="18" charset="0"/>
+                        <a:ea typeface="Times New Roman" panose="02020603050405020304" pitchFamily="18" charset="0"/>
+                        <a:cs typeface="Times New Roman" panose="02020603050405020304" pitchFamily="18" charset="0"/>
+                      </a:endParaRPr>
+                    </a:p>
+                  </a:txBody>
+                  <a:tcPr marL="68580" marR="68580" marT="0" marB="0">
                     <a:lnT w="12700" cap="flat" cmpd="sng" algn="ctr">
                       <a:solidFill>
                         <a:schemeClr val="tx1"/>
@@ -13352,17 +13566,23 @@
                         <a:buNone/>
                       </a:pPr>
                       <a:r>
-                        <a:rPr lang="es-ES_tradnl" sz="1050" dirty="0">
-                          <a:effectLst/>
-                          <a:latin typeface="Times New Roman" panose="02020603050405020304" pitchFamily="18" charset="0"/>
-                          <a:ea typeface="Times New Roman" panose="02020603050405020304" pitchFamily="18" charset="0"/>
-                          <a:cs typeface="Times New Roman" panose="02020603050405020304" pitchFamily="18" charset="0"/>
-                        </a:rPr>
-                        <a:t>NaN</a:t>
-                      </a:r>
-                    </a:p>
-                  </a:txBody>
-                  <a:tcPr marL="68580" marR="68580" marT="0" marB="0" anchor="ctr">
+                        <a:rPr lang="es-ES" sz="1000">
+                          <a:effectLst/>
+                          <a:latin typeface="Times New Roman" panose="02020603050405020304" pitchFamily="18" charset="0"/>
+                          <a:ea typeface="Times New Roman" panose="02020603050405020304" pitchFamily="18" charset="0"/>
+                          <a:cs typeface="Times New Roman" panose="02020603050405020304" pitchFamily="18" charset="0"/>
+                        </a:rPr>
+                        <a:t>33.43</a:t>
+                      </a:r>
+                      <a:endParaRPr lang="de-DE" sz="1000">
+                        <a:effectLst/>
+                        <a:latin typeface="Times New Roman" panose="02020603050405020304" pitchFamily="18" charset="0"/>
+                        <a:ea typeface="Times New Roman" panose="02020603050405020304" pitchFamily="18" charset="0"/>
+                        <a:cs typeface="Times New Roman" panose="02020603050405020304" pitchFamily="18" charset="0"/>
+                      </a:endParaRPr>
+                    </a:p>
+                  </a:txBody>
+                  <a:tcPr marL="68580" marR="68580" marT="0" marB="0">
                     <a:lnT w="12700" cap="flat" cmpd="sng" algn="ctr">
                       <a:solidFill>
                         <a:schemeClr val="tx1"/>
@@ -13417,7 +13637,7 @@
                         <a:buNone/>
                       </a:pPr>
                       <a:r>
-                        <a:rPr lang="es-ES_tradnl" sz="1050" dirty="0">
+                        <a:rPr lang="es-ES_tradnl" sz="1000" dirty="0">
                           <a:effectLst/>
                           <a:latin typeface="Times New Roman" panose="02020603050405020304" pitchFamily="18" charset="0"/>
                           <a:ea typeface="Times New Roman" panose="02020603050405020304" pitchFamily="18" charset="0"/>
@@ -13440,7 +13660,7 @@
                         <a:buNone/>
                       </a:pPr>
                       <a:r>
-                        <a:rPr lang="es-ES_tradnl" sz="1050" dirty="0">
+                        <a:rPr lang="es-ES_tradnl" sz="1000" dirty="0">
                           <a:effectLst/>
                           <a:latin typeface="Times New Roman" panose="02020603050405020304" pitchFamily="18" charset="0"/>
                           <a:ea typeface="Times New Roman" panose="02020603050405020304" pitchFamily="18" charset="0"/>
@@ -13463,7 +13683,7 @@
                         <a:buNone/>
                       </a:pPr>
                       <a:r>
-                        <a:rPr lang="es-ES_tradnl" sz="1050" dirty="0">
+                        <a:rPr lang="es-ES_tradnl" sz="1000" dirty="0">
                           <a:effectLst/>
                           <a:latin typeface="Times New Roman" panose="02020603050405020304" pitchFamily="18" charset="0"/>
                           <a:ea typeface="Times New Roman" panose="02020603050405020304" pitchFamily="18" charset="0"/>
@@ -13486,7 +13706,7 @@
                         <a:buNone/>
                       </a:pPr>
                       <a:r>
-                        <a:rPr lang="es-ES_tradnl" sz="1050" dirty="0">
+                        <a:rPr lang="es-ES_tradnl" sz="1000" dirty="0">
                           <a:effectLst/>
                           <a:latin typeface="Times New Roman" panose="02020603050405020304" pitchFamily="18" charset="0"/>
                           <a:ea typeface="Times New Roman" panose="02020603050405020304" pitchFamily="18" charset="0"/>
@@ -13509,7 +13729,7 @@
                         <a:buNone/>
                       </a:pPr>
                       <a:r>
-                        <a:rPr lang="es-ES_tradnl" sz="1050" dirty="0">
+                        <a:rPr lang="es-ES_tradnl" sz="1000" dirty="0">
                           <a:effectLst/>
                           <a:latin typeface="Times New Roman" panose="02020603050405020304" pitchFamily="18" charset="0"/>
                           <a:ea typeface="Times New Roman" panose="02020603050405020304" pitchFamily="18" charset="0"/>
@@ -13532,7 +13752,7 @@
                         <a:buNone/>
                       </a:pPr>
                       <a:r>
-                        <a:rPr lang="es-ES_tradnl" sz="1050" dirty="0">
+                        <a:rPr lang="es-ES_tradnl" sz="1000" dirty="0">
                           <a:effectLst/>
                           <a:latin typeface="Times New Roman" panose="02020603050405020304" pitchFamily="18" charset="0"/>
                           <a:ea typeface="Times New Roman" panose="02020603050405020304" pitchFamily="18" charset="0"/>
@@ -13555,7 +13775,7 @@
                         <a:buNone/>
                       </a:pPr>
                       <a:r>
-                        <a:rPr lang="es-ES_tradnl" sz="1050" dirty="0">
+                        <a:rPr lang="es-ES_tradnl" sz="1000" dirty="0">
                           <a:effectLst/>
                           <a:latin typeface="Times New Roman" panose="02020603050405020304" pitchFamily="18" charset="0"/>
                           <a:ea typeface="Times New Roman" panose="02020603050405020304" pitchFamily="18" charset="0"/>
@@ -13578,7 +13798,7 @@
                         <a:buNone/>
                       </a:pPr>
                       <a:r>
-                        <a:rPr lang="es-ES_tradnl" sz="1050" dirty="0">
+                        <a:rPr lang="es-ES_tradnl" sz="1000" dirty="0">
                           <a:effectLst/>
                           <a:latin typeface="Times New Roman" panose="02020603050405020304" pitchFamily="18" charset="0"/>
                           <a:ea typeface="Times New Roman" panose="02020603050405020304" pitchFamily="18" charset="0"/>
@@ -13601,7 +13821,7 @@
                         <a:buNone/>
                       </a:pPr>
                       <a:r>
-                        <a:rPr lang="es-ES_tradnl" sz="1050" dirty="0">
+                        <a:rPr lang="es-ES_tradnl" sz="1000" dirty="0">
                           <a:effectLst/>
                           <a:latin typeface="Times New Roman" panose="02020603050405020304" pitchFamily="18" charset="0"/>
                           <a:ea typeface="Times New Roman" panose="02020603050405020304" pitchFamily="18" charset="0"/>
@@ -13624,7 +13844,7 @@
                         <a:buNone/>
                       </a:pPr>
                       <a:r>
-                        <a:rPr lang="es-ES_tradnl" sz="1050" dirty="0">
+                        <a:rPr lang="es-ES_tradnl" sz="1000" dirty="0">
                           <a:effectLst/>
                           <a:latin typeface="Times New Roman" panose="02020603050405020304" pitchFamily="18" charset="0"/>
                           <a:ea typeface="Times New Roman" panose="02020603050405020304" pitchFamily="18" charset="0"/>
@@ -13647,109 +13867,139 @@
                         <a:buNone/>
                       </a:pPr>
                       <a:r>
-                        <a:rPr lang="es-ES_tradnl" sz="1050" dirty="0">
-                          <a:effectLst/>
-                          <a:latin typeface="Times New Roman" panose="02020603050405020304" pitchFamily="18" charset="0"/>
-                          <a:ea typeface="Times New Roman" panose="02020603050405020304" pitchFamily="18" charset="0"/>
-                          <a:cs typeface="Times New Roman" panose="02020603050405020304" pitchFamily="18" charset="0"/>
-                        </a:rPr>
-                        <a:t>10.00</a:t>
-                      </a:r>
-                    </a:p>
-                  </a:txBody>
-                  <a:tcPr marL="68580" marR="68580" marT="0" marB="0" anchor="ctr">
-                    <a:noFill/>
-                  </a:tcPr>
-                </a:tc>
-                <a:tc>
-                  <a:txBody>
-                    <a:bodyPr/>
-                    <a:lstStyle/>
-                    <a:p>
-                      <a:pPr algn="ctr">
-                        <a:buNone/>
-                      </a:pPr>
-                      <a:r>
-                        <a:rPr lang="es-ES_tradnl" sz="1050" dirty="0">
-                          <a:effectLst/>
-                          <a:latin typeface="Times New Roman" panose="02020603050405020304" pitchFamily="18" charset="0"/>
-                          <a:ea typeface="Times New Roman" panose="02020603050405020304" pitchFamily="18" charset="0"/>
-                          <a:cs typeface="Times New Roman" panose="02020603050405020304" pitchFamily="18" charset="0"/>
-                        </a:rPr>
-                        <a:t>4.16</a:t>
-                      </a:r>
-                    </a:p>
-                  </a:txBody>
-                  <a:tcPr marL="68580" marR="68580" marT="0" marB="0" anchor="ctr">
-                    <a:noFill/>
-                  </a:tcPr>
-                </a:tc>
-                <a:tc>
-                  <a:txBody>
-                    <a:bodyPr/>
-                    <a:lstStyle/>
-                    <a:p>
-                      <a:pPr algn="ctr">
-                        <a:buNone/>
-                      </a:pPr>
-                      <a:r>
-                        <a:rPr lang="es-ES_tradnl" sz="1050" dirty="0">
-                          <a:effectLst/>
-                          <a:latin typeface="Times New Roman" panose="02020603050405020304" pitchFamily="18" charset="0"/>
-                          <a:ea typeface="Times New Roman" panose="02020603050405020304" pitchFamily="18" charset="0"/>
-                          <a:cs typeface="Times New Roman" panose="02020603050405020304" pitchFamily="18" charset="0"/>
-                        </a:rPr>
-                        <a:t>95.75</a:t>
-                      </a:r>
-                    </a:p>
-                  </a:txBody>
-                  <a:tcPr marL="68580" marR="68580" marT="0" marB="0" anchor="ctr">
-                    <a:noFill/>
-                  </a:tcPr>
-                </a:tc>
-                <a:tc>
-                  <a:txBody>
-                    <a:bodyPr/>
-                    <a:lstStyle/>
-                    <a:p>
-                      <a:pPr algn="ctr">
-                        <a:buNone/>
-                      </a:pPr>
-                      <a:r>
-                        <a:rPr lang="es-ES_tradnl" sz="1050" dirty="0">
-                          <a:effectLst/>
-                          <a:latin typeface="Times New Roman" panose="02020603050405020304" pitchFamily="18" charset="0"/>
-                          <a:ea typeface="Times New Roman" panose="02020603050405020304" pitchFamily="18" charset="0"/>
-                          <a:cs typeface="Times New Roman" panose="02020603050405020304" pitchFamily="18" charset="0"/>
-                        </a:rPr>
-                        <a:t>11.26</a:t>
-                      </a:r>
-                    </a:p>
-                  </a:txBody>
-                  <a:tcPr marL="68580" marR="68580" marT="0" marB="0" anchor="ctr">
-                    <a:noFill/>
-                  </a:tcPr>
-                </a:tc>
-                <a:tc>
-                  <a:txBody>
-                    <a:bodyPr/>
-                    <a:lstStyle/>
-                    <a:p>
-                      <a:pPr algn="ctr">
-                        <a:buNone/>
-                      </a:pPr>
-                      <a:r>
-                        <a:rPr lang="es-ES_tradnl" sz="1050" dirty="0">
-                          <a:effectLst/>
-                          <a:latin typeface="Times New Roman" panose="02020603050405020304" pitchFamily="18" charset="0"/>
-                          <a:ea typeface="Times New Roman" panose="02020603050405020304" pitchFamily="18" charset="0"/>
-                          <a:cs typeface="Times New Roman" panose="02020603050405020304" pitchFamily="18" charset="0"/>
-                        </a:rPr>
-                        <a:t>31.49</a:t>
-                      </a:r>
-                    </a:p>
-                  </a:txBody>
-                  <a:tcPr marL="68580" marR="68580" marT="0" marB="0" anchor="ctr">
+                        <a:rPr lang="es-ES" sz="1000">
+                          <a:effectLst/>
+                          <a:latin typeface="Times New Roman" panose="02020603050405020304" pitchFamily="18" charset="0"/>
+                          <a:ea typeface="Times New Roman" panose="02020603050405020304" pitchFamily="18" charset="0"/>
+                          <a:cs typeface="Times New Roman" panose="02020603050405020304" pitchFamily="18" charset="0"/>
+                        </a:rPr>
+                        <a:t>6.00</a:t>
+                      </a:r>
+                      <a:endParaRPr lang="de-DE" sz="1000">
+                        <a:effectLst/>
+                        <a:latin typeface="Times New Roman" panose="02020603050405020304" pitchFamily="18" charset="0"/>
+                        <a:ea typeface="Times New Roman" panose="02020603050405020304" pitchFamily="18" charset="0"/>
+                        <a:cs typeface="Times New Roman" panose="02020603050405020304" pitchFamily="18" charset="0"/>
+                      </a:endParaRPr>
+                    </a:p>
+                  </a:txBody>
+                  <a:tcPr marL="68580" marR="68580" marT="0" marB="0">
+                    <a:noFill/>
+                  </a:tcPr>
+                </a:tc>
+                <a:tc>
+                  <a:txBody>
+                    <a:bodyPr/>
+                    <a:lstStyle/>
+                    <a:p>
+                      <a:pPr algn="ctr">
+                        <a:buNone/>
+                      </a:pPr>
+                      <a:r>
+                        <a:rPr lang="es-ES" sz="1000">
+                          <a:effectLst/>
+                          <a:latin typeface="Times New Roman" panose="02020603050405020304" pitchFamily="18" charset="0"/>
+                          <a:ea typeface="Times New Roman" panose="02020603050405020304" pitchFamily="18" charset="0"/>
+                          <a:cs typeface="Times New Roman" panose="02020603050405020304" pitchFamily="18" charset="0"/>
+                        </a:rPr>
+                        <a:t>2.81</a:t>
+                      </a:r>
+                      <a:endParaRPr lang="de-DE" sz="1000">
+                        <a:effectLst/>
+                        <a:latin typeface="Times New Roman" panose="02020603050405020304" pitchFamily="18" charset="0"/>
+                        <a:ea typeface="Times New Roman" panose="02020603050405020304" pitchFamily="18" charset="0"/>
+                        <a:cs typeface="Times New Roman" panose="02020603050405020304" pitchFamily="18" charset="0"/>
+                      </a:endParaRPr>
+                    </a:p>
+                  </a:txBody>
+                  <a:tcPr marL="68580" marR="68580" marT="0" marB="0">
+                    <a:noFill/>
+                  </a:tcPr>
+                </a:tc>
+                <a:tc>
+                  <a:txBody>
+                    <a:bodyPr/>
+                    <a:lstStyle/>
+                    <a:p>
+                      <a:pPr algn="ctr">
+                        <a:buNone/>
+                      </a:pPr>
+                      <a:r>
+                        <a:rPr lang="es-ES" sz="1000">
+                          <a:effectLst/>
+                          <a:latin typeface="Times New Roman" panose="02020603050405020304" pitchFamily="18" charset="0"/>
+                          <a:ea typeface="Times New Roman" panose="02020603050405020304" pitchFamily="18" charset="0"/>
+                          <a:cs typeface="Times New Roman" panose="02020603050405020304" pitchFamily="18" charset="0"/>
+                        </a:rPr>
+                        <a:t>44.64</a:t>
+                      </a:r>
+                      <a:endParaRPr lang="de-DE" sz="1000">
+                        <a:effectLst/>
+                        <a:latin typeface="Times New Roman" panose="02020603050405020304" pitchFamily="18" charset="0"/>
+                        <a:ea typeface="Times New Roman" panose="02020603050405020304" pitchFamily="18" charset="0"/>
+                        <a:cs typeface="Times New Roman" panose="02020603050405020304" pitchFamily="18" charset="0"/>
+                      </a:endParaRPr>
+                    </a:p>
+                  </a:txBody>
+                  <a:tcPr marL="68580" marR="68580" marT="0" marB="0">
+                    <a:noFill/>
+                  </a:tcPr>
+                </a:tc>
+                <a:tc>
+                  <a:txBody>
+                    <a:bodyPr/>
+                    <a:lstStyle/>
+                    <a:p>
+                      <a:pPr algn="ctr">
+                        <a:buNone/>
+                      </a:pPr>
+                      <a:r>
+                        <a:rPr lang="es-ES" sz="1000">
+                          <a:effectLst/>
+                          <a:latin typeface="Times New Roman" panose="02020603050405020304" pitchFamily="18" charset="0"/>
+                          <a:ea typeface="Times New Roman" panose="02020603050405020304" pitchFamily="18" charset="0"/>
+                          <a:cs typeface="Times New Roman" panose="02020603050405020304" pitchFamily="18" charset="0"/>
+                        </a:rPr>
+                        <a:t>8.54</a:t>
+                      </a:r>
+                      <a:endParaRPr lang="de-DE" sz="1000">
+                        <a:effectLst/>
+                        <a:latin typeface="Times New Roman" panose="02020603050405020304" pitchFamily="18" charset="0"/>
+                        <a:ea typeface="Times New Roman" panose="02020603050405020304" pitchFamily="18" charset="0"/>
+                        <a:cs typeface="Times New Roman" panose="02020603050405020304" pitchFamily="18" charset="0"/>
+                      </a:endParaRPr>
+                    </a:p>
+                  </a:txBody>
+                  <a:tcPr marL="68580" marR="68580" marT="0" marB="0">
+                    <a:noFill/>
+                  </a:tcPr>
+                </a:tc>
+                <a:tc>
+                  <a:txBody>
+                    <a:bodyPr/>
+                    <a:lstStyle/>
+                    <a:p>
+                      <a:pPr algn="ctr">
+                        <a:buNone/>
+                      </a:pPr>
+                      <a:r>
+                        <a:rPr lang="es-ES" sz="1000">
+                          <a:effectLst/>
+                          <a:latin typeface="Times New Roman" panose="02020603050405020304" pitchFamily="18" charset="0"/>
+                          <a:ea typeface="Times New Roman" panose="02020603050405020304" pitchFamily="18" charset="0"/>
+                          <a:cs typeface="Times New Roman" panose="02020603050405020304" pitchFamily="18" charset="0"/>
+                        </a:rPr>
+                        <a:t>8.27</a:t>
+                      </a:r>
+                      <a:endParaRPr lang="de-DE" sz="1000">
+                        <a:effectLst/>
+                        <a:latin typeface="Times New Roman" panose="02020603050405020304" pitchFamily="18" charset="0"/>
+                        <a:ea typeface="Times New Roman" panose="02020603050405020304" pitchFamily="18" charset="0"/>
+                        <a:cs typeface="Times New Roman" panose="02020603050405020304" pitchFamily="18" charset="0"/>
+                      </a:endParaRPr>
+                    </a:p>
+                  </a:txBody>
+                  <a:tcPr marL="68580" marR="68580" marT="0" marB="0">
                     <a:noFill/>
                   </a:tcPr>
                 </a:tc>
@@ -13795,7 +14045,7 @@
                         <a:buNone/>
                       </a:pPr>
                       <a:r>
-                        <a:rPr lang="es-ES_tradnl" sz="1050" dirty="0">
+                        <a:rPr lang="es-ES_tradnl" sz="1000" dirty="0">
                           <a:effectLst/>
                           <a:latin typeface="Times New Roman" panose="02020603050405020304" pitchFamily="18" charset="0"/>
                           <a:ea typeface="Times New Roman" panose="02020603050405020304" pitchFamily="18" charset="0"/>
@@ -13818,7 +14068,7 @@
                         <a:buNone/>
                       </a:pPr>
                       <a:r>
-                        <a:rPr lang="es-ES_tradnl" sz="1050" dirty="0">
+                        <a:rPr lang="es-ES_tradnl" sz="1000" dirty="0">
                           <a:effectLst/>
                           <a:latin typeface="Times New Roman" panose="02020603050405020304" pitchFamily="18" charset="0"/>
                           <a:ea typeface="Times New Roman" panose="02020603050405020304" pitchFamily="18" charset="0"/>
@@ -13841,7 +14091,7 @@
                         <a:buNone/>
                       </a:pPr>
                       <a:r>
-                        <a:rPr lang="es-ES_tradnl" sz="1050" dirty="0">
+                        <a:rPr lang="es-ES_tradnl" sz="1000" dirty="0">
                           <a:effectLst/>
                           <a:latin typeface="Times New Roman" panose="02020603050405020304" pitchFamily="18" charset="0"/>
                           <a:ea typeface="Times New Roman" panose="02020603050405020304" pitchFamily="18" charset="0"/>
@@ -13864,7 +14114,7 @@
                         <a:buNone/>
                       </a:pPr>
                       <a:r>
-                        <a:rPr lang="es-ES_tradnl" sz="1050" dirty="0">
+                        <a:rPr lang="es-ES_tradnl" sz="1000" dirty="0">
                           <a:effectLst/>
                           <a:latin typeface="Times New Roman" panose="02020603050405020304" pitchFamily="18" charset="0"/>
                           <a:ea typeface="Times New Roman" panose="02020603050405020304" pitchFamily="18" charset="0"/>
@@ -13887,7 +14137,7 @@
                         <a:buNone/>
                       </a:pPr>
                       <a:r>
-                        <a:rPr lang="es-ES_tradnl" sz="1050" dirty="0">
+                        <a:rPr lang="es-ES_tradnl" sz="1000" dirty="0">
                           <a:effectLst/>
                           <a:latin typeface="Times New Roman" panose="02020603050405020304" pitchFamily="18" charset="0"/>
                           <a:ea typeface="Times New Roman" panose="02020603050405020304" pitchFamily="18" charset="0"/>
@@ -13910,7 +14160,7 @@
                         <a:buNone/>
                       </a:pPr>
                       <a:r>
-                        <a:rPr lang="es-ES_tradnl" sz="1050" dirty="0">
+                        <a:rPr lang="es-ES_tradnl" sz="1000" dirty="0">
                           <a:effectLst/>
                           <a:latin typeface="Times New Roman" panose="02020603050405020304" pitchFamily="18" charset="0"/>
                           <a:ea typeface="Times New Roman" panose="02020603050405020304" pitchFamily="18" charset="0"/>
@@ -13933,7 +14183,7 @@
                         <a:buNone/>
                       </a:pPr>
                       <a:r>
-                        <a:rPr lang="es-ES_tradnl" sz="1050" dirty="0">
+                        <a:rPr lang="es-ES_tradnl" sz="1000" dirty="0">
                           <a:effectLst/>
                           <a:latin typeface="Times New Roman" panose="02020603050405020304" pitchFamily="18" charset="0"/>
                           <a:ea typeface="Times New Roman" panose="02020603050405020304" pitchFamily="18" charset="0"/>
@@ -13956,7 +14206,7 @@
                         <a:buNone/>
                       </a:pPr>
                       <a:r>
-                        <a:rPr lang="es-ES_tradnl" sz="1050" dirty="0">
+                        <a:rPr lang="es-ES_tradnl" sz="1000" dirty="0">
                           <a:effectLst/>
                           <a:latin typeface="Times New Roman" panose="02020603050405020304" pitchFamily="18" charset="0"/>
                           <a:ea typeface="Times New Roman" panose="02020603050405020304" pitchFamily="18" charset="0"/>
@@ -13979,7 +14229,7 @@
                         <a:buNone/>
                       </a:pPr>
                       <a:r>
-                        <a:rPr lang="es-ES_tradnl" sz="1050" dirty="0">
+                        <a:rPr lang="es-ES_tradnl" sz="1000" dirty="0">
                           <a:effectLst/>
                           <a:latin typeface="Times New Roman" panose="02020603050405020304" pitchFamily="18" charset="0"/>
                           <a:ea typeface="Times New Roman" panose="02020603050405020304" pitchFamily="18" charset="0"/>
@@ -14002,7 +14252,7 @@
                         <a:buNone/>
                       </a:pPr>
                       <a:r>
-                        <a:rPr lang="es-ES_tradnl" sz="1050" dirty="0">
+                        <a:rPr lang="es-ES_tradnl" sz="1000" dirty="0">
                           <a:effectLst/>
                           <a:latin typeface="Times New Roman" panose="02020603050405020304" pitchFamily="18" charset="0"/>
                           <a:ea typeface="Times New Roman" panose="02020603050405020304" pitchFamily="18" charset="0"/>
@@ -14025,109 +14275,139 @@
                         <a:buNone/>
                       </a:pPr>
                       <a:r>
-                        <a:rPr lang="es-ES_tradnl" sz="1050" dirty="0">
-                          <a:effectLst/>
-                          <a:latin typeface="Times New Roman" panose="02020603050405020304" pitchFamily="18" charset="0"/>
-                          <a:ea typeface="Times New Roman" panose="02020603050405020304" pitchFamily="18" charset="0"/>
-                          <a:cs typeface="Times New Roman" panose="02020603050405020304" pitchFamily="18" charset="0"/>
-                        </a:rPr>
-                        <a:t>10.00</a:t>
-                      </a:r>
-                    </a:p>
-                  </a:txBody>
-                  <a:tcPr marL="68580" marR="68580" marT="0" marB="0" anchor="ctr">
-                    <a:noFill/>
-                  </a:tcPr>
-                </a:tc>
-                <a:tc>
-                  <a:txBody>
-                    <a:bodyPr/>
-                    <a:lstStyle/>
-                    <a:p>
-                      <a:pPr algn="ctr">
-                        <a:buNone/>
-                      </a:pPr>
-                      <a:r>
-                        <a:rPr lang="es-ES_tradnl" sz="1050" dirty="0">
-                          <a:effectLst/>
-                          <a:latin typeface="Times New Roman" panose="02020603050405020304" pitchFamily="18" charset="0"/>
-                          <a:ea typeface="Times New Roman" panose="02020603050405020304" pitchFamily="18" charset="0"/>
-                          <a:cs typeface="Times New Roman" panose="02020603050405020304" pitchFamily="18" charset="0"/>
-                        </a:rPr>
-                        <a:t>5.04</a:t>
-                      </a:r>
-                    </a:p>
-                  </a:txBody>
-                  <a:tcPr marL="68580" marR="68580" marT="0" marB="0" anchor="ctr">
-                    <a:noFill/>
-                  </a:tcPr>
-                </a:tc>
-                <a:tc>
-                  <a:txBody>
-                    <a:bodyPr/>
-                    <a:lstStyle/>
-                    <a:p>
-                      <a:pPr algn="ctr">
-                        <a:buNone/>
-                      </a:pPr>
-                      <a:r>
-                        <a:rPr lang="es-ES_tradnl" sz="1050" dirty="0">
-                          <a:effectLst/>
-                          <a:latin typeface="Times New Roman" panose="02020603050405020304" pitchFamily="18" charset="0"/>
-                          <a:ea typeface="Times New Roman" panose="02020603050405020304" pitchFamily="18" charset="0"/>
-                          <a:cs typeface="Times New Roman" panose="02020603050405020304" pitchFamily="18" charset="0"/>
-                        </a:rPr>
-                        <a:t>148.16</a:t>
-                      </a:r>
-                    </a:p>
-                  </a:txBody>
-                  <a:tcPr marL="68580" marR="68580" marT="0" marB="0" anchor="ctr">
-                    <a:noFill/>
-                  </a:tcPr>
-                </a:tc>
-                <a:tc>
-                  <a:txBody>
-                    <a:bodyPr/>
-                    <a:lstStyle/>
-                    <a:p>
-                      <a:pPr algn="ctr">
-                        <a:buNone/>
-                      </a:pPr>
-                      <a:r>
-                        <a:rPr lang="es-ES_tradnl" sz="1050" dirty="0">
-                          <a:effectLst/>
-                          <a:latin typeface="Times New Roman" panose="02020603050405020304" pitchFamily="18" charset="0"/>
-                          <a:ea typeface="Times New Roman" panose="02020603050405020304" pitchFamily="18" charset="0"/>
-                          <a:cs typeface="Times New Roman" panose="02020603050405020304" pitchFamily="18" charset="0"/>
-                        </a:rPr>
-                        <a:t>17.61</a:t>
-                      </a:r>
-                    </a:p>
-                  </a:txBody>
-                  <a:tcPr marL="68580" marR="68580" marT="0" marB="0" anchor="ctr">
-                    <a:noFill/>
-                  </a:tcPr>
-                </a:tc>
-                <a:tc>
-                  <a:txBody>
-                    <a:bodyPr/>
-                    <a:lstStyle/>
-                    <a:p>
-                      <a:pPr algn="ctr">
-                        <a:buNone/>
-                      </a:pPr>
-                      <a:r>
-                        <a:rPr lang="es-ES_tradnl" sz="1050" dirty="0">
-                          <a:effectLst/>
-                          <a:latin typeface="Times New Roman" panose="02020603050405020304" pitchFamily="18" charset="0"/>
-                          <a:ea typeface="Times New Roman" panose="02020603050405020304" pitchFamily="18" charset="0"/>
-                          <a:cs typeface="Times New Roman" panose="02020603050405020304" pitchFamily="18" charset="0"/>
-                        </a:rPr>
-                        <a:t>54.29</a:t>
-                      </a:r>
-                    </a:p>
-                  </a:txBody>
-                  <a:tcPr marL="68580" marR="68580" marT="0" marB="0" anchor="ctr">
+                        <a:rPr lang="es-ES" sz="1000">
+                          <a:effectLst/>
+                          <a:latin typeface="Times New Roman" panose="02020603050405020304" pitchFamily="18" charset="0"/>
+                          <a:ea typeface="Times New Roman" panose="02020603050405020304" pitchFamily="18" charset="0"/>
+                          <a:cs typeface="Times New Roman" panose="02020603050405020304" pitchFamily="18" charset="0"/>
+                        </a:rPr>
+                        <a:t>6.00</a:t>
+                      </a:r>
+                      <a:endParaRPr lang="de-DE" sz="1000">
+                        <a:effectLst/>
+                        <a:latin typeface="Times New Roman" panose="02020603050405020304" pitchFamily="18" charset="0"/>
+                        <a:ea typeface="Times New Roman" panose="02020603050405020304" pitchFamily="18" charset="0"/>
+                        <a:cs typeface="Times New Roman" panose="02020603050405020304" pitchFamily="18" charset="0"/>
+                      </a:endParaRPr>
+                    </a:p>
+                  </a:txBody>
+                  <a:tcPr marL="68580" marR="68580" marT="0" marB="0">
+                    <a:noFill/>
+                  </a:tcPr>
+                </a:tc>
+                <a:tc>
+                  <a:txBody>
+                    <a:bodyPr/>
+                    <a:lstStyle/>
+                    <a:p>
+                      <a:pPr algn="ctr">
+                        <a:buNone/>
+                      </a:pPr>
+                      <a:r>
+                        <a:rPr lang="es-ES" sz="1000">
+                          <a:effectLst/>
+                          <a:latin typeface="Times New Roman" panose="02020603050405020304" pitchFamily="18" charset="0"/>
+                          <a:ea typeface="Times New Roman" panose="02020603050405020304" pitchFamily="18" charset="0"/>
+                          <a:cs typeface="Times New Roman" panose="02020603050405020304" pitchFamily="18" charset="0"/>
+                        </a:rPr>
+                        <a:t>2.72</a:t>
+                      </a:r>
+                      <a:endParaRPr lang="de-DE" sz="1000">
+                        <a:effectLst/>
+                        <a:latin typeface="Times New Roman" panose="02020603050405020304" pitchFamily="18" charset="0"/>
+                        <a:ea typeface="Times New Roman" panose="02020603050405020304" pitchFamily="18" charset="0"/>
+                        <a:cs typeface="Times New Roman" panose="02020603050405020304" pitchFamily="18" charset="0"/>
+                      </a:endParaRPr>
+                    </a:p>
+                  </a:txBody>
+                  <a:tcPr marL="68580" marR="68580" marT="0" marB="0">
+                    <a:noFill/>
+                  </a:tcPr>
+                </a:tc>
+                <a:tc>
+                  <a:txBody>
+                    <a:bodyPr/>
+                    <a:lstStyle/>
+                    <a:p>
+                      <a:pPr algn="ctr">
+                        <a:buNone/>
+                      </a:pPr>
+                      <a:r>
+                        <a:rPr lang="es-ES" sz="1000">
+                          <a:effectLst/>
+                          <a:latin typeface="Times New Roman" panose="02020603050405020304" pitchFamily="18" charset="0"/>
+                          <a:ea typeface="Times New Roman" panose="02020603050405020304" pitchFamily="18" charset="0"/>
+                          <a:cs typeface="Times New Roman" panose="02020603050405020304" pitchFamily="18" charset="0"/>
+                        </a:rPr>
+                        <a:t>41.98</a:t>
+                      </a:r>
+                      <a:endParaRPr lang="de-DE" sz="1000">
+                        <a:effectLst/>
+                        <a:latin typeface="Times New Roman" panose="02020603050405020304" pitchFamily="18" charset="0"/>
+                        <a:ea typeface="Times New Roman" panose="02020603050405020304" pitchFamily="18" charset="0"/>
+                        <a:cs typeface="Times New Roman" panose="02020603050405020304" pitchFamily="18" charset="0"/>
+                      </a:endParaRPr>
+                    </a:p>
+                  </a:txBody>
+                  <a:tcPr marL="68580" marR="68580" marT="0" marB="0">
+                    <a:noFill/>
+                  </a:tcPr>
+                </a:tc>
+                <a:tc>
+                  <a:txBody>
+                    <a:bodyPr/>
+                    <a:lstStyle/>
+                    <a:p>
+                      <a:pPr algn="ctr">
+                        <a:buNone/>
+                      </a:pPr>
+                      <a:r>
+                        <a:rPr lang="es-ES" sz="1000">
+                          <a:effectLst/>
+                          <a:latin typeface="Times New Roman" panose="02020603050405020304" pitchFamily="18" charset="0"/>
+                          <a:ea typeface="Times New Roman" panose="02020603050405020304" pitchFamily="18" charset="0"/>
+                          <a:cs typeface="Times New Roman" panose="02020603050405020304" pitchFamily="18" charset="0"/>
+                        </a:rPr>
+                        <a:t>7.64</a:t>
+                      </a:r>
+                      <a:endParaRPr lang="de-DE" sz="1000">
+                        <a:effectLst/>
+                        <a:latin typeface="Times New Roman" panose="02020603050405020304" pitchFamily="18" charset="0"/>
+                        <a:ea typeface="Times New Roman" panose="02020603050405020304" pitchFamily="18" charset="0"/>
+                        <a:cs typeface="Times New Roman" panose="02020603050405020304" pitchFamily="18" charset="0"/>
+                      </a:endParaRPr>
+                    </a:p>
+                  </a:txBody>
+                  <a:tcPr marL="68580" marR="68580" marT="0" marB="0">
+                    <a:noFill/>
+                  </a:tcPr>
+                </a:tc>
+                <a:tc>
+                  <a:txBody>
+                    <a:bodyPr/>
+                    <a:lstStyle/>
+                    <a:p>
+                      <a:pPr algn="ctr">
+                        <a:buNone/>
+                      </a:pPr>
+                      <a:r>
+                        <a:rPr lang="es-ES" sz="1000" dirty="0">
+                          <a:effectLst/>
+                          <a:latin typeface="Times New Roman" panose="02020603050405020304" pitchFamily="18" charset="0"/>
+                          <a:ea typeface="Times New Roman" panose="02020603050405020304" pitchFamily="18" charset="0"/>
+                          <a:cs typeface="Times New Roman" panose="02020603050405020304" pitchFamily="18" charset="0"/>
+                        </a:rPr>
+                        <a:t>45.17</a:t>
+                      </a:r>
+                      <a:endParaRPr lang="de-DE" sz="1000" dirty="0">
+                        <a:effectLst/>
+                        <a:latin typeface="Times New Roman" panose="02020603050405020304" pitchFamily="18" charset="0"/>
+                        <a:ea typeface="Times New Roman" panose="02020603050405020304" pitchFamily="18" charset="0"/>
+                        <a:cs typeface="Times New Roman" panose="02020603050405020304" pitchFamily="18" charset="0"/>
+                      </a:endParaRPr>
+                    </a:p>
+                  </a:txBody>
+                  <a:tcPr marL="68580" marR="68580" marT="0" marB="0">
                     <a:noFill/>
                   </a:tcPr>
                 </a:tc>
@@ -15259,7 +15539,7 @@
             <p:ph sz="quarter" idx="14"/>
             <p:extLst>
               <p:ext uri="{D42A27DB-BD31-4B8C-83A1-F6EECF244321}">
-                <p14:modId xmlns:p14="http://schemas.microsoft.com/office/powerpoint/2010/main" val="2474905621"/>
+                <p14:modId xmlns:p14="http://schemas.microsoft.com/office/powerpoint/2010/main" val="529650321"/>
               </p:ext>
             </p:extLst>
           </p:nvPr>
@@ -16609,17 +16889,23 @@
                         <a:buNone/>
                       </a:pPr>
                       <a:r>
-                        <a:rPr lang="es-ES_tradnl" sz="1000" dirty="0">
-                          <a:effectLst/>
-                          <a:latin typeface="Times New Roman" panose="02020603050405020304" pitchFamily="18" charset="0"/>
-                          <a:ea typeface="Times New Roman" panose="02020603050405020304" pitchFamily="18" charset="0"/>
-                          <a:cs typeface="Times New Roman" panose="02020603050405020304" pitchFamily="18" charset="0"/>
-                        </a:rPr>
-                        <a:t>10.00</a:t>
-                      </a:r>
-                    </a:p>
-                  </a:txBody>
-                  <a:tcPr marL="68580" marR="68580" marT="0" marB="0" anchor="ctr">
+                        <a:rPr lang="es-ES" sz="1000">
+                          <a:effectLst/>
+                          <a:latin typeface="Times New Roman" panose="02020603050405020304" pitchFamily="18" charset="0"/>
+                          <a:ea typeface="Times New Roman" panose="02020603050405020304" pitchFamily="18" charset="0"/>
+                          <a:cs typeface="Times New Roman" panose="02020603050405020304" pitchFamily="18" charset="0"/>
+                        </a:rPr>
+                        <a:t>6.00</a:t>
+                      </a:r>
+                      <a:endParaRPr lang="de-DE" sz="1000">
+                        <a:effectLst/>
+                        <a:latin typeface="Times New Roman" panose="02020603050405020304" pitchFamily="18" charset="0"/>
+                        <a:ea typeface="Times New Roman" panose="02020603050405020304" pitchFamily="18" charset="0"/>
+                        <a:cs typeface="Times New Roman" panose="02020603050405020304" pitchFamily="18" charset="0"/>
+                      </a:endParaRPr>
+                    </a:p>
+                  </a:txBody>
+                  <a:tcPr marL="68580" marR="68580" marT="0" marB="0">
                     <a:lnT w="12700" cap="flat" cmpd="sng" algn="ctr">
                       <a:solidFill>
                         <a:schemeClr val="tx1"/>
@@ -16641,17 +16927,23 @@
                         <a:buNone/>
                       </a:pPr>
                       <a:r>
-                        <a:rPr lang="es-ES_tradnl" sz="1000" dirty="0">
-                          <a:effectLst/>
-                          <a:latin typeface="Times New Roman" panose="02020603050405020304" pitchFamily="18" charset="0"/>
-                          <a:ea typeface="Times New Roman" panose="02020603050405020304" pitchFamily="18" charset="0"/>
-                          <a:cs typeface="Times New Roman" panose="02020603050405020304" pitchFamily="18" charset="0"/>
-                        </a:rPr>
-                        <a:t>2.57</a:t>
-                      </a:r>
-                    </a:p>
-                  </a:txBody>
-                  <a:tcPr marL="68580" marR="68580" marT="0" marB="0" anchor="ctr">
+                        <a:rPr lang="es-ES" sz="1000">
+                          <a:effectLst/>
+                          <a:latin typeface="Times New Roman" panose="02020603050405020304" pitchFamily="18" charset="0"/>
+                          <a:ea typeface="Times New Roman" panose="02020603050405020304" pitchFamily="18" charset="0"/>
+                          <a:cs typeface="Times New Roman" panose="02020603050405020304" pitchFamily="18" charset="0"/>
+                        </a:rPr>
+                        <a:t>1.83</a:t>
+                      </a:r>
+                      <a:endParaRPr lang="de-DE" sz="1000">
+                        <a:effectLst/>
+                        <a:latin typeface="Times New Roman" panose="02020603050405020304" pitchFamily="18" charset="0"/>
+                        <a:ea typeface="Times New Roman" panose="02020603050405020304" pitchFamily="18" charset="0"/>
+                        <a:cs typeface="Times New Roman" panose="02020603050405020304" pitchFamily="18" charset="0"/>
+                      </a:endParaRPr>
+                    </a:p>
+                  </a:txBody>
+                  <a:tcPr marL="68580" marR="68580" marT="0" marB="0">
                     <a:lnT w="12700" cap="flat" cmpd="sng" algn="ctr">
                       <a:solidFill>
                         <a:schemeClr val="tx1"/>
@@ -16673,17 +16965,23 @@
                         <a:buNone/>
                       </a:pPr>
                       <a:r>
-                        <a:rPr lang="es-ES_tradnl" sz="1000" dirty="0">
-                          <a:effectLst/>
-                          <a:latin typeface="Times New Roman" panose="02020603050405020304" pitchFamily="18" charset="0"/>
-                          <a:ea typeface="Times New Roman" panose="02020603050405020304" pitchFamily="18" charset="0"/>
-                          <a:cs typeface="Times New Roman" panose="02020603050405020304" pitchFamily="18" charset="0"/>
-                        </a:rPr>
-                        <a:t>33.32</a:t>
-                      </a:r>
-                    </a:p>
-                  </a:txBody>
-                  <a:tcPr marL="68580" marR="68580" marT="0" marB="0" anchor="ctr">
+                        <a:rPr lang="es-ES" sz="1000">
+                          <a:effectLst/>
+                          <a:latin typeface="Times New Roman" panose="02020603050405020304" pitchFamily="18" charset="0"/>
+                          <a:ea typeface="Times New Roman" panose="02020603050405020304" pitchFamily="18" charset="0"/>
+                          <a:cs typeface="Times New Roman" panose="02020603050405020304" pitchFamily="18" charset="0"/>
+                        </a:rPr>
+                        <a:t>17.59</a:t>
+                      </a:r>
+                      <a:endParaRPr lang="de-DE" sz="1000">
+                        <a:effectLst/>
+                        <a:latin typeface="Times New Roman" panose="02020603050405020304" pitchFamily="18" charset="0"/>
+                        <a:ea typeface="Times New Roman" panose="02020603050405020304" pitchFamily="18" charset="0"/>
+                        <a:cs typeface="Times New Roman" panose="02020603050405020304" pitchFamily="18" charset="0"/>
+                      </a:endParaRPr>
+                    </a:p>
+                  </a:txBody>
+                  <a:tcPr marL="68580" marR="68580" marT="0" marB="0">
                     <a:lnT w="12700" cap="flat" cmpd="sng" algn="ctr">
                       <a:solidFill>
                         <a:schemeClr val="tx1"/>
@@ -16705,17 +17003,23 @@
                         <a:buNone/>
                       </a:pPr>
                       <a:r>
-                        <a:rPr lang="es-ES_tradnl" sz="1000" dirty="0">
-                          <a:effectLst/>
-                          <a:latin typeface="Times New Roman" panose="02020603050405020304" pitchFamily="18" charset="0"/>
-                          <a:ea typeface="Times New Roman" panose="02020603050405020304" pitchFamily="18" charset="0"/>
-                          <a:cs typeface="Times New Roman" panose="02020603050405020304" pitchFamily="18" charset="0"/>
-                        </a:rPr>
-                        <a:t>4.64</a:t>
-                      </a:r>
-                    </a:p>
-                  </a:txBody>
-                  <a:tcPr marL="68580" marR="68580" marT="0" marB="0" anchor="ctr">
+                        <a:rPr lang="es-ES" sz="1000">
+                          <a:effectLst/>
+                          <a:latin typeface="Times New Roman" panose="02020603050405020304" pitchFamily="18" charset="0"/>
+                          <a:ea typeface="Times New Roman" panose="02020603050405020304" pitchFamily="18" charset="0"/>
+                          <a:cs typeface="Times New Roman" panose="02020603050405020304" pitchFamily="18" charset="0"/>
+                        </a:rPr>
+                        <a:t>3.40</a:t>
+                      </a:r>
+                      <a:endParaRPr lang="de-DE" sz="1000">
+                        <a:effectLst/>
+                        <a:latin typeface="Times New Roman" panose="02020603050405020304" pitchFamily="18" charset="0"/>
+                        <a:ea typeface="Times New Roman" panose="02020603050405020304" pitchFamily="18" charset="0"/>
+                        <a:cs typeface="Times New Roman" panose="02020603050405020304" pitchFamily="18" charset="0"/>
+                      </a:endParaRPr>
+                    </a:p>
+                  </a:txBody>
+                  <a:tcPr marL="68580" marR="68580" marT="0" marB="0">
                     <a:lnT w="12700" cap="flat" cmpd="sng" algn="ctr">
                       <a:solidFill>
                         <a:schemeClr val="tx1"/>
@@ -16737,17 +17041,23 @@
                         <a:buNone/>
                       </a:pPr>
                       <a:r>
-                        <a:rPr lang="es-ES_tradnl" sz="1000" dirty="0">
-                          <a:effectLst/>
-                          <a:latin typeface="Times New Roman" panose="02020603050405020304" pitchFamily="18" charset="0"/>
-                          <a:ea typeface="Times New Roman" panose="02020603050405020304" pitchFamily="18" charset="0"/>
-                          <a:cs typeface="Times New Roman" panose="02020603050405020304" pitchFamily="18" charset="0"/>
-                        </a:rPr>
-                        <a:t>33.54</a:t>
-                      </a:r>
-                    </a:p>
-                  </a:txBody>
-                  <a:tcPr marL="68580" marR="68580" marT="0" marB="0" anchor="ctr">
+                        <a:rPr lang="es-ES" sz="1000">
+                          <a:effectLst/>
+                          <a:latin typeface="Times New Roman" panose="02020603050405020304" pitchFamily="18" charset="0"/>
+                          <a:ea typeface="Times New Roman" panose="02020603050405020304" pitchFamily="18" charset="0"/>
+                          <a:cs typeface="Times New Roman" panose="02020603050405020304" pitchFamily="18" charset="0"/>
+                        </a:rPr>
+                        <a:t>12.53</a:t>
+                      </a:r>
+                      <a:endParaRPr lang="de-DE" sz="1000">
+                        <a:effectLst/>
+                        <a:latin typeface="Times New Roman" panose="02020603050405020304" pitchFamily="18" charset="0"/>
+                        <a:ea typeface="Times New Roman" panose="02020603050405020304" pitchFamily="18" charset="0"/>
+                        <a:cs typeface="Times New Roman" panose="02020603050405020304" pitchFamily="18" charset="0"/>
+                      </a:endParaRPr>
+                    </a:p>
+                  </a:txBody>
+                  <a:tcPr marL="68580" marR="68580" marT="0" marB="0">
                     <a:lnT w="12700" cap="flat" cmpd="sng" algn="ctr">
                       <a:solidFill>
                         <a:schemeClr val="tx1"/>
@@ -17032,109 +17342,139 @@
                         <a:buNone/>
                       </a:pPr>
                       <a:r>
-                        <a:rPr lang="es-ES_tradnl" sz="1000" dirty="0">
-                          <a:effectLst/>
-                          <a:latin typeface="Times New Roman" panose="02020603050405020304" pitchFamily="18" charset="0"/>
-                          <a:ea typeface="Times New Roman" panose="02020603050405020304" pitchFamily="18" charset="0"/>
-                          <a:cs typeface="Times New Roman" panose="02020603050405020304" pitchFamily="18" charset="0"/>
-                        </a:rPr>
-                        <a:t>0.88</a:t>
-                      </a:r>
-                    </a:p>
-                  </a:txBody>
-                  <a:tcPr marL="68580" marR="68580" marT="0" marB="0" anchor="ctr">
-                    <a:noFill/>
-                  </a:tcPr>
-                </a:tc>
-                <a:tc>
-                  <a:txBody>
-                    <a:bodyPr/>
-                    <a:lstStyle/>
-                    <a:p>
-                      <a:pPr algn="ctr">
-                        <a:buNone/>
-                      </a:pPr>
-                      <a:r>
-                        <a:rPr lang="es-ES_tradnl" sz="1000" dirty="0">
-                          <a:effectLst/>
-                          <a:latin typeface="Times New Roman" panose="02020603050405020304" pitchFamily="18" charset="0"/>
-                          <a:ea typeface="Times New Roman" panose="02020603050405020304" pitchFamily="18" charset="0"/>
-                          <a:cs typeface="Times New Roman" panose="02020603050405020304" pitchFamily="18" charset="0"/>
-                        </a:rPr>
-                        <a:t>2.32</a:t>
-                      </a:r>
-                    </a:p>
-                  </a:txBody>
-                  <a:tcPr marL="68580" marR="68580" marT="0" marB="0" anchor="ctr">
-                    <a:noFill/>
-                  </a:tcPr>
-                </a:tc>
-                <a:tc>
-                  <a:txBody>
-                    <a:bodyPr/>
-                    <a:lstStyle/>
-                    <a:p>
-                      <a:pPr algn="ctr">
-                        <a:buNone/>
-                      </a:pPr>
-                      <a:r>
-                        <a:rPr lang="es-ES_tradnl" sz="1000" dirty="0">
-                          <a:effectLst/>
-                          <a:latin typeface="Times New Roman" panose="02020603050405020304" pitchFamily="18" charset="0"/>
-                          <a:ea typeface="Times New Roman" panose="02020603050405020304" pitchFamily="18" charset="0"/>
-                          <a:cs typeface="Times New Roman" panose="02020603050405020304" pitchFamily="18" charset="0"/>
-                        </a:rPr>
-                        <a:t>1.62</a:t>
-                      </a:r>
-                    </a:p>
-                  </a:txBody>
-                  <a:tcPr marL="68580" marR="68580" marT="0" marB="0" anchor="ctr">
-                    <a:noFill/>
-                  </a:tcPr>
-                </a:tc>
-                <a:tc>
-                  <a:txBody>
-                    <a:bodyPr/>
-                    <a:lstStyle/>
-                    <a:p>
-                      <a:pPr algn="ctr">
-                        <a:buNone/>
-                      </a:pPr>
-                      <a:r>
-                        <a:rPr lang="es-ES_tradnl" sz="1000" dirty="0">
-                          <a:effectLst/>
-                          <a:latin typeface="Times New Roman" panose="02020603050405020304" pitchFamily="18" charset="0"/>
-                          <a:ea typeface="Times New Roman" panose="02020603050405020304" pitchFamily="18" charset="0"/>
-                          <a:cs typeface="Times New Roman" panose="02020603050405020304" pitchFamily="18" charset="0"/>
-                        </a:rPr>
-                        <a:t>32.98</a:t>
-                      </a:r>
-                    </a:p>
-                  </a:txBody>
-                  <a:tcPr marL="68580" marR="68580" marT="0" marB="0" anchor="ctr">
-                    <a:noFill/>
-                  </a:tcPr>
-                </a:tc>
-                <a:tc>
-                  <a:txBody>
-                    <a:bodyPr/>
-                    <a:lstStyle/>
-                    <a:p>
-                      <a:pPr algn="ctr">
-                        <a:buNone/>
-                      </a:pPr>
-                      <a:r>
-                        <a:rPr lang="es-ES_tradnl" sz="1000" dirty="0">
-                          <a:effectLst/>
-                          <a:latin typeface="Times New Roman" panose="02020603050405020304" pitchFamily="18" charset="0"/>
-                          <a:ea typeface="Times New Roman" panose="02020603050405020304" pitchFamily="18" charset="0"/>
-                          <a:cs typeface="Times New Roman" panose="02020603050405020304" pitchFamily="18" charset="0"/>
-                        </a:rPr>
-                        <a:t>NaN</a:t>
-                      </a:r>
-                    </a:p>
-                  </a:txBody>
-                  <a:tcPr marL="68580" marR="68580" marT="0" marB="0" anchor="ctr">
+                        <a:rPr lang="es-ES" sz="1000">
+                          <a:effectLst/>
+                          <a:latin typeface="Times New Roman" panose="02020603050405020304" pitchFamily="18" charset="0"/>
+                          <a:ea typeface="Times New Roman" panose="02020603050405020304" pitchFamily="18" charset="0"/>
+                          <a:cs typeface="Times New Roman" panose="02020603050405020304" pitchFamily="18" charset="0"/>
+                        </a:rPr>
+                        <a:t>6.00</a:t>
+                      </a:r>
+                      <a:endParaRPr lang="de-DE" sz="1000">
+                        <a:effectLst/>
+                        <a:latin typeface="Times New Roman" panose="02020603050405020304" pitchFamily="18" charset="0"/>
+                        <a:ea typeface="Times New Roman" panose="02020603050405020304" pitchFamily="18" charset="0"/>
+                        <a:cs typeface="Times New Roman" panose="02020603050405020304" pitchFamily="18" charset="0"/>
+                      </a:endParaRPr>
+                    </a:p>
+                  </a:txBody>
+                  <a:tcPr marL="68580" marR="68580" marT="0" marB="0">
+                    <a:noFill/>
+                  </a:tcPr>
+                </a:tc>
+                <a:tc>
+                  <a:txBody>
+                    <a:bodyPr/>
+                    <a:lstStyle/>
+                    <a:p>
+                      <a:pPr algn="ctr">
+                        <a:buNone/>
+                      </a:pPr>
+                      <a:r>
+                        <a:rPr lang="es-ES" sz="1000">
+                          <a:effectLst/>
+                          <a:latin typeface="Times New Roman" panose="02020603050405020304" pitchFamily="18" charset="0"/>
+                          <a:ea typeface="Times New Roman" panose="02020603050405020304" pitchFamily="18" charset="0"/>
+                          <a:cs typeface="Times New Roman" panose="02020603050405020304" pitchFamily="18" charset="0"/>
+                        </a:rPr>
+                        <a:t>1.93</a:t>
+                      </a:r>
+                      <a:endParaRPr lang="de-DE" sz="1000">
+                        <a:effectLst/>
+                        <a:latin typeface="Times New Roman" panose="02020603050405020304" pitchFamily="18" charset="0"/>
+                        <a:ea typeface="Times New Roman" panose="02020603050405020304" pitchFamily="18" charset="0"/>
+                        <a:cs typeface="Times New Roman" panose="02020603050405020304" pitchFamily="18" charset="0"/>
+                      </a:endParaRPr>
+                    </a:p>
+                  </a:txBody>
+                  <a:tcPr marL="68580" marR="68580" marT="0" marB="0">
+                    <a:noFill/>
+                  </a:tcPr>
+                </a:tc>
+                <a:tc>
+                  <a:txBody>
+                    <a:bodyPr/>
+                    <a:lstStyle/>
+                    <a:p>
+                      <a:pPr algn="ctr">
+                        <a:buNone/>
+                      </a:pPr>
+                      <a:r>
+                        <a:rPr lang="es-ES" sz="1000">
+                          <a:effectLst/>
+                          <a:latin typeface="Times New Roman" panose="02020603050405020304" pitchFamily="18" charset="0"/>
+                          <a:ea typeface="Times New Roman" panose="02020603050405020304" pitchFamily="18" charset="0"/>
+                          <a:cs typeface="Times New Roman" panose="02020603050405020304" pitchFamily="18" charset="0"/>
+                        </a:rPr>
+                        <a:t>19.58</a:t>
+                      </a:r>
+                      <a:endParaRPr lang="de-DE" sz="1000">
+                        <a:effectLst/>
+                        <a:latin typeface="Times New Roman" panose="02020603050405020304" pitchFamily="18" charset="0"/>
+                        <a:ea typeface="Times New Roman" panose="02020603050405020304" pitchFamily="18" charset="0"/>
+                        <a:cs typeface="Times New Roman" panose="02020603050405020304" pitchFamily="18" charset="0"/>
+                      </a:endParaRPr>
+                    </a:p>
+                  </a:txBody>
+                  <a:tcPr marL="68580" marR="68580" marT="0" marB="0">
+                    <a:noFill/>
+                  </a:tcPr>
+                </a:tc>
+                <a:tc>
+                  <a:txBody>
+                    <a:bodyPr/>
+                    <a:lstStyle/>
+                    <a:p>
+                      <a:pPr algn="ctr">
+                        <a:buNone/>
+                      </a:pPr>
+                      <a:r>
+                        <a:rPr lang="es-ES" sz="1000">
+                          <a:effectLst/>
+                          <a:latin typeface="Times New Roman" panose="02020603050405020304" pitchFamily="18" charset="0"/>
+                          <a:ea typeface="Times New Roman" panose="02020603050405020304" pitchFamily="18" charset="0"/>
+                          <a:cs typeface="Times New Roman" panose="02020603050405020304" pitchFamily="18" charset="0"/>
+                        </a:rPr>
+                        <a:t>4.29</a:t>
+                      </a:r>
+                      <a:endParaRPr lang="de-DE" sz="1000">
+                        <a:effectLst/>
+                        <a:latin typeface="Times New Roman" panose="02020603050405020304" pitchFamily="18" charset="0"/>
+                        <a:ea typeface="Times New Roman" panose="02020603050405020304" pitchFamily="18" charset="0"/>
+                        <a:cs typeface="Times New Roman" panose="02020603050405020304" pitchFamily="18" charset="0"/>
+                      </a:endParaRPr>
+                    </a:p>
+                  </a:txBody>
+                  <a:tcPr marL="68580" marR="68580" marT="0" marB="0">
+                    <a:noFill/>
+                  </a:tcPr>
+                </a:tc>
+                <a:tc>
+                  <a:txBody>
+                    <a:bodyPr/>
+                    <a:lstStyle/>
+                    <a:p>
+                      <a:pPr algn="ctr">
+                        <a:buNone/>
+                      </a:pPr>
+                      <a:r>
+                        <a:rPr lang="es-ES" sz="1000">
+                          <a:effectLst/>
+                          <a:latin typeface="Times New Roman" panose="02020603050405020304" pitchFamily="18" charset="0"/>
+                          <a:ea typeface="Times New Roman" panose="02020603050405020304" pitchFamily="18" charset="0"/>
+                          <a:cs typeface="Times New Roman" panose="02020603050405020304" pitchFamily="18" charset="0"/>
+                        </a:rPr>
+                        <a:t>28.75</a:t>
+                      </a:r>
+                      <a:endParaRPr lang="de-DE" sz="1000">
+                        <a:effectLst/>
+                        <a:latin typeface="Times New Roman" panose="02020603050405020304" pitchFamily="18" charset="0"/>
+                        <a:ea typeface="Times New Roman" panose="02020603050405020304" pitchFamily="18" charset="0"/>
+                        <a:cs typeface="Times New Roman" panose="02020603050405020304" pitchFamily="18" charset="0"/>
+                      </a:endParaRPr>
+                    </a:p>
+                  </a:txBody>
+                  <a:tcPr marL="68580" marR="68580" marT="0" marB="0">
                     <a:noFill/>
                   </a:tcPr>
                 </a:tc>
@@ -17410,109 +17750,139 @@
                         <a:buNone/>
                       </a:pPr>
                       <a:r>
-                        <a:rPr lang="es-ES_tradnl" sz="1000" dirty="0">
-                          <a:effectLst/>
-                          <a:latin typeface="Times New Roman" panose="02020603050405020304" pitchFamily="18" charset="0"/>
-                          <a:ea typeface="Times New Roman" panose="02020603050405020304" pitchFamily="18" charset="0"/>
-                          <a:cs typeface="Times New Roman" panose="02020603050405020304" pitchFamily="18" charset="0"/>
-                        </a:rPr>
-                        <a:t>10.00</a:t>
-                      </a:r>
-                    </a:p>
-                  </a:txBody>
-                  <a:tcPr marL="68580" marR="68580" marT="0" marB="0" anchor="ctr">
-                    <a:noFill/>
-                  </a:tcPr>
-                </a:tc>
-                <a:tc>
-                  <a:txBody>
-                    <a:bodyPr/>
-                    <a:lstStyle/>
-                    <a:p>
-                      <a:pPr algn="ctr">
-                        <a:buNone/>
-                      </a:pPr>
-                      <a:r>
-                        <a:rPr lang="es-ES_tradnl" sz="1000" dirty="0">
-                          <a:effectLst/>
-                          <a:latin typeface="Times New Roman" panose="02020603050405020304" pitchFamily="18" charset="0"/>
-                          <a:ea typeface="Times New Roman" panose="02020603050405020304" pitchFamily="18" charset="0"/>
-                          <a:cs typeface="Times New Roman" panose="02020603050405020304" pitchFamily="18" charset="0"/>
-                        </a:rPr>
-                        <a:t>4.22</a:t>
-                      </a:r>
-                    </a:p>
-                  </a:txBody>
-                  <a:tcPr marL="68580" marR="68580" marT="0" marB="0" anchor="ctr">
-                    <a:noFill/>
-                  </a:tcPr>
-                </a:tc>
-                <a:tc>
-                  <a:txBody>
-                    <a:bodyPr/>
-                    <a:lstStyle/>
-                    <a:p>
-                      <a:pPr algn="ctr">
-                        <a:buNone/>
-                      </a:pPr>
-                      <a:r>
-                        <a:rPr lang="es-ES_tradnl" sz="1000" dirty="0">
-                          <a:effectLst/>
-                          <a:latin typeface="Times New Roman" panose="02020603050405020304" pitchFamily="18" charset="0"/>
-                          <a:ea typeface="Times New Roman" panose="02020603050405020304" pitchFamily="18" charset="0"/>
-                          <a:cs typeface="Times New Roman" panose="02020603050405020304" pitchFamily="18" charset="0"/>
-                        </a:rPr>
-                        <a:t>98.47</a:t>
-                      </a:r>
-                    </a:p>
-                  </a:txBody>
-                  <a:tcPr marL="68580" marR="68580" marT="0" marB="0" anchor="ctr">
-                    <a:noFill/>
-                  </a:tcPr>
-                </a:tc>
-                <a:tc>
-                  <a:txBody>
-                    <a:bodyPr/>
-                    <a:lstStyle/>
-                    <a:p>
-                      <a:pPr algn="ctr">
-                        <a:buNone/>
-                      </a:pPr>
-                      <a:r>
-                        <a:rPr lang="es-ES_tradnl" sz="1000" dirty="0">
-                          <a:effectLst/>
-                          <a:latin typeface="Times New Roman" panose="02020603050405020304" pitchFamily="18" charset="0"/>
-                          <a:ea typeface="Times New Roman" panose="02020603050405020304" pitchFamily="18" charset="0"/>
-                          <a:cs typeface="Times New Roman" panose="02020603050405020304" pitchFamily="18" charset="0"/>
-                        </a:rPr>
-                        <a:t>10.75</a:t>
-                      </a:r>
-                    </a:p>
-                  </a:txBody>
-                  <a:tcPr marL="68580" marR="68580" marT="0" marB="0" anchor="ctr">
-                    <a:noFill/>
-                  </a:tcPr>
-                </a:tc>
-                <a:tc>
-                  <a:txBody>
-                    <a:bodyPr/>
-                    <a:lstStyle/>
-                    <a:p>
-                      <a:pPr algn="ctr">
-                        <a:buNone/>
-                      </a:pPr>
-                      <a:r>
-                        <a:rPr lang="es-ES_tradnl" sz="1000" dirty="0">
-                          <a:effectLst/>
-                          <a:latin typeface="Times New Roman" panose="02020603050405020304" pitchFamily="18" charset="0"/>
-                          <a:ea typeface="Times New Roman" panose="02020603050405020304" pitchFamily="18" charset="0"/>
-                          <a:cs typeface="Times New Roman" panose="02020603050405020304" pitchFamily="18" charset="0"/>
-                        </a:rPr>
-                        <a:t>30.36</a:t>
-                      </a:r>
-                    </a:p>
-                  </a:txBody>
-                  <a:tcPr marL="68580" marR="68580" marT="0" marB="0" anchor="ctr">
+                        <a:rPr lang="es-ES" sz="1000">
+                          <a:effectLst/>
+                          <a:latin typeface="Times New Roman" panose="02020603050405020304" pitchFamily="18" charset="0"/>
+                          <a:ea typeface="Times New Roman" panose="02020603050405020304" pitchFamily="18" charset="0"/>
+                          <a:cs typeface="Times New Roman" panose="02020603050405020304" pitchFamily="18" charset="0"/>
+                        </a:rPr>
+                        <a:t>6.00</a:t>
+                      </a:r>
+                      <a:endParaRPr lang="de-DE" sz="1000">
+                        <a:effectLst/>
+                        <a:latin typeface="Times New Roman" panose="02020603050405020304" pitchFamily="18" charset="0"/>
+                        <a:ea typeface="Times New Roman" panose="02020603050405020304" pitchFamily="18" charset="0"/>
+                        <a:cs typeface="Times New Roman" panose="02020603050405020304" pitchFamily="18" charset="0"/>
+                      </a:endParaRPr>
+                    </a:p>
+                  </a:txBody>
+                  <a:tcPr marL="68580" marR="68580" marT="0" marB="0">
+                    <a:noFill/>
+                  </a:tcPr>
+                </a:tc>
+                <a:tc>
+                  <a:txBody>
+                    <a:bodyPr/>
+                    <a:lstStyle/>
+                    <a:p>
+                      <a:pPr algn="ctr">
+                        <a:buNone/>
+                      </a:pPr>
+                      <a:r>
+                        <a:rPr lang="es-ES" sz="1000">
+                          <a:effectLst/>
+                          <a:latin typeface="Times New Roman" panose="02020603050405020304" pitchFamily="18" charset="0"/>
+                          <a:ea typeface="Times New Roman" panose="02020603050405020304" pitchFamily="18" charset="0"/>
+                          <a:cs typeface="Times New Roman" panose="02020603050405020304" pitchFamily="18" charset="0"/>
+                        </a:rPr>
+                        <a:t>2.80</a:t>
+                      </a:r>
+                      <a:endParaRPr lang="de-DE" sz="1000">
+                        <a:effectLst/>
+                        <a:latin typeface="Times New Roman" panose="02020603050405020304" pitchFamily="18" charset="0"/>
+                        <a:ea typeface="Times New Roman" panose="02020603050405020304" pitchFamily="18" charset="0"/>
+                        <a:cs typeface="Times New Roman" panose="02020603050405020304" pitchFamily="18" charset="0"/>
+                      </a:endParaRPr>
+                    </a:p>
+                  </a:txBody>
+                  <a:tcPr marL="68580" marR="68580" marT="0" marB="0">
+                    <a:noFill/>
+                  </a:tcPr>
+                </a:tc>
+                <a:tc>
+                  <a:txBody>
+                    <a:bodyPr/>
+                    <a:lstStyle/>
+                    <a:p>
+                      <a:pPr algn="ctr">
+                        <a:buNone/>
+                      </a:pPr>
+                      <a:r>
+                        <a:rPr lang="es-ES" sz="1000">
+                          <a:effectLst/>
+                          <a:latin typeface="Times New Roman" panose="02020603050405020304" pitchFamily="18" charset="0"/>
+                          <a:ea typeface="Times New Roman" panose="02020603050405020304" pitchFamily="18" charset="0"/>
+                          <a:cs typeface="Times New Roman" panose="02020603050405020304" pitchFamily="18" charset="0"/>
+                        </a:rPr>
+                        <a:t>44.41</a:t>
+                      </a:r>
+                      <a:endParaRPr lang="de-DE" sz="1000">
+                        <a:effectLst/>
+                        <a:latin typeface="Times New Roman" panose="02020603050405020304" pitchFamily="18" charset="0"/>
+                        <a:ea typeface="Times New Roman" panose="02020603050405020304" pitchFamily="18" charset="0"/>
+                        <a:cs typeface="Times New Roman" panose="02020603050405020304" pitchFamily="18" charset="0"/>
+                      </a:endParaRPr>
+                    </a:p>
+                  </a:txBody>
+                  <a:tcPr marL="68580" marR="68580" marT="0" marB="0">
+                    <a:noFill/>
+                  </a:tcPr>
+                </a:tc>
+                <a:tc>
+                  <a:txBody>
+                    <a:bodyPr/>
+                    <a:lstStyle/>
+                    <a:p>
+                      <a:pPr algn="ctr">
+                        <a:buNone/>
+                      </a:pPr>
+                      <a:r>
+                        <a:rPr lang="es-ES" sz="1000">
+                          <a:effectLst/>
+                          <a:latin typeface="Times New Roman" panose="02020603050405020304" pitchFamily="18" charset="0"/>
+                          <a:ea typeface="Times New Roman" panose="02020603050405020304" pitchFamily="18" charset="0"/>
+                          <a:cs typeface="Times New Roman" panose="02020603050405020304" pitchFamily="18" charset="0"/>
+                        </a:rPr>
+                        <a:t>7.97</a:t>
+                      </a:r>
+                      <a:endParaRPr lang="de-DE" sz="1000">
+                        <a:effectLst/>
+                        <a:latin typeface="Times New Roman" panose="02020603050405020304" pitchFamily="18" charset="0"/>
+                        <a:ea typeface="Times New Roman" panose="02020603050405020304" pitchFamily="18" charset="0"/>
+                        <a:cs typeface="Times New Roman" panose="02020603050405020304" pitchFamily="18" charset="0"/>
+                      </a:endParaRPr>
+                    </a:p>
+                  </a:txBody>
+                  <a:tcPr marL="68580" marR="68580" marT="0" marB="0">
+                    <a:noFill/>
+                  </a:tcPr>
+                </a:tc>
+                <a:tc>
+                  <a:txBody>
+                    <a:bodyPr/>
+                    <a:lstStyle/>
+                    <a:p>
+                      <a:pPr algn="ctr">
+                        <a:buNone/>
+                      </a:pPr>
+                      <a:r>
+                        <a:rPr lang="es-ES" sz="1000" dirty="0">
+                          <a:effectLst/>
+                          <a:latin typeface="Times New Roman" panose="02020603050405020304" pitchFamily="18" charset="0"/>
+                          <a:ea typeface="Times New Roman" panose="02020603050405020304" pitchFamily="18" charset="0"/>
+                          <a:cs typeface="Times New Roman" panose="02020603050405020304" pitchFamily="18" charset="0"/>
+                        </a:rPr>
+                        <a:t>34.79</a:t>
+                      </a:r>
+                      <a:endParaRPr lang="de-DE" sz="1000" dirty="0">
+                        <a:effectLst/>
+                        <a:latin typeface="Times New Roman" panose="02020603050405020304" pitchFamily="18" charset="0"/>
+                        <a:ea typeface="Times New Roman" panose="02020603050405020304" pitchFamily="18" charset="0"/>
+                        <a:cs typeface="Times New Roman" panose="02020603050405020304" pitchFamily="18" charset="0"/>
+                      </a:endParaRPr>
+                    </a:p>
+                  </a:txBody>
+                  <a:tcPr marL="68580" marR="68580" marT="0" marB="0">
                     <a:noFill/>
                   </a:tcPr>
                 </a:tc>
@@ -18733,38 +19103,6 @@
           </a:p>
         </p:txBody>
       </p:sp>
-      <p:pic>
-        <p:nvPicPr>
-          <p:cNvPr id="5" name="Onlinebild-Platzhalter 4">
-            <a:extLst>
-              <a:ext uri="{FF2B5EF4-FFF2-40B4-BE49-F238E27FC236}">
-                <a16:creationId xmlns:a16="http://schemas.microsoft.com/office/drawing/2014/main" id="{F9110745-C824-4FC6-F4B2-E1A82FE38D0B}"/>
-              </a:ext>
-            </a:extLst>
-          </p:cNvPr>
-          <p:cNvPicPr>
-            <a:picLocks noGrp="1" noChangeAspect="1"/>
-          </p:cNvPicPr>
-          <p:nvPr>
-            <p:ph type="clipArt" sz="quarter" idx="15"/>
-          </p:nvPr>
-        </p:nvPicPr>
-        <p:blipFill>
-          <a:blip r:embed="rId2"/>
-          <a:stretch>
-            <a:fillRect/>
-          </a:stretch>
-        </p:blipFill>
-        <p:spPr>
-          <a:xfrm>
-            <a:off x="520700" y="2406756"/>
-            <a:ext cx="5365750" cy="3497050"/>
-          </a:xfrm>
-          <a:prstGeom prst="rect">
-            <a:avLst/>
-          </a:prstGeom>
-        </p:spPr>
-      </p:pic>
       <p:sp>
         <p:nvSpPr>
           <p:cNvPr id="2" name="Fußzeilenplatzhalter 2">
@@ -18894,6 +19232,38 @@
           </a:p>
         </p:txBody>
       </p:sp>
+      <p:pic>
+        <p:nvPicPr>
+          <p:cNvPr id="7" name="Onlinebild-Platzhalter 6">
+            <a:extLst>
+              <a:ext uri="{FF2B5EF4-FFF2-40B4-BE49-F238E27FC236}">
+                <a16:creationId xmlns:a16="http://schemas.microsoft.com/office/drawing/2014/main" id="{96842486-D4A7-AB59-8A93-CB5F654A3D95}"/>
+              </a:ext>
+            </a:extLst>
+          </p:cNvPr>
+          <p:cNvPicPr>
+            <a:picLocks noGrp="1" noChangeAspect="1"/>
+          </p:cNvPicPr>
+          <p:nvPr>
+            <p:ph type="clipArt" sz="quarter" idx="15"/>
+          </p:nvPr>
+        </p:nvPicPr>
+        <p:blipFill>
+          <a:blip r:embed="rId2"/>
+          <a:stretch>
+            <a:fillRect/>
+          </a:stretch>
+        </p:blipFill>
+        <p:spPr>
+          <a:xfrm>
+            <a:off x="815491" y="2151063"/>
+            <a:ext cx="4776167" cy="4008437"/>
+          </a:xfrm>
+          <a:prstGeom prst="rect">
+            <a:avLst/>
+          </a:prstGeom>
+        </p:spPr>
+      </p:pic>
     </p:spTree>
     <p:extLst>
       <p:ext uri="{BB962C8B-B14F-4D97-AF65-F5344CB8AC3E}">
@@ -18984,7 +19354,7 @@
             <p:ph sz="quarter" idx="14"/>
             <p:extLst>
               <p:ext uri="{D42A27DB-BD31-4B8C-83A1-F6EECF244321}">
-                <p14:modId xmlns:p14="http://schemas.microsoft.com/office/powerpoint/2010/main" val="3579477232"/>
+                <p14:modId xmlns:p14="http://schemas.microsoft.com/office/powerpoint/2010/main" val="1068986895"/>
               </p:ext>
             </p:extLst>
           </p:nvPr>
@@ -20334,17 +20704,23 @@
                         <a:buNone/>
                       </a:pPr>
                       <a:r>
-                        <a:rPr lang="es-ES_tradnl" sz="1000" dirty="0">
-                          <a:effectLst/>
-                          <a:latin typeface="Times New Roman" panose="02020603050405020304" pitchFamily="18" charset="0"/>
-                          <a:ea typeface="Times New Roman" panose="02020603050405020304" pitchFamily="18" charset="0"/>
-                          <a:cs typeface="Times New Roman" panose="02020603050405020304" pitchFamily="18" charset="0"/>
-                        </a:rPr>
-                        <a:t>9.90</a:t>
-                      </a:r>
-                    </a:p>
-                  </a:txBody>
-                  <a:tcPr marL="68580" marR="68580" marT="0" marB="0" anchor="ctr">
+                        <a:rPr lang="es-ES" sz="1000">
+                          <a:effectLst/>
+                          <a:latin typeface="Times New Roman" panose="02020603050405020304" pitchFamily="18" charset="0"/>
+                          <a:ea typeface="Times New Roman" panose="02020603050405020304" pitchFamily="18" charset="0"/>
+                          <a:cs typeface="Times New Roman" panose="02020603050405020304" pitchFamily="18" charset="0"/>
+                        </a:rPr>
+                        <a:t>6.00</a:t>
+                      </a:r>
+                      <a:endParaRPr lang="de-DE" sz="1000">
+                        <a:effectLst/>
+                        <a:latin typeface="Times New Roman" panose="02020603050405020304" pitchFamily="18" charset="0"/>
+                        <a:ea typeface="Times New Roman" panose="02020603050405020304" pitchFamily="18" charset="0"/>
+                        <a:cs typeface="Times New Roman" panose="02020603050405020304" pitchFamily="18" charset="0"/>
+                      </a:endParaRPr>
+                    </a:p>
+                  </a:txBody>
+                  <a:tcPr marL="68580" marR="68580" marT="0" marB="0">
                     <a:lnT w="12700" cap="flat" cmpd="sng" algn="ctr">
                       <a:solidFill>
                         <a:schemeClr val="tx1"/>
@@ -20366,17 +20742,23 @@
                         <a:buNone/>
                       </a:pPr>
                       <a:r>
-                        <a:rPr lang="es-ES_tradnl" sz="1000" dirty="0">
-                          <a:effectLst/>
-                          <a:latin typeface="Times New Roman" panose="02020603050405020304" pitchFamily="18" charset="0"/>
-                          <a:ea typeface="Times New Roman" panose="02020603050405020304" pitchFamily="18" charset="0"/>
-                          <a:cs typeface="Times New Roman" panose="02020603050405020304" pitchFamily="18" charset="0"/>
-                        </a:rPr>
-                        <a:t>2.63</a:t>
-                      </a:r>
-                    </a:p>
-                  </a:txBody>
-                  <a:tcPr marL="68580" marR="68580" marT="0" marB="0" anchor="ctr">
+                        <a:rPr lang="es-ES" sz="1000">
+                          <a:effectLst/>
+                          <a:latin typeface="Times New Roman" panose="02020603050405020304" pitchFamily="18" charset="0"/>
+                          <a:ea typeface="Times New Roman" panose="02020603050405020304" pitchFamily="18" charset="0"/>
+                          <a:cs typeface="Times New Roman" panose="02020603050405020304" pitchFamily="18" charset="0"/>
+                        </a:rPr>
+                        <a:t>1.90</a:t>
+                      </a:r>
+                      <a:endParaRPr lang="de-DE" sz="1000">
+                        <a:effectLst/>
+                        <a:latin typeface="Times New Roman" panose="02020603050405020304" pitchFamily="18" charset="0"/>
+                        <a:ea typeface="Times New Roman" panose="02020603050405020304" pitchFamily="18" charset="0"/>
+                        <a:cs typeface="Times New Roman" panose="02020603050405020304" pitchFamily="18" charset="0"/>
+                      </a:endParaRPr>
+                    </a:p>
+                  </a:txBody>
+                  <a:tcPr marL="68580" marR="68580" marT="0" marB="0">
                     <a:lnT w="12700" cap="flat" cmpd="sng" algn="ctr">
                       <a:solidFill>
                         <a:schemeClr val="tx1"/>
@@ -20398,17 +20780,23 @@
                         <a:buNone/>
                       </a:pPr>
                       <a:r>
-                        <a:rPr lang="es-ES_tradnl" sz="1000" dirty="0">
-                          <a:effectLst/>
-                          <a:latin typeface="Times New Roman" panose="02020603050405020304" pitchFamily="18" charset="0"/>
-                          <a:ea typeface="Times New Roman" panose="02020603050405020304" pitchFamily="18" charset="0"/>
-                          <a:cs typeface="Times New Roman" panose="02020603050405020304" pitchFamily="18" charset="0"/>
-                        </a:rPr>
-                        <a:t>35.17</a:t>
-                      </a:r>
-                    </a:p>
-                  </a:txBody>
-                  <a:tcPr marL="68580" marR="68580" marT="0" marB="0" anchor="ctr">
+                        <a:rPr lang="es-ES" sz="1000">
+                          <a:effectLst/>
+                          <a:latin typeface="Times New Roman" panose="02020603050405020304" pitchFamily="18" charset="0"/>
+                          <a:ea typeface="Times New Roman" panose="02020603050405020304" pitchFamily="18" charset="0"/>
+                          <a:cs typeface="Times New Roman" panose="02020603050405020304" pitchFamily="18" charset="0"/>
+                        </a:rPr>
+                        <a:t>18.86</a:t>
+                      </a:r>
+                      <a:endParaRPr lang="de-DE" sz="1000">
+                        <a:effectLst/>
+                        <a:latin typeface="Times New Roman" panose="02020603050405020304" pitchFamily="18" charset="0"/>
+                        <a:ea typeface="Times New Roman" panose="02020603050405020304" pitchFamily="18" charset="0"/>
+                        <a:cs typeface="Times New Roman" panose="02020603050405020304" pitchFamily="18" charset="0"/>
+                      </a:endParaRPr>
+                    </a:p>
+                  </a:txBody>
+                  <a:tcPr marL="68580" marR="68580" marT="0" marB="0">
                     <a:lnT w="12700" cap="flat" cmpd="sng" algn="ctr">
                       <a:solidFill>
                         <a:schemeClr val="tx1"/>
@@ -20430,17 +20818,23 @@
                         <a:buNone/>
                       </a:pPr>
                       <a:r>
-                        <a:rPr lang="es-ES_tradnl" sz="1000" dirty="0">
-                          <a:effectLst/>
-                          <a:latin typeface="Times New Roman" panose="02020603050405020304" pitchFamily="18" charset="0"/>
-                          <a:ea typeface="Times New Roman" panose="02020603050405020304" pitchFamily="18" charset="0"/>
-                          <a:cs typeface="Times New Roman" panose="02020603050405020304" pitchFamily="18" charset="0"/>
-                        </a:rPr>
-                        <a:t>4.98</a:t>
-                      </a:r>
-                    </a:p>
-                  </a:txBody>
-                  <a:tcPr marL="68580" marR="68580" marT="0" marB="0" anchor="ctr">
+                        <a:rPr lang="es-ES" sz="1000">
+                          <a:effectLst/>
+                          <a:latin typeface="Times New Roman" panose="02020603050405020304" pitchFamily="18" charset="0"/>
+                          <a:ea typeface="Times New Roman" panose="02020603050405020304" pitchFamily="18" charset="0"/>
+                          <a:cs typeface="Times New Roman" panose="02020603050405020304" pitchFamily="18" charset="0"/>
+                        </a:rPr>
+                        <a:t>3.90</a:t>
+                      </a:r>
+                      <a:endParaRPr lang="de-DE" sz="1000">
+                        <a:effectLst/>
+                        <a:latin typeface="Times New Roman" panose="02020603050405020304" pitchFamily="18" charset="0"/>
+                        <a:ea typeface="Times New Roman" panose="02020603050405020304" pitchFamily="18" charset="0"/>
+                        <a:cs typeface="Times New Roman" panose="02020603050405020304" pitchFamily="18" charset="0"/>
+                      </a:endParaRPr>
+                    </a:p>
+                  </a:txBody>
+                  <a:tcPr marL="68580" marR="68580" marT="0" marB="0">
                     <a:lnT w="12700" cap="flat" cmpd="sng" algn="ctr">
                       <a:solidFill>
                         <a:schemeClr val="tx1"/>
@@ -20462,17 +20856,23 @@
                         <a:buNone/>
                       </a:pPr>
                       <a:r>
-                        <a:rPr lang="es-ES_tradnl" sz="1000" dirty="0">
-                          <a:effectLst/>
-                          <a:latin typeface="Times New Roman" panose="02020603050405020304" pitchFamily="18" charset="0"/>
-                          <a:ea typeface="Times New Roman" panose="02020603050405020304" pitchFamily="18" charset="0"/>
-                          <a:cs typeface="Times New Roman" panose="02020603050405020304" pitchFamily="18" charset="0"/>
-                        </a:rPr>
-                        <a:t>40.63</a:t>
-                      </a:r>
-                    </a:p>
-                  </a:txBody>
-                  <a:tcPr marL="68580" marR="68580" marT="0" marB="0" anchor="ctr">
+                        <a:rPr lang="es-ES" sz="1000">
+                          <a:effectLst/>
+                          <a:latin typeface="Times New Roman" panose="02020603050405020304" pitchFamily="18" charset="0"/>
+                          <a:ea typeface="Times New Roman" panose="02020603050405020304" pitchFamily="18" charset="0"/>
+                          <a:cs typeface="Times New Roman" panose="02020603050405020304" pitchFamily="18" charset="0"/>
+                        </a:rPr>
+                        <a:t>27.31</a:t>
+                      </a:r>
+                      <a:endParaRPr lang="de-DE" sz="1000">
+                        <a:effectLst/>
+                        <a:latin typeface="Times New Roman" panose="02020603050405020304" pitchFamily="18" charset="0"/>
+                        <a:ea typeface="Times New Roman" panose="02020603050405020304" pitchFamily="18" charset="0"/>
+                        <a:cs typeface="Times New Roman" panose="02020603050405020304" pitchFamily="18" charset="0"/>
+                      </a:endParaRPr>
+                    </a:p>
+                  </a:txBody>
+                  <a:tcPr marL="68580" marR="68580" marT="0" marB="0">
                     <a:lnT w="12700" cap="flat" cmpd="sng" algn="ctr">
                       <a:solidFill>
                         <a:schemeClr val="tx1"/>
@@ -20757,109 +21157,139 @@
                         <a:buNone/>
                       </a:pPr>
                       <a:r>
-                        <a:rPr lang="es-ES_tradnl" sz="1000" dirty="0">
-                          <a:effectLst/>
-                          <a:latin typeface="Times New Roman" panose="02020603050405020304" pitchFamily="18" charset="0"/>
-                          <a:ea typeface="Times New Roman" panose="02020603050405020304" pitchFamily="18" charset="0"/>
-                          <a:cs typeface="Times New Roman" panose="02020603050405020304" pitchFamily="18" charset="0"/>
-                        </a:rPr>
-                        <a:t>9.90</a:t>
-                      </a:r>
-                    </a:p>
-                  </a:txBody>
-                  <a:tcPr marL="68580" marR="68580" marT="0" marB="0" anchor="ctr">
-                    <a:noFill/>
-                  </a:tcPr>
-                </a:tc>
-                <a:tc>
-                  <a:txBody>
-                    <a:bodyPr/>
-                    <a:lstStyle/>
-                    <a:p>
-                      <a:pPr algn="ctr">
-                        <a:buNone/>
-                      </a:pPr>
-                      <a:r>
-                        <a:rPr lang="es-ES_tradnl" sz="1000" dirty="0">
-                          <a:effectLst/>
-                          <a:latin typeface="Times New Roman" panose="02020603050405020304" pitchFamily="18" charset="0"/>
-                          <a:ea typeface="Times New Roman" panose="02020603050405020304" pitchFamily="18" charset="0"/>
-                          <a:cs typeface="Times New Roman" panose="02020603050405020304" pitchFamily="18" charset="0"/>
-                        </a:rPr>
-                        <a:t>2.72</a:t>
-                      </a:r>
-                    </a:p>
-                  </a:txBody>
-                  <a:tcPr marL="68580" marR="68580" marT="0" marB="0" anchor="ctr">
-                    <a:noFill/>
-                  </a:tcPr>
-                </a:tc>
-                <a:tc>
-                  <a:txBody>
-                    <a:bodyPr/>
-                    <a:lstStyle/>
-                    <a:p>
-                      <a:pPr algn="ctr">
-                        <a:buNone/>
-                      </a:pPr>
-                      <a:r>
-                        <a:rPr lang="es-ES_tradnl" sz="1000" dirty="0">
-                          <a:effectLst/>
-                          <a:latin typeface="Times New Roman" panose="02020603050405020304" pitchFamily="18" charset="0"/>
-                          <a:ea typeface="Times New Roman" panose="02020603050405020304" pitchFamily="18" charset="0"/>
-                          <a:cs typeface="Times New Roman" panose="02020603050405020304" pitchFamily="18" charset="0"/>
-                        </a:rPr>
-                        <a:t>37.99</a:t>
-                      </a:r>
-                    </a:p>
-                  </a:txBody>
-                  <a:tcPr marL="68580" marR="68580" marT="0" marB="0" anchor="ctr">
-                    <a:noFill/>
-                  </a:tcPr>
-                </a:tc>
-                <a:tc>
-                  <a:txBody>
-                    <a:bodyPr/>
-                    <a:lstStyle/>
-                    <a:p>
-                      <a:pPr algn="ctr">
-                        <a:buNone/>
-                      </a:pPr>
-                      <a:r>
-                        <a:rPr lang="es-ES_tradnl" sz="1000" dirty="0">
-                          <a:effectLst/>
-                          <a:latin typeface="Times New Roman" panose="02020603050405020304" pitchFamily="18" charset="0"/>
-                          <a:ea typeface="Times New Roman" panose="02020603050405020304" pitchFamily="18" charset="0"/>
-                          <a:cs typeface="Times New Roman" panose="02020603050405020304" pitchFamily="18" charset="0"/>
-                        </a:rPr>
-                        <a:t>5.12</a:t>
-                      </a:r>
-                    </a:p>
-                  </a:txBody>
-                  <a:tcPr marL="68580" marR="68580" marT="0" marB="0" anchor="ctr">
-                    <a:noFill/>
-                  </a:tcPr>
-                </a:tc>
-                <a:tc>
-                  <a:txBody>
-                    <a:bodyPr/>
-                    <a:lstStyle/>
-                    <a:p>
-                      <a:pPr algn="ctr">
-                        <a:buNone/>
-                      </a:pPr>
-                      <a:r>
-                        <a:rPr lang="es-ES_tradnl" sz="1000" dirty="0">
-                          <a:effectLst/>
-                          <a:latin typeface="Times New Roman" panose="02020603050405020304" pitchFamily="18" charset="0"/>
-                          <a:ea typeface="Times New Roman" panose="02020603050405020304" pitchFamily="18" charset="0"/>
-                          <a:cs typeface="Times New Roman" panose="02020603050405020304" pitchFamily="18" charset="0"/>
-                        </a:rPr>
-                        <a:t>41.19</a:t>
-                      </a:r>
-                    </a:p>
-                  </a:txBody>
-                  <a:tcPr marL="68580" marR="68580" marT="0" marB="0" anchor="ctr">
+                        <a:rPr lang="es-ES" sz="1000">
+                          <a:effectLst/>
+                          <a:latin typeface="Times New Roman" panose="02020603050405020304" pitchFamily="18" charset="0"/>
+                          <a:ea typeface="Times New Roman" panose="02020603050405020304" pitchFamily="18" charset="0"/>
+                          <a:cs typeface="Times New Roman" panose="02020603050405020304" pitchFamily="18" charset="0"/>
+                        </a:rPr>
+                        <a:t>6.00</a:t>
+                      </a:r>
+                      <a:endParaRPr lang="de-DE" sz="1000">
+                        <a:effectLst/>
+                        <a:latin typeface="Times New Roman" panose="02020603050405020304" pitchFamily="18" charset="0"/>
+                        <a:ea typeface="Times New Roman" panose="02020603050405020304" pitchFamily="18" charset="0"/>
+                        <a:cs typeface="Times New Roman" panose="02020603050405020304" pitchFamily="18" charset="0"/>
+                      </a:endParaRPr>
+                    </a:p>
+                  </a:txBody>
+                  <a:tcPr marL="68580" marR="68580" marT="0" marB="0">
+                    <a:noFill/>
+                  </a:tcPr>
+                </a:tc>
+                <a:tc>
+                  <a:txBody>
+                    <a:bodyPr/>
+                    <a:lstStyle/>
+                    <a:p>
+                      <a:pPr algn="ctr">
+                        <a:buNone/>
+                      </a:pPr>
+                      <a:r>
+                        <a:rPr lang="es-ES" sz="1000">
+                          <a:effectLst/>
+                          <a:latin typeface="Times New Roman" panose="02020603050405020304" pitchFamily="18" charset="0"/>
+                          <a:ea typeface="Times New Roman" panose="02020603050405020304" pitchFamily="18" charset="0"/>
+                          <a:cs typeface="Times New Roman" panose="02020603050405020304" pitchFamily="18" charset="0"/>
+                        </a:rPr>
+                        <a:t>1.93</a:t>
+                      </a:r>
+                      <a:endParaRPr lang="de-DE" sz="1000">
+                        <a:effectLst/>
+                        <a:latin typeface="Times New Roman" panose="02020603050405020304" pitchFamily="18" charset="0"/>
+                        <a:ea typeface="Times New Roman" panose="02020603050405020304" pitchFamily="18" charset="0"/>
+                        <a:cs typeface="Times New Roman" panose="02020603050405020304" pitchFamily="18" charset="0"/>
+                      </a:endParaRPr>
+                    </a:p>
+                  </a:txBody>
+                  <a:tcPr marL="68580" marR="68580" marT="0" marB="0">
+                    <a:noFill/>
+                  </a:tcPr>
+                </a:tc>
+                <a:tc>
+                  <a:txBody>
+                    <a:bodyPr/>
+                    <a:lstStyle/>
+                    <a:p>
+                      <a:pPr algn="ctr">
+                        <a:buNone/>
+                      </a:pPr>
+                      <a:r>
+                        <a:rPr lang="es-ES" sz="1000">
+                          <a:effectLst/>
+                          <a:latin typeface="Times New Roman" panose="02020603050405020304" pitchFamily="18" charset="0"/>
+                          <a:ea typeface="Times New Roman" panose="02020603050405020304" pitchFamily="18" charset="0"/>
+                          <a:cs typeface="Times New Roman" panose="02020603050405020304" pitchFamily="18" charset="0"/>
+                        </a:rPr>
+                        <a:t>19.74</a:t>
+                      </a:r>
+                      <a:endParaRPr lang="de-DE" sz="1000">
+                        <a:effectLst/>
+                        <a:latin typeface="Times New Roman" panose="02020603050405020304" pitchFamily="18" charset="0"/>
+                        <a:ea typeface="Times New Roman" panose="02020603050405020304" pitchFamily="18" charset="0"/>
+                        <a:cs typeface="Times New Roman" panose="02020603050405020304" pitchFamily="18" charset="0"/>
+                      </a:endParaRPr>
+                    </a:p>
+                  </a:txBody>
+                  <a:tcPr marL="68580" marR="68580" marT="0" marB="0">
+                    <a:noFill/>
+                  </a:tcPr>
+                </a:tc>
+                <a:tc>
+                  <a:txBody>
+                    <a:bodyPr/>
+                    <a:lstStyle/>
+                    <a:p>
+                      <a:pPr algn="ctr">
+                        <a:buNone/>
+                      </a:pPr>
+                      <a:r>
+                        <a:rPr lang="es-ES" sz="1000">
+                          <a:effectLst/>
+                          <a:latin typeface="Times New Roman" panose="02020603050405020304" pitchFamily="18" charset="0"/>
+                          <a:ea typeface="Times New Roman" panose="02020603050405020304" pitchFamily="18" charset="0"/>
+                          <a:cs typeface="Times New Roman" panose="02020603050405020304" pitchFamily="18" charset="0"/>
+                        </a:rPr>
+                        <a:t>4.13</a:t>
+                      </a:r>
+                      <a:endParaRPr lang="de-DE" sz="1000">
+                        <a:effectLst/>
+                        <a:latin typeface="Times New Roman" panose="02020603050405020304" pitchFamily="18" charset="0"/>
+                        <a:ea typeface="Times New Roman" panose="02020603050405020304" pitchFamily="18" charset="0"/>
+                        <a:cs typeface="Times New Roman" panose="02020603050405020304" pitchFamily="18" charset="0"/>
+                      </a:endParaRPr>
+                    </a:p>
+                  </a:txBody>
+                  <a:tcPr marL="68580" marR="68580" marT="0" marB="0">
+                    <a:noFill/>
+                  </a:tcPr>
+                </a:tc>
+                <a:tc>
+                  <a:txBody>
+                    <a:bodyPr/>
+                    <a:lstStyle/>
+                    <a:p>
+                      <a:pPr algn="ctr">
+                        <a:buNone/>
+                      </a:pPr>
+                      <a:r>
+                        <a:rPr lang="es-ES" sz="1000">
+                          <a:effectLst/>
+                          <a:latin typeface="Times New Roman" panose="02020603050405020304" pitchFamily="18" charset="0"/>
+                          <a:ea typeface="Times New Roman" panose="02020603050405020304" pitchFamily="18" charset="0"/>
+                          <a:cs typeface="Times New Roman" panose="02020603050405020304" pitchFamily="18" charset="0"/>
+                        </a:rPr>
+                        <a:t>28.99</a:t>
+                      </a:r>
+                      <a:endParaRPr lang="de-DE" sz="1000">
+                        <a:effectLst/>
+                        <a:latin typeface="Times New Roman" panose="02020603050405020304" pitchFamily="18" charset="0"/>
+                        <a:ea typeface="Times New Roman" panose="02020603050405020304" pitchFamily="18" charset="0"/>
+                        <a:cs typeface="Times New Roman" panose="02020603050405020304" pitchFamily="18" charset="0"/>
+                      </a:endParaRPr>
+                    </a:p>
+                  </a:txBody>
+                  <a:tcPr marL="68580" marR="68580" marT="0" marB="0">
                     <a:noFill/>
                   </a:tcPr>
                 </a:tc>
@@ -21135,109 +21565,139 @@
                         <a:buNone/>
                       </a:pPr>
                       <a:r>
-                        <a:rPr lang="es-ES_tradnl" sz="1000" dirty="0">
-                          <a:effectLst/>
-                          <a:latin typeface="Times New Roman" panose="02020603050405020304" pitchFamily="18" charset="0"/>
-                          <a:ea typeface="Times New Roman" panose="02020603050405020304" pitchFamily="18" charset="0"/>
-                          <a:cs typeface="Times New Roman" panose="02020603050405020304" pitchFamily="18" charset="0"/>
-                        </a:rPr>
-                        <a:t>9.90</a:t>
-                      </a:r>
-                    </a:p>
-                  </a:txBody>
-                  <a:tcPr marL="68580" marR="68580" marT="0" marB="0" anchor="ctr">
-                    <a:noFill/>
-                  </a:tcPr>
-                </a:tc>
-                <a:tc>
-                  <a:txBody>
-                    <a:bodyPr/>
-                    <a:lstStyle/>
-                    <a:p>
-                      <a:pPr algn="ctr">
-                        <a:buNone/>
-                      </a:pPr>
-                      <a:r>
-                        <a:rPr lang="es-ES_tradnl" sz="1000" dirty="0">
-                          <a:effectLst/>
-                          <a:latin typeface="Times New Roman" panose="02020603050405020304" pitchFamily="18" charset="0"/>
-                          <a:ea typeface="Times New Roman" panose="02020603050405020304" pitchFamily="18" charset="0"/>
-                          <a:cs typeface="Times New Roman" panose="02020603050405020304" pitchFamily="18" charset="0"/>
-                        </a:rPr>
-                        <a:t>2.83</a:t>
-                      </a:r>
-                    </a:p>
-                  </a:txBody>
-                  <a:tcPr marL="68580" marR="68580" marT="0" marB="0" anchor="ctr">
-                    <a:noFill/>
-                  </a:tcPr>
-                </a:tc>
-                <a:tc>
-                  <a:txBody>
-                    <a:bodyPr/>
-                    <a:lstStyle/>
-                    <a:p>
-                      <a:pPr algn="ctr">
-                        <a:buNone/>
-                      </a:pPr>
-                      <a:r>
-                        <a:rPr lang="es-ES_tradnl" sz="1000" dirty="0">
-                          <a:effectLst/>
-                          <a:latin typeface="Times New Roman" panose="02020603050405020304" pitchFamily="18" charset="0"/>
-                          <a:ea typeface="Times New Roman" panose="02020603050405020304" pitchFamily="18" charset="0"/>
-                          <a:cs typeface="Times New Roman" panose="02020603050405020304" pitchFamily="18" charset="0"/>
-                        </a:rPr>
-                        <a:t>41.86</a:t>
-                      </a:r>
-                    </a:p>
-                  </a:txBody>
-                  <a:tcPr marL="68580" marR="68580" marT="0" marB="0" anchor="ctr">
-                    <a:noFill/>
-                  </a:tcPr>
-                </a:tc>
-                <a:tc>
-                  <a:txBody>
-                    <a:bodyPr/>
-                    <a:lstStyle/>
-                    <a:p>
-                      <a:pPr algn="ctr">
-                        <a:buNone/>
-                      </a:pPr>
-                      <a:r>
-                        <a:rPr lang="es-ES_tradnl" sz="1000" dirty="0">
-                          <a:effectLst/>
-                          <a:latin typeface="Times New Roman" panose="02020603050405020304" pitchFamily="18" charset="0"/>
-                          <a:ea typeface="Times New Roman" panose="02020603050405020304" pitchFamily="18" charset="0"/>
-                          <a:cs typeface="Times New Roman" panose="02020603050405020304" pitchFamily="18" charset="0"/>
-                        </a:rPr>
-                        <a:t>5.54</a:t>
-                      </a:r>
-                    </a:p>
-                  </a:txBody>
-                  <a:tcPr marL="68580" marR="68580" marT="0" marB="0" anchor="ctr">
-                    <a:noFill/>
-                  </a:tcPr>
-                </a:tc>
-                <a:tc>
-                  <a:txBody>
-                    <a:bodyPr/>
-                    <a:lstStyle/>
-                    <a:p>
-                      <a:pPr algn="ctr">
-                        <a:buNone/>
-                      </a:pPr>
-                      <a:r>
-                        <a:rPr lang="es-ES_tradnl" sz="1000" dirty="0">
-                          <a:effectLst/>
-                          <a:latin typeface="Times New Roman" panose="02020603050405020304" pitchFamily="18" charset="0"/>
-                          <a:ea typeface="Times New Roman" panose="02020603050405020304" pitchFamily="18" charset="0"/>
-                          <a:cs typeface="Times New Roman" panose="02020603050405020304" pitchFamily="18" charset="0"/>
-                        </a:rPr>
-                        <a:t>47.56</a:t>
-                      </a:r>
-                    </a:p>
-                  </a:txBody>
-                  <a:tcPr marL="68580" marR="68580" marT="0" marB="0" anchor="ctr">
+                        <a:rPr lang="es-ES" sz="1000">
+                          <a:effectLst/>
+                          <a:latin typeface="Times New Roman" panose="02020603050405020304" pitchFamily="18" charset="0"/>
+                          <a:ea typeface="Times New Roman" panose="02020603050405020304" pitchFamily="18" charset="0"/>
+                          <a:cs typeface="Times New Roman" panose="02020603050405020304" pitchFamily="18" charset="0"/>
+                        </a:rPr>
+                        <a:t>6.00</a:t>
+                      </a:r>
+                      <a:endParaRPr lang="de-DE" sz="1000">
+                        <a:effectLst/>
+                        <a:latin typeface="Times New Roman" panose="02020603050405020304" pitchFamily="18" charset="0"/>
+                        <a:ea typeface="Times New Roman" panose="02020603050405020304" pitchFamily="18" charset="0"/>
+                        <a:cs typeface="Times New Roman" panose="02020603050405020304" pitchFamily="18" charset="0"/>
+                      </a:endParaRPr>
+                    </a:p>
+                  </a:txBody>
+                  <a:tcPr marL="68580" marR="68580" marT="0" marB="0">
+                    <a:noFill/>
+                  </a:tcPr>
+                </a:tc>
+                <a:tc>
+                  <a:txBody>
+                    <a:bodyPr/>
+                    <a:lstStyle/>
+                    <a:p>
+                      <a:pPr algn="ctr">
+                        <a:buNone/>
+                      </a:pPr>
+                      <a:r>
+                        <a:rPr lang="es-ES" sz="1000">
+                          <a:effectLst/>
+                          <a:latin typeface="Times New Roman" panose="02020603050405020304" pitchFamily="18" charset="0"/>
+                          <a:ea typeface="Times New Roman" panose="02020603050405020304" pitchFamily="18" charset="0"/>
+                          <a:cs typeface="Times New Roman" panose="02020603050405020304" pitchFamily="18" charset="0"/>
+                        </a:rPr>
+                        <a:t>1.98</a:t>
+                      </a:r>
+                      <a:endParaRPr lang="de-DE" sz="1000">
+                        <a:effectLst/>
+                        <a:latin typeface="Times New Roman" panose="02020603050405020304" pitchFamily="18" charset="0"/>
+                        <a:ea typeface="Times New Roman" panose="02020603050405020304" pitchFamily="18" charset="0"/>
+                        <a:cs typeface="Times New Roman" panose="02020603050405020304" pitchFamily="18" charset="0"/>
+                      </a:endParaRPr>
+                    </a:p>
+                  </a:txBody>
+                  <a:tcPr marL="68580" marR="68580" marT="0" marB="0">
+                    <a:noFill/>
+                  </a:tcPr>
+                </a:tc>
+                <a:tc>
+                  <a:txBody>
+                    <a:bodyPr/>
+                    <a:lstStyle/>
+                    <a:p>
+                      <a:pPr algn="ctr">
+                        <a:buNone/>
+                      </a:pPr>
+                      <a:r>
+                        <a:rPr lang="es-ES" sz="1000">
+                          <a:effectLst/>
+                          <a:latin typeface="Times New Roman" panose="02020603050405020304" pitchFamily="18" charset="0"/>
+                          <a:ea typeface="Times New Roman" panose="02020603050405020304" pitchFamily="18" charset="0"/>
+                          <a:cs typeface="Times New Roman" panose="02020603050405020304" pitchFamily="18" charset="0"/>
+                        </a:rPr>
+                        <a:t>20.84</a:t>
+                      </a:r>
+                      <a:endParaRPr lang="de-DE" sz="1000">
+                        <a:effectLst/>
+                        <a:latin typeface="Times New Roman" panose="02020603050405020304" pitchFamily="18" charset="0"/>
+                        <a:ea typeface="Times New Roman" panose="02020603050405020304" pitchFamily="18" charset="0"/>
+                        <a:cs typeface="Times New Roman" panose="02020603050405020304" pitchFamily="18" charset="0"/>
+                      </a:endParaRPr>
+                    </a:p>
+                  </a:txBody>
+                  <a:tcPr marL="68580" marR="68580" marT="0" marB="0">
+                    <a:noFill/>
+                  </a:tcPr>
+                </a:tc>
+                <a:tc>
+                  <a:txBody>
+                    <a:bodyPr/>
+                    <a:lstStyle/>
+                    <a:p>
+                      <a:pPr algn="ctr">
+                        <a:buNone/>
+                      </a:pPr>
+                      <a:r>
+                        <a:rPr lang="es-ES" sz="1000">
+                          <a:effectLst/>
+                          <a:latin typeface="Times New Roman" panose="02020603050405020304" pitchFamily="18" charset="0"/>
+                          <a:ea typeface="Times New Roman" panose="02020603050405020304" pitchFamily="18" charset="0"/>
+                          <a:cs typeface="Times New Roman" panose="02020603050405020304" pitchFamily="18" charset="0"/>
+                        </a:rPr>
+                        <a:t>4.21</a:t>
+                      </a:r>
+                      <a:endParaRPr lang="de-DE" sz="1000">
+                        <a:effectLst/>
+                        <a:latin typeface="Times New Roman" panose="02020603050405020304" pitchFamily="18" charset="0"/>
+                        <a:ea typeface="Times New Roman" panose="02020603050405020304" pitchFamily="18" charset="0"/>
+                        <a:cs typeface="Times New Roman" panose="02020603050405020304" pitchFamily="18" charset="0"/>
+                      </a:endParaRPr>
+                    </a:p>
+                  </a:txBody>
+                  <a:tcPr marL="68580" marR="68580" marT="0" marB="0">
+                    <a:noFill/>
+                  </a:tcPr>
+                </a:tc>
+                <a:tc>
+                  <a:txBody>
+                    <a:bodyPr/>
+                    <a:lstStyle/>
+                    <a:p>
+                      <a:pPr algn="ctr">
+                        <a:buNone/>
+                      </a:pPr>
+                      <a:r>
+                        <a:rPr lang="es-ES" sz="1000" dirty="0">
+                          <a:effectLst/>
+                          <a:latin typeface="Times New Roman" panose="02020603050405020304" pitchFamily="18" charset="0"/>
+                          <a:ea typeface="Times New Roman" panose="02020603050405020304" pitchFamily="18" charset="0"/>
+                          <a:cs typeface="Times New Roman" panose="02020603050405020304" pitchFamily="18" charset="0"/>
+                        </a:rPr>
+                        <a:t>32.20</a:t>
+                      </a:r>
+                      <a:endParaRPr lang="de-DE" sz="1000" dirty="0">
+                        <a:effectLst/>
+                        <a:latin typeface="Times New Roman" panose="02020603050405020304" pitchFamily="18" charset="0"/>
+                        <a:ea typeface="Times New Roman" panose="02020603050405020304" pitchFamily="18" charset="0"/>
+                        <a:cs typeface="Times New Roman" panose="02020603050405020304" pitchFamily="18" charset="0"/>
+                      </a:endParaRPr>
+                    </a:p>
+                  </a:txBody>
+                  <a:tcPr marL="68580" marR="68580" marT="0" marB="0">
                     <a:noFill/>
                   </a:tcPr>
                 </a:tc>
@@ -22433,38 +22893,6 @@
           </a:p>
         </p:txBody>
       </p:sp>
-      <p:pic>
-        <p:nvPicPr>
-          <p:cNvPr id="7" name="Onlinebild-Platzhalter 6">
-            <a:extLst>
-              <a:ext uri="{FF2B5EF4-FFF2-40B4-BE49-F238E27FC236}">
-                <a16:creationId xmlns:a16="http://schemas.microsoft.com/office/drawing/2014/main" id="{A30C8074-772B-70D8-795F-DC00E33EE2E9}"/>
-              </a:ext>
-            </a:extLst>
-          </p:cNvPr>
-          <p:cNvPicPr>
-            <a:picLocks noGrp="1" noChangeAspect="1"/>
-          </p:cNvPicPr>
-          <p:nvPr>
-            <p:ph type="clipArt" sz="quarter" idx="15"/>
-          </p:nvPr>
-        </p:nvPicPr>
-        <p:blipFill>
-          <a:blip r:embed="rId2"/>
-          <a:stretch>
-            <a:fillRect/>
-          </a:stretch>
-        </p:blipFill>
-        <p:spPr>
-          <a:xfrm>
-            <a:off x="520700" y="2406756"/>
-            <a:ext cx="5365750" cy="3497050"/>
-          </a:xfrm>
-          <a:prstGeom prst="rect">
-            <a:avLst/>
-          </a:prstGeom>
-        </p:spPr>
-      </p:pic>
       <p:sp>
         <p:nvSpPr>
           <p:cNvPr id="2" name="Fußzeilenplatzhalter 2">
@@ -22594,6 +23022,38 @@
           </a:p>
         </p:txBody>
       </p:sp>
+      <p:pic>
+        <p:nvPicPr>
+          <p:cNvPr id="8" name="Onlinebild-Platzhalter 7">
+            <a:extLst>
+              <a:ext uri="{FF2B5EF4-FFF2-40B4-BE49-F238E27FC236}">
+                <a16:creationId xmlns:a16="http://schemas.microsoft.com/office/drawing/2014/main" id="{E87A3430-2C72-5014-6F4C-D7C974A87247}"/>
+              </a:ext>
+            </a:extLst>
+          </p:cNvPr>
+          <p:cNvPicPr>
+            <a:picLocks noGrp="1" noChangeAspect="1"/>
+          </p:cNvPicPr>
+          <p:nvPr>
+            <p:ph type="clipArt" sz="quarter" idx="15"/>
+          </p:nvPr>
+        </p:nvPicPr>
+        <p:blipFill>
+          <a:blip r:embed="rId2"/>
+          <a:stretch>
+            <a:fillRect/>
+          </a:stretch>
+        </p:blipFill>
+        <p:spPr>
+          <a:xfrm>
+            <a:off x="815491" y="2151063"/>
+            <a:ext cx="4776167" cy="4008437"/>
+          </a:xfrm>
+          <a:prstGeom prst="rect">
+            <a:avLst/>
+          </a:prstGeom>
+        </p:spPr>
+      </p:pic>
     </p:spTree>
     <p:extLst>
       <p:ext uri="{BB962C8B-B14F-4D97-AF65-F5344CB8AC3E}">
@@ -22684,14 +23144,14 @@
             <p:ph sz="quarter" idx="14"/>
             <p:extLst>
               <p:ext uri="{D42A27DB-BD31-4B8C-83A1-F6EECF244321}">
-                <p14:modId xmlns:p14="http://schemas.microsoft.com/office/powerpoint/2010/main" val="2579283873"/>
+                <p14:modId xmlns:p14="http://schemas.microsoft.com/office/powerpoint/2010/main" val="674842345"/>
               </p:ext>
             </p:extLst>
           </p:nvPr>
         </p:nvGraphicFramePr>
         <p:xfrm>
           <a:off x="610072" y="4750853"/>
-          <a:ext cx="10971856" cy="1559560"/>
+          <a:ext cx="10971856" cy="1210945"/>
         </p:xfrm>
         <a:graphic>
           <a:graphicData uri="http://schemas.openxmlformats.org/drawingml/2006/table">
@@ -23714,7 +24174,7 @@
                         <a:buNone/>
                       </a:pPr>
                       <a:r>
-                        <a:rPr lang="es-ES_tradnl" sz="1000" dirty="0">
+                        <a:rPr lang="es-ES_tradnl" sz="900" dirty="0">
                           <a:effectLst/>
                           <a:latin typeface="Times New Roman" panose="02020603050405020304" pitchFamily="18" charset="0"/>
                           <a:ea typeface="Times New Roman" panose="02020603050405020304" pitchFamily="18" charset="0"/>
@@ -23746,7 +24206,7 @@
                         <a:buNone/>
                       </a:pPr>
                       <a:r>
-                        <a:rPr lang="es-ES_tradnl" sz="1000" dirty="0">
+                        <a:rPr lang="es-ES_tradnl" sz="900" dirty="0">
                           <a:effectLst/>
                           <a:latin typeface="Times New Roman" panose="02020603050405020304" pitchFamily="18" charset="0"/>
                           <a:ea typeface="Times New Roman" panose="02020603050405020304" pitchFamily="18" charset="0"/>
@@ -23778,7 +24238,7 @@
                         <a:buNone/>
                       </a:pPr>
                       <a:r>
-                        <a:rPr lang="es-ES_tradnl" sz="1000" dirty="0">
+                        <a:rPr lang="es-ES_tradnl" sz="900" dirty="0">
                           <a:effectLst/>
                           <a:latin typeface="Times New Roman" panose="02020603050405020304" pitchFamily="18" charset="0"/>
                           <a:ea typeface="Times New Roman" panose="02020603050405020304" pitchFamily="18" charset="0"/>
@@ -23810,7 +24270,7 @@
                         <a:buNone/>
                       </a:pPr>
                       <a:r>
-                        <a:rPr lang="es-ES_tradnl" sz="1000" dirty="0">
+                        <a:rPr lang="es-ES_tradnl" sz="900" dirty="0">
                           <a:effectLst/>
                           <a:latin typeface="Times New Roman" panose="02020603050405020304" pitchFamily="18" charset="0"/>
                           <a:ea typeface="Times New Roman" panose="02020603050405020304" pitchFamily="18" charset="0"/>
@@ -23842,7 +24302,7 @@
                         <a:buNone/>
                       </a:pPr>
                       <a:r>
-                        <a:rPr lang="es-ES_tradnl" sz="1000" dirty="0">
+                        <a:rPr lang="es-ES_tradnl" sz="900" dirty="0">
                           <a:effectLst/>
                           <a:latin typeface="Times New Roman" panose="02020603050405020304" pitchFamily="18" charset="0"/>
                           <a:ea typeface="Times New Roman" panose="02020603050405020304" pitchFamily="18" charset="0"/>
@@ -23874,7 +24334,7 @@
                         <a:buNone/>
                       </a:pPr>
                       <a:r>
-                        <a:rPr lang="es-ES_tradnl" sz="1000" dirty="0">
+                        <a:rPr lang="es-ES_tradnl" sz="900" dirty="0">
                           <a:effectLst/>
                           <a:latin typeface="Times New Roman" panose="02020603050405020304" pitchFamily="18" charset="0"/>
                           <a:ea typeface="Times New Roman" panose="02020603050405020304" pitchFamily="18" charset="0"/>
@@ -23906,7 +24366,7 @@
                         <a:buNone/>
                       </a:pPr>
                       <a:r>
-                        <a:rPr lang="es-ES_tradnl" sz="1000" dirty="0">
+                        <a:rPr lang="es-ES_tradnl" sz="900" dirty="0">
                           <a:effectLst/>
                           <a:latin typeface="Times New Roman" panose="02020603050405020304" pitchFamily="18" charset="0"/>
                           <a:ea typeface="Times New Roman" panose="02020603050405020304" pitchFamily="18" charset="0"/>
@@ -23938,7 +24398,7 @@
                         <a:buNone/>
                       </a:pPr>
                       <a:r>
-                        <a:rPr lang="es-ES_tradnl" sz="1000" dirty="0">
+                        <a:rPr lang="es-ES_tradnl" sz="900" dirty="0">
                           <a:effectLst/>
                           <a:latin typeface="Times New Roman" panose="02020603050405020304" pitchFamily="18" charset="0"/>
                           <a:ea typeface="Times New Roman" panose="02020603050405020304" pitchFamily="18" charset="0"/>
@@ -23970,7 +24430,7 @@
                         <a:buNone/>
                       </a:pPr>
                       <a:r>
-                        <a:rPr lang="es-ES_tradnl" sz="1000" dirty="0">
+                        <a:rPr lang="es-ES_tradnl" sz="900" dirty="0">
                           <a:effectLst/>
                           <a:latin typeface="Times New Roman" panose="02020603050405020304" pitchFamily="18" charset="0"/>
                           <a:ea typeface="Times New Roman" panose="02020603050405020304" pitchFamily="18" charset="0"/>
@@ -24002,7 +24462,7 @@
                         <a:buNone/>
                       </a:pPr>
                       <a:r>
-                        <a:rPr lang="es-ES_tradnl" sz="1000" dirty="0">
+                        <a:rPr lang="es-ES_tradnl" sz="900" dirty="0">
                           <a:effectLst/>
                           <a:latin typeface="Times New Roman" panose="02020603050405020304" pitchFamily="18" charset="0"/>
                           <a:ea typeface="Times New Roman" panose="02020603050405020304" pitchFamily="18" charset="0"/>
@@ -24034,17 +24494,23 @@
                         <a:buNone/>
                       </a:pPr>
                       <a:r>
-                        <a:rPr lang="es-ES_tradnl" sz="1000" dirty="0">
-                          <a:effectLst/>
-                          <a:latin typeface="Times New Roman" panose="02020603050405020304" pitchFamily="18" charset="0"/>
-                          <a:ea typeface="Times New Roman" panose="02020603050405020304" pitchFamily="18" charset="0"/>
-                          <a:cs typeface="Times New Roman" panose="02020603050405020304" pitchFamily="18" charset="0"/>
-                        </a:rPr>
-                        <a:t>9.76</a:t>
-                      </a:r>
-                    </a:p>
-                  </a:txBody>
-                  <a:tcPr marL="68580" marR="68580" marT="0" marB="0" anchor="ctr">
+                        <a:rPr lang="es-ES" sz="900">
+                          <a:effectLst/>
+                          <a:latin typeface="Times New Roman" panose="02020603050405020304" pitchFamily="18" charset="0"/>
+                          <a:ea typeface="Times New Roman" panose="02020603050405020304" pitchFamily="18" charset="0"/>
+                          <a:cs typeface="Times New Roman" panose="02020603050405020304" pitchFamily="18" charset="0"/>
+                        </a:rPr>
+                        <a:t>6.00</a:t>
+                      </a:r>
+                      <a:endParaRPr lang="de-DE" sz="900">
+                        <a:effectLst/>
+                        <a:latin typeface="Times New Roman" panose="02020603050405020304" pitchFamily="18" charset="0"/>
+                        <a:ea typeface="Times New Roman" panose="02020603050405020304" pitchFamily="18" charset="0"/>
+                        <a:cs typeface="Times New Roman" panose="02020603050405020304" pitchFamily="18" charset="0"/>
+                      </a:endParaRPr>
+                    </a:p>
+                  </a:txBody>
+                  <a:tcPr marL="68580" marR="68580" marT="0" marB="0">
                     <a:lnT w="12700" cap="flat" cmpd="sng" algn="ctr">
                       <a:solidFill>
                         <a:schemeClr val="tx1"/>
@@ -24066,17 +24532,23 @@
                         <a:buNone/>
                       </a:pPr>
                       <a:r>
-                        <a:rPr lang="es-ES_tradnl" sz="1000" dirty="0">
-                          <a:effectLst/>
-                          <a:latin typeface="Times New Roman" panose="02020603050405020304" pitchFamily="18" charset="0"/>
-                          <a:ea typeface="Times New Roman" panose="02020603050405020304" pitchFamily="18" charset="0"/>
-                          <a:cs typeface="Times New Roman" panose="02020603050405020304" pitchFamily="18" charset="0"/>
-                        </a:rPr>
-                        <a:t>1.88</a:t>
-                      </a:r>
-                    </a:p>
-                  </a:txBody>
-                  <a:tcPr marL="68580" marR="68580" marT="0" marB="0" anchor="ctr">
+                        <a:rPr lang="es-ES" sz="900">
+                          <a:effectLst/>
+                          <a:latin typeface="Times New Roman" panose="02020603050405020304" pitchFamily="18" charset="0"/>
+                          <a:ea typeface="Times New Roman" panose="02020603050405020304" pitchFamily="18" charset="0"/>
+                          <a:cs typeface="Times New Roman" panose="02020603050405020304" pitchFamily="18" charset="0"/>
+                        </a:rPr>
+                        <a:t>1.56</a:t>
+                      </a:r>
+                      <a:endParaRPr lang="de-DE" sz="900">
+                        <a:effectLst/>
+                        <a:latin typeface="Times New Roman" panose="02020603050405020304" pitchFamily="18" charset="0"/>
+                        <a:ea typeface="Times New Roman" panose="02020603050405020304" pitchFamily="18" charset="0"/>
+                        <a:cs typeface="Times New Roman" panose="02020603050405020304" pitchFamily="18" charset="0"/>
+                      </a:endParaRPr>
+                    </a:p>
+                  </a:txBody>
+                  <a:tcPr marL="68580" marR="68580" marT="0" marB="0">
                     <a:lnT w="12700" cap="flat" cmpd="sng" algn="ctr">
                       <a:solidFill>
                         <a:schemeClr val="tx1"/>
@@ -24098,17 +24570,23 @@
                         <a:buNone/>
                       </a:pPr>
                       <a:r>
-                        <a:rPr lang="es-ES_tradnl" sz="1000" dirty="0">
-                          <a:effectLst/>
-                          <a:latin typeface="Times New Roman" panose="02020603050405020304" pitchFamily="18" charset="0"/>
-                          <a:ea typeface="Times New Roman" panose="02020603050405020304" pitchFamily="18" charset="0"/>
-                          <a:cs typeface="Times New Roman" panose="02020603050405020304" pitchFamily="18" charset="0"/>
-                        </a:rPr>
-                        <a:t>16.20</a:t>
-                      </a:r>
-                    </a:p>
-                  </a:txBody>
-                  <a:tcPr marL="68580" marR="68580" marT="0" marB="0" anchor="ctr">
+                        <a:rPr lang="es-ES" sz="900">
+                          <a:effectLst/>
+                          <a:latin typeface="Times New Roman" panose="02020603050405020304" pitchFamily="18" charset="0"/>
+                          <a:ea typeface="Times New Roman" panose="02020603050405020304" pitchFamily="18" charset="0"/>
+                          <a:cs typeface="Times New Roman" panose="02020603050405020304" pitchFamily="18" charset="0"/>
+                        </a:rPr>
+                        <a:t>12.05</a:t>
+                      </a:r>
+                      <a:endParaRPr lang="de-DE" sz="900">
+                        <a:effectLst/>
+                        <a:latin typeface="Times New Roman" panose="02020603050405020304" pitchFamily="18" charset="0"/>
+                        <a:ea typeface="Times New Roman" panose="02020603050405020304" pitchFamily="18" charset="0"/>
+                        <a:cs typeface="Times New Roman" panose="02020603050405020304" pitchFamily="18" charset="0"/>
+                      </a:endParaRPr>
+                    </a:p>
+                  </a:txBody>
+                  <a:tcPr marL="68580" marR="68580" marT="0" marB="0">
                     <a:lnT w="12700" cap="flat" cmpd="sng" algn="ctr">
                       <a:solidFill>
                         <a:schemeClr val="tx1"/>
@@ -24130,17 +24608,23 @@
                         <a:buNone/>
                       </a:pPr>
                       <a:r>
-                        <a:rPr lang="es-ES_tradnl" sz="1000" dirty="0">
-                          <a:effectLst/>
-                          <a:latin typeface="Times New Roman" panose="02020603050405020304" pitchFamily="18" charset="0"/>
-                          <a:ea typeface="Times New Roman" panose="02020603050405020304" pitchFamily="18" charset="0"/>
-                          <a:cs typeface="Times New Roman" panose="02020603050405020304" pitchFamily="18" charset="0"/>
-                        </a:rPr>
-                        <a:t>2.83</a:t>
-                      </a:r>
-                    </a:p>
-                  </a:txBody>
-                  <a:tcPr marL="68580" marR="68580" marT="0" marB="0" anchor="ctr">
+                        <a:rPr lang="es-ES" sz="900">
+                          <a:effectLst/>
+                          <a:latin typeface="Times New Roman" panose="02020603050405020304" pitchFamily="18" charset="0"/>
+                          <a:ea typeface="Times New Roman" panose="02020603050405020304" pitchFamily="18" charset="0"/>
+                          <a:cs typeface="Times New Roman" panose="02020603050405020304" pitchFamily="18" charset="0"/>
+                        </a:rPr>
+                        <a:t>2.89</a:t>
+                      </a:r>
+                      <a:endParaRPr lang="de-DE" sz="900">
+                        <a:effectLst/>
+                        <a:latin typeface="Times New Roman" panose="02020603050405020304" pitchFamily="18" charset="0"/>
+                        <a:ea typeface="Times New Roman" panose="02020603050405020304" pitchFamily="18" charset="0"/>
+                        <a:cs typeface="Times New Roman" panose="02020603050405020304" pitchFamily="18" charset="0"/>
+                      </a:endParaRPr>
+                    </a:p>
+                  </a:txBody>
+                  <a:tcPr marL="68580" marR="68580" marT="0" marB="0">
                     <a:lnT w="12700" cap="flat" cmpd="sng" algn="ctr">
                       <a:solidFill>
                         <a:schemeClr val="tx1"/>
@@ -24162,17 +24646,23 @@
                         <a:buNone/>
                       </a:pPr>
                       <a:r>
-                        <a:rPr lang="es-ES_tradnl" sz="1000" dirty="0">
-                          <a:effectLst/>
-                          <a:latin typeface="Times New Roman" panose="02020603050405020304" pitchFamily="18" charset="0"/>
-                          <a:ea typeface="Times New Roman" panose="02020603050405020304" pitchFamily="18" charset="0"/>
-                          <a:cs typeface="Times New Roman" panose="02020603050405020304" pitchFamily="18" charset="0"/>
-                        </a:rPr>
-                        <a:t>51.58</a:t>
-                      </a:r>
-                    </a:p>
-                  </a:txBody>
-                  <a:tcPr marL="68580" marR="68580" marT="0" marB="0" anchor="ctr">
+                        <a:rPr lang="es-ES" sz="900">
+                          <a:effectLst/>
+                          <a:latin typeface="Times New Roman" panose="02020603050405020304" pitchFamily="18" charset="0"/>
+                          <a:ea typeface="Times New Roman" panose="02020603050405020304" pitchFamily="18" charset="0"/>
+                          <a:cs typeface="Times New Roman" panose="02020603050405020304" pitchFamily="18" charset="0"/>
+                        </a:rPr>
+                        <a:t>28.29</a:t>
+                      </a:r>
+                      <a:endParaRPr lang="de-DE" sz="900">
+                        <a:effectLst/>
+                        <a:latin typeface="Times New Roman" panose="02020603050405020304" pitchFamily="18" charset="0"/>
+                        <a:ea typeface="Times New Roman" panose="02020603050405020304" pitchFamily="18" charset="0"/>
+                        <a:cs typeface="Times New Roman" panose="02020603050405020304" pitchFamily="18" charset="0"/>
+                      </a:endParaRPr>
+                    </a:p>
+                  </a:txBody>
+                  <a:tcPr marL="68580" marR="68580" marT="0" marB="0">
                     <a:lnT w="12700" cap="flat" cmpd="sng" algn="ctr">
                       <a:solidFill>
                         <a:schemeClr val="tx1"/>
@@ -24227,7 +24717,7 @@
                         <a:buNone/>
                       </a:pPr>
                       <a:r>
-                        <a:rPr lang="es-ES_tradnl" sz="1000" dirty="0">
+                        <a:rPr lang="es-ES_tradnl" sz="900" dirty="0">
                           <a:effectLst/>
                           <a:latin typeface="Times New Roman" panose="02020603050405020304" pitchFamily="18" charset="0"/>
                           <a:ea typeface="Times New Roman" panose="02020603050405020304" pitchFamily="18" charset="0"/>
@@ -24250,7 +24740,7 @@
                         <a:buNone/>
                       </a:pPr>
                       <a:r>
-                        <a:rPr lang="es-ES_tradnl" sz="1000" dirty="0">
+                        <a:rPr lang="es-ES_tradnl" sz="900" dirty="0">
                           <a:effectLst/>
                           <a:latin typeface="Times New Roman" panose="02020603050405020304" pitchFamily="18" charset="0"/>
                           <a:ea typeface="Times New Roman" panose="02020603050405020304" pitchFamily="18" charset="0"/>
@@ -24273,7 +24763,7 @@
                         <a:buNone/>
                       </a:pPr>
                       <a:r>
-                        <a:rPr lang="es-ES_tradnl" sz="1000" dirty="0">
+                        <a:rPr lang="es-ES_tradnl" sz="900" dirty="0">
                           <a:effectLst/>
                           <a:latin typeface="Times New Roman" panose="02020603050405020304" pitchFamily="18" charset="0"/>
                           <a:ea typeface="Times New Roman" panose="02020603050405020304" pitchFamily="18" charset="0"/>
@@ -24296,7 +24786,7 @@
                         <a:buNone/>
                       </a:pPr>
                       <a:r>
-                        <a:rPr lang="es-ES_tradnl" sz="1000" dirty="0">
+                        <a:rPr lang="es-ES_tradnl" sz="900" dirty="0">
                           <a:effectLst/>
                           <a:latin typeface="Times New Roman" panose="02020603050405020304" pitchFamily="18" charset="0"/>
                           <a:ea typeface="Times New Roman" panose="02020603050405020304" pitchFamily="18" charset="0"/>
@@ -24319,7 +24809,7 @@
                         <a:buNone/>
                       </a:pPr>
                       <a:r>
-                        <a:rPr lang="es-ES_tradnl" sz="1000" dirty="0">
+                        <a:rPr lang="es-ES_tradnl" sz="900" dirty="0">
                           <a:effectLst/>
                           <a:latin typeface="Times New Roman" panose="02020603050405020304" pitchFamily="18" charset="0"/>
                           <a:ea typeface="Times New Roman" panose="02020603050405020304" pitchFamily="18" charset="0"/>
@@ -24342,7 +24832,7 @@
                         <a:buNone/>
                       </a:pPr>
                       <a:r>
-                        <a:rPr lang="es-ES_tradnl" sz="1000" dirty="0">
+                        <a:rPr lang="es-ES_tradnl" sz="900" dirty="0">
                           <a:effectLst/>
                           <a:latin typeface="Times New Roman" panose="02020603050405020304" pitchFamily="18" charset="0"/>
                           <a:ea typeface="Times New Roman" panose="02020603050405020304" pitchFamily="18" charset="0"/>
@@ -24365,7 +24855,7 @@
                         <a:buNone/>
                       </a:pPr>
                       <a:r>
-                        <a:rPr lang="es-ES_tradnl" sz="1000" dirty="0">
+                        <a:rPr lang="es-ES_tradnl" sz="900" dirty="0">
                           <a:effectLst/>
                           <a:latin typeface="Times New Roman" panose="02020603050405020304" pitchFamily="18" charset="0"/>
                           <a:ea typeface="Times New Roman" panose="02020603050405020304" pitchFamily="18" charset="0"/>
@@ -24388,7 +24878,7 @@
                         <a:buNone/>
                       </a:pPr>
                       <a:r>
-                        <a:rPr lang="es-ES_tradnl" sz="1000" dirty="0">
+                        <a:rPr lang="es-ES_tradnl" sz="900" dirty="0">
                           <a:effectLst/>
                           <a:latin typeface="Times New Roman" panose="02020603050405020304" pitchFamily="18" charset="0"/>
                           <a:ea typeface="Times New Roman" panose="02020603050405020304" pitchFamily="18" charset="0"/>
@@ -24411,7 +24901,7 @@
                         <a:buNone/>
                       </a:pPr>
                       <a:r>
-                        <a:rPr lang="es-ES_tradnl" sz="1000" dirty="0">
+                        <a:rPr lang="es-ES_tradnl" sz="900" dirty="0">
                           <a:effectLst/>
                           <a:latin typeface="Times New Roman" panose="02020603050405020304" pitchFamily="18" charset="0"/>
                           <a:ea typeface="Times New Roman" panose="02020603050405020304" pitchFamily="18" charset="0"/>
@@ -24434,7 +24924,7 @@
                         <a:buNone/>
                       </a:pPr>
                       <a:r>
-                        <a:rPr lang="es-ES_tradnl" sz="1000" dirty="0">
+                        <a:rPr lang="es-ES_tradnl" sz="900" dirty="0">
                           <a:effectLst/>
                           <a:latin typeface="Times New Roman" panose="02020603050405020304" pitchFamily="18" charset="0"/>
                           <a:ea typeface="Times New Roman" panose="02020603050405020304" pitchFamily="18" charset="0"/>
@@ -24457,109 +24947,139 @@
                         <a:buNone/>
                       </a:pPr>
                       <a:r>
-                        <a:rPr lang="es-ES_tradnl" sz="1000" dirty="0">
-                          <a:effectLst/>
-                          <a:latin typeface="Times New Roman" panose="02020603050405020304" pitchFamily="18" charset="0"/>
-                          <a:ea typeface="Times New Roman" panose="02020603050405020304" pitchFamily="18" charset="0"/>
-                          <a:cs typeface="Times New Roman" panose="02020603050405020304" pitchFamily="18" charset="0"/>
-                        </a:rPr>
-                        <a:t>9.90</a:t>
-                      </a:r>
-                    </a:p>
-                  </a:txBody>
-                  <a:tcPr marL="68580" marR="68580" marT="0" marB="0" anchor="ctr">
-                    <a:noFill/>
-                  </a:tcPr>
-                </a:tc>
-                <a:tc>
-                  <a:txBody>
-                    <a:bodyPr/>
-                    <a:lstStyle/>
-                    <a:p>
-                      <a:pPr algn="ctr">
-                        <a:buNone/>
-                      </a:pPr>
-                      <a:r>
-                        <a:rPr lang="es-ES_tradnl" sz="1000" dirty="0">
-                          <a:effectLst/>
-                          <a:latin typeface="Times New Roman" panose="02020603050405020304" pitchFamily="18" charset="0"/>
-                          <a:ea typeface="Times New Roman" panose="02020603050405020304" pitchFamily="18" charset="0"/>
-                          <a:cs typeface="Times New Roman" panose="02020603050405020304" pitchFamily="18" charset="0"/>
-                        </a:rPr>
-                        <a:t>2.63</a:t>
-                      </a:r>
-                    </a:p>
-                  </a:txBody>
-                  <a:tcPr marL="68580" marR="68580" marT="0" marB="0" anchor="ctr">
-                    <a:noFill/>
-                  </a:tcPr>
-                </a:tc>
-                <a:tc>
-                  <a:txBody>
-                    <a:bodyPr/>
-                    <a:lstStyle/>
-                    <a:p>
-                      <a:pPr algn="ctr">
-                        <a:buNone/>
-                      </a:pPr>
-                      <a:r>
-                        <a:rPr lang="es-ES_tradnl" sz="1000" dirty="0">
-                          <a:effectLst/>
-                          <a:latin typeface="Times New Roman" panose="02020603050405020304" pitchFamily="18" charset="0"/>
-                          <a:ea typeface="Times New Roman" panose="02020603050405020304" pitchFamily="18" charset="0"/>
-                          <a:cs typeface="Times New Roman" panose="02020603050405020304" pitchFamily="18" charset="0"/>
-                        </a:rPr>
-                        <a:t>35.17</a:t>
-                      </a:r>
-                    </a:p>
-                  </a:txBody>
-                  <a:tcPr marL="68580" marR="68580" marT="0" marB="0" anchor="ctr">
-                    <a:noFill/>
-                  </a:tcPr>
-                </a:tc>
-                <a:tc>
-                  <a:txBody>
-                    <a:bodyPr/>
-                    <a:lstStyle/>
-                    <a:p>
-                      <a:pPr algn="ctr">
-                        <a:buNone/>
-                      </a:pPr>
-                      <a:r>
-                        <a:rPr lang="es-ES_tradnl" sz="1000" dirty="0">
-                          <a:effectLst/>
-                          <a:latin typeface="Times New Roman" panose="02020603050405020304" pitchFamily="18" charset="0"/>
-                          <a:ea typeface="Times New Roman" panose="02020603050405020304" pitchFamily="18" charset="0"/>
-                          <a:cs typeface="Times New Roman" panose="02020603050405020304" pitchFamily="18" charset="0"/>
-                        </a:rPr>
-                        <a:t>4.98</a:t>
-                      </a:r>
-                    </a:p>
-                  </a:txBody>
-                  <a:tcPr marL="68580" marR="68580" marT="0" marB="0" anchor="ctr">
-                    <a:noFill/>
-                  </a:tcPr>
-                </a:tc>
-                <a:tc>
-                  <a:txBody>
-                    <a:bodyPr/>
-                    <a:lstStyle/>
-                    <a:p>
-                      <a:pPr algn="ctr">
-                        <a:buNone/>
-                      </a:pPr>
-                      <a:r>
-                        <a:rPr lang="es-ES_tradnl" sz="1000" dirty="0">
-                          <a:effectLst/>
-                          <a:latin typeface="Times New Roman" panose="02020603050405020304" pitchFamily="18" charset="0"/>
-                          <a:ea typeface="Times New Roman" panose="02020603050405020304" pitchFamily="18" charset="0"/>
-                          <a:cs typeface="Times New Roman" panose="02020603050405020304" pitchFamily="18" charset="0"/>
-                        </a:rPr>
-                        <a:t>40.63</a:t>
-                      </a:r>
-                    </a:p>
-                  </a:txBody>
-                  <a:tcPr marL="68580" marR="68580" marT="0" marB="0" anchor="ctr">
+                        <a:rPr lang="es-ES" sz="900">
+                          <a:effectLst/>
+                          <a:latin typeface="Times New Roman" panose="02020603050405020304" pitchFamily="18" charset="0"/>
+                          <a:ea typeface="Times New Roman" panose="02020603050405020304" pitchFamily="18" charset="0"/>
+                          <a:cs typeface="Times New Roman" panose="02020603050405020304" pitchFamily="18" charset="0"/>
+                        </a:rPr>
+                        <a:t>6.00</a:t>
+                      </a:r>
+                      <a:endParaRPr lang="de-DE" sz="900">
+                        <a:effectLst/>
+                        <a:latin typeface="Times New Roman" panose="02020603050405020304" pitchFamily="18" charset="0"/>
+                        <a:ea typeface="Times New Roman" panose="02020603050405020304" pitchFamily="18" charset="0"/>
+                        <a:cs typeface="Times New Roman" panose="02020603050405020304" pitchFamily="18" charset="0"/>
+                      </a:endParaRPr>
+                    </a:p>
+                  </a:txBody>
+                  <a:tcPr marL="68580" marR="68580" marT="0" marB="0">
+                    <a:noFill/>
+                  </a:tcPr>
+                </a:tc>
+                <a:tc>
+                  <a:txBody>
+                    <a:bodyPr/>
+                    <a:lstStyle/>
+                    <a:p>
+                      <a:pPr algn="ctr">
+                        <a:buNone/>
+                      </a:pPr>
+                      <a:r>
+                        <a:rPr lang="es-ES" sz="900">
+                          <a:effectLst/>
+                          <a:latin typeface="Times New Roman" panose="02020603050405020304" pitchFamily="18" charset="0"/>
+                          <a:ea typeface="Times New Roman" panose="02020603050405020304" pitchFamily="18" charset="0"/>
+                          <a:cs typeface="Times New Roman" panose="02020603050405020304" pitchFamily="18" charset="0"/>
+                        </a:rPr>
+                        <a:t>1.90</a:t>
+                      </a:r>
+                      <a:endParaRPr lang="de-DE" sz="900">
+                        <a:effectLst/>
+                        <a:latin typeface="Times New Roman" panose="02020603050405020304" pitchFamily="18" charset="0"/>
+                        <a:ea typeface="Times New Roman" panose="02020603050405020304" pitchFamily="18" charset="0"/>
+                        <a:cs typeface="Times New Roman" panose="02020603050405020304" pitchFamily="18" charset="0"/>
+                      </a:endParaRPr>
+                    </a:p>
+                  </a:txBody>
+                  <a:tcPr marL="68580" marR="68580" marT="0" marB="0">
+                    <a:noFill/>
+                  </a:tcPr>
+                </a:tc>
+                <a:tc>
+                  <a:txBody>
+                    <a:bodyPr/>
+                    <a:lstStyle/>
+                    <a:p>
+                      <a:pPr algn="ctr">
+                        <a:buNone/>
+                      </a:pPr>
+                      <a:r>
+                        <a:rPr lang="es-ES" sz="900">
+                          <a:effectLst/>
+                          <a:latin typeface="Times New Roman" panose="02020603050405020304" pitchFamily="18" charset="0"/>
+                          <a:ea typeface="Times New Roman" panose="02020603050405020304" pitchFamily="18" charset="0"/>
+                          <a:cs typeface="Times New Roman" panose="02020603050405020304" pitchFamily="18" charset="0"/>
+                        </a:rPr>
+                        <a:t>18.86</a:t>
+                      </a:r>
+                      <a:endParaRPr lang="de-DE" sz="900">
+                        <a:effectLst/>
+                        <a:latin typeface="Times New Roman" panose="02020603050405020304" pitchFamily="18" charset="0"/>
+                        <a:ea typeface="Times New Roman" panose="02020603050405020304" pitchFamily="18" charset="0"/>
+                        <a:cs typeface="Times New Roman" panose="02020603050405020304" pitchFamily="18" charset="0"/>
+                      </a:endParaRPr>
+                    </a:p>
+                  </a:txBody>
+                  <a:tcPr marL="68580" marR="68580" marT="0" marB="0">
+                    <a:noFill/>
+                  </a:tcPr>
+                </a:tc>
+                <a:tc>
+                  <a:txBody>
+                    <a:bodyPr/>
+                    <a:lstStyle/>
+                    <a:p>
+                      <a:pPr algn="ctr">
+                        <a:buNone/>
+                      </a:pPr>
+                      <a:r>
+                        <a:rPr lang="es-ES" sz="900">
+                          <a:effectLst/>
+                          <a:latin typeface="Times New Roman" panose="02020603050405020304" pitchFamily="18" charset="0"/>
+                          <a:ea typeface="Times New Roman" panose="02020603050405020304" pitchFamily="18" charset="0"/>
+                          <a:cs typeface="Times New Roman" panose="02020603050405020304" pitchFamily="18" charset="0"/>
+                        </a:rPr>
+                        <a:t>3.90</a:t>
+                      </a:r>
+                      <a:endParaRPr lang="de-DE" sz="900">
+                        <a:effectLst/>
+                        <a:latin typeface="Times New Roman" panose="02020603050405020304" pitchFamily="18" charset="0"/>
+                        <a:ea typeface="Times New Roman" panose="02020603050405020304" pitchFamily="18" charset="0"/>
+                        <a:cs typeface="Times New Roman" panose="02020603050405020304" pitchFamily="18" charset="0"/>
+                      </a:endParaRPr>
+                    </a:p>
+                  </a:txBody>
+                  <a:tcPr marL="68580" marR="68580" marT="0" marB="0">
+                    <a:noFill/>
+                  </a:tcPr>
+                </a:tc>
+                <a:tc>
+                  <a:txBody>
+                    <a:bodyPr/>
+                    <a:lstStyle/>
+                    <a:p>
+                      <a:pPr algn="ctr">
+                        <a:buNone/>
+                      </a:pPr>
+                      <a:r>
+                        <a:rPr lang="es-ES" sz="900">
+                          <a:effectLst/>
+                          <a:latin typeface="Times New Roman" panose="02020603050405020304" pitchFamily="18" charset="0"/>
+                          <a:ea typeface="Times New Roman" panose="02020603050405020304" pitchFamily="18" charset="0"/>
+                          <a:cs typeface="Times New Roman" panose="02020603050405020304" pitchFamily="18" charset="0"/>
+                        </a:rPr>
+                        <a:t>27.31</a:t>
+                      </a:r>
+                      <a:endParaRPr lang="de-DE" sz="900">
+                        <a:effectLst/>
+                        <a:latin typeface="Times New Roman" panose="02020603050405020304" pitchFamily="18" charset="0"/>
+                        <a:ea typeface="Times New Roman" panose="02020603050405020304" pitchFamily="18" charset="0"/>
+                        <a:cs typeface="Times New Roman" panose="02020603050405020304" pitchFamily="18" charset="0"/>
+                      </a:endParaRPr>
+                    </a:p>
+                  </a:txBody>
+                  <a:tcPr marL="68580" marR="68580" marT="0" marB="0">
                     <a:noFill/>
                   </a:tcPr>
                 </a:tc>
@@ -24605,7 +25125,7 @@
                         <a:buNone/>
                       </a:pPr>
                       <a:r>
-                        <a:rPr lang="es-ES_tradnl" sz="1000" dirty="0">
+                        <a:rPr lang="es-ES_tradnl" sz="900" dirty="0">
                           <a:effectLst/>
                           <a:latin typeface="Times New Roman" panose="02020603050405020304" pitchFamily="18" charset="0"/>
                           <a:ea typeface="Times New Roman" panose="02020603050405020304" pitchFamily="18" charset="0"/>
@@ -24628,7 +25148,7 @@
                         <a:buNone/>
                       </a:pPr>
                       <a:r>
-                        <a:rPr lang="es-ES_tradnl" sz="1000" dirty="0">
+                        <a:rPr lang="es-ES_tradnl" sz="900" dirty="0">
                           <a:effectLst/>
                           <a:latin typeface="Times New Roman" panose="02020603050405020304" pitchFamily="18" charset="0"/>
                           <a:ea typeface="Times New Roman" panose="02020603050405020304" pitchFamily="18" charset="0"/>
@@ -24651,7 +25171,7 @@
                         <a:buNone/>
                       </a:pPr>
                       <a:r>
-                        <a:rPr lang="es-ES_tradnl" sz="1000" dirty="0">
+                        <a:rPr lang="es-ES_tradnl" sz="900" dirty="0">
                           <a:effectLst/>
                           <a:latin typeface="Times New Roman" panose="02020603050405020304" pitchFamily="18" charset="0"/>
                           <a:ea typeface="Times New Roman" panose="02020603050405020304" pitchFamily="18" charset="0"/>
@@ -24674,7 +25194,7 @@
                         <a:buNone/>
                       </a:pPr>
                       <a:r>
-                        <a:rPr lang="es-ES_tradnl" sz="1000" dirty="0">
+                        <a:rPr lang="es-ES_tradnl" sz="900" dirty="0">
                           <a:effectLst/>
                           <a:latin typeface="Times New Roman" panose="02020603050405020304" pitchFamily="18" charset="0"/>
                           <a:ea typeface="Times New Roman" panose="02020603050405020304" pitchFamily="18" charset="0"/>
@@ -24697,7 +25217,7 @@
                         <a:buNone/>
                       </a:pPr>
                       <a:r>
-                        <a:rPr lang="es-ES_tradnl" sz="1000" dirty="0">
+                        <a:rPr lang="es-ES_tradnl" sz="900" dirty="0">
                           <a:effectLst/>
                           <a:latin typeface="Times New Roman" panose="02020603050405020304" pitchFamily="18" charset="0"/>
                           <a:ea typeface="Times New Roman" panose="02020603050405020304" pitchFamily="18" charset="0"/>
@@ -24720,7 +25240,7 @@
                         <a:buNone/>
                       </a:pPr>
                       <a:r>
-                        <a:rPr lang="es-ES_tradnl" sz="1000" dirty="0">
+                        <a:rPr lang="es-ES_tradnl" sz="900" dirty="0">
                           <a:effectLst/>
                           <a:latin typeface="Times New Roman" panose="02020603050405020304" pitchFamily="18" charset="0"/>
                           <a:ea typeface="Times New Roman" panose="02020603050405020304" pitchFamily="18" charset="0"/>
@@ -24743,7 +25263,7 @@
                         <a:buNone/>
                       </a:pPr>
                       <a:r>
-                        <a:rPr lang="es-ES_tradnl" sz="1000" dirty="0">
+                        <a:rPr lang="es-ES_tradnl" sz="900" dirty="0">
                           <a:effectLst/>
                           <a:latin typeface="Times New Roman" panose="02020603050405020304" pitchFamily="18" charset="0"/>
                           <a:ea typeface="Times New Roman" panose="02020603050405020304" pitchFamily="18" charset="0"/>
@@ -24766,7 +25286,7 @@
                         <a:buNone/>
                       </a:pPr>
                       <a:r>
-                        <a:rPr lang="es-ES_tradnl" sz="1000" dirty="0">
+                        <a:rPr lang="es-ES_tradnl" sz="900" dirty="0">
                           <a:effectLst/>
                           <a:latin typeface="Times New Roman" panose="02020603050405020304" pitchFamily="18" charset="0"/>
                           <a:ea typeface="Times New Roman" panose="02020603050405020304" pitchFamily="18" charset="0"/>
@@ -24789,7 +25309,7 @@
                         <a:buNone/>
                       </a:pPr>
                       <a:r>
-                        <a:rPr lang="es-ES_tradnl" sz="1000" dirty="0">
+                        <a:rPr lang="es-ES_tradnl" sz="900" dirty="0">
                           <a:effectLst/>
                           <a:latin typeface="Times New Roman" panose="02020603050405020304" pitchFamily="18" charset="0"/>
                           <a:ea typeface="Times New Roman" panose="02020603050405020304" pitchFamily="18" charset="0"/>
@@ -24812,7 +25332,7 @@
                         <a:buNone/>
                       </a:pPr>
                       <a:r>
-                        <a:rPr lang="es-ES_tradnl" sz="1000" dirty="0">
+                        <a:rPr lang="es-ES_tradnl" sz="900" dirty="0">
                           <a:effectLst/>
                           <a:latin typeface="Times New Roman" panose="02020603050405020304" pitchFamily="18" charset="0"/>
                           <a:ea typeface="Times New Roman" panose="02020603050405020304" pitchFamily="18" charset="0"/>
@@ -24835,109 +25355,139 @@
                         <a:buNone/>
                       </a:pPr>
                       <a:r>
-                        <a:rPr lang="es-ES_tradnl" sz="1000" dirty="0">
-                          <a:effectLst/>
-                          <a:latin typeface="Times New Roman" panose="02020603050405020304" pitchFamily="18" charset="0"/>
-                          <a:ea typeface="Times New Roman" panose="02020603050405020304" pitchFamily="18" charset="0"/>
-                          <a:cs typeface="Times New Roman" panose="02020603050405020304" pitchFamily="18" charset="0"/>
-                        </a:rPr>
-                        <a:t>9.99</a:t>
-                      </a:r>
-                    </a:p>
-                  </a:txBody>
-                  <a:tcPr marL="68580" marR="68580" marT="0" marB="0" anchor="ctr">
-                    <a:noFill/>
-                  </a:tcPr>
-                </a:tc>
-                <a:tc>
-                  <a:txBody>
-                    <a:bodyPr/>
-                    <a:lstStyle/>
-                    <a:p>
-                      <a:pPr algn="ctr">
-                        <a:buNone/>
-                      </a:pPr>
-                      <a:r>
-                        <a:rPr lang="es-ES_tradnl" sz="1000" dirty="0">
-                          <a:effectLst/>
-                          <a:latin typeface="Times New Roman" panose="02020603050405020304" pitchFamily="18" charset="0"/>
-                          <a:ea typeface="Times New Roman" panose="02020603050405020304" pitchFamily="18" charset="0"/>
-                          <a:cs typeface="Times New Roman" panose="02020603050405020304" pitchFamily="18" charset="0"/>
-                        </a:rPr>
-                        <a:t>3.32</a:t>
-                      </a:r>
-                    </a:p>
-                  </a:txBody>
-                  <a:tcPr marL="68580" marR="68580" marT="0" marB="0" anchor="ctr">
-                    <a:noFill/>
-                  </a:tcPr>
-                </a:tc>
-                <a:tc>
-                  <a:txBody>
-                    <a:bodyPr/>
-                    <a:lstStyle/>
-                    <a:p>
-                      <a:pPr algn="ctr">
-                        <a:buNone/>
-                      </a:pPr>
-                      <a:r>
-                        <a:rPr lang="es-ES_tradnl" sz="1000" dirty="0">
-                          <a:effectLst/>
-                          <a:latin typeface="Times New Roman" panose="02020603050405020304" pitchFamily="18" charset="0"/>
-                          <a:ea typeface="Times New Roman" panose="02020603050405020304" pitchFamily="18" charset="0"/>
-                          <a:cs typeface="Times New Roman" panose="02020603050405020304" pitchFamily="18" charset="0"/>
-                        </a:rPr>
-                        <a:t>58.85</a:t>
-                      </a:r>
-                    </a:p>
-                  </a:txBody>
-                  <a:tcPr marL="68580" marR="68580" marT="0" marB="0" anchor="ctr">
-                    <a:noFill/>
-                  </a:tcPr>
-                </a:tc>
-                <a:tc>
-                  <a:txBody>
-                    <a:bodyPr/>
-                    <a:lstStyle/>
-                    <a:p>
-                      <a:pPr algn="ctr">
-                        <a:buNone/>
-                      </a:pPr>
-                      <a:r>
-                        <a:rPr lang="es-ES_tradnl" sz="1000" dirty="0">
-                          <a:effectLst/>
-                          <a:latin typeface="Times New Roman" panose="02020603050405020304" pitchFamily="18" charset="0"/>
-                          <a:ea typeface="Times New Roman" panose="02020603050405020304" pitchFamily="18" charset="0"/>
-                          <a:cs typeface="Times New Roman" panose="02020603050405020304" pitchFamily="18" charset="0"/>
-                        </a:rPr>
-                        <a:t>7.51</a:t>
-                      </a:r>
-                    </a:p>
-                  </a:txBody>
-                  <a:tcPr marL="68580" marR="68580" marT="0" marB="0" anchor="ctr">
-                    <a:noFill/>
-                  </a:tcPr>
-                </a:tc>
-                <a:tc>
-                  <a:txBody>
-                    <a:bodyPr/>
-                    <a:lstStyle/>
-                    <a:p>
-                      <a:pPr algn="ctr">
-                        <a:buNone/>
-                      </a:pPr>
-                      <a:r>
-                        <a:rPr lang="es-ES_tradnl" sz="1000" dirty="0">
-                          <a:effectLst/>
-                          <a:latin typeface="Times New Roman" panose="02020603050405020304" pitchFamily="18" charset="0"/>
-                          <a:ea typeface="Times New Roman" panose="02020603050405020304" pitchFamily="18" charset="0"/>
-                          <a:cs typeface="Times New Roman" panose="02020603050405020304" pitchFamily="18" charset="0"/>
-                        </a:rPr>
-                        <a:t>41.26</a:t>
-                      </a:r>
-                    </a:p>
-                  </a:txBody>
-                  <a:tcPr marL="68580" marR="68580" marT="0" marB="0" anchor="ctr">
+                        <a:rPr lang="es-ES" sz="900">
+                          <a:effectLst/>
+                          <a:latin typeface="Times New Roman" panose="02020603050405020304" pitchFamily="18" charset="0"/>
+                          <a:ea typeface="Times New Roman" panose="02020603050405020304" pitchFamily="18" charset="0"/>
+                          <a:cs typeface="Times New Roman" panose="02020603050405020304" pitchFamily="18" charset="0"/>
+                        </a:rPr>
+                        <a:t>6.00</a:t>
+                      </a:r>
+                      <a:endParaRPr lang="de-DE" sz="900">
+                        <a:effectLst/>
+                        <a:latin typeface="Times New Roman" panose="02020603050405020304" pitchFamily="18" charset="0"/>
+                        <a:ea typeface="Times New Roman" panose="02020603050405020304" pitchFamily="18" charset="0"/>
+                        <a:cs typeface="Times New Roman" panose="02020603050405020304" pitchFamily="18" charset="0"/>
+                      </a:endParaRPr>
+                    </a:p>
+                  </a:txBody>
+                  <a:tcPr marL="68580" marR="68580" marT="0" marB="0">
+                    <a:noFill/>
+                  </a:tcPr>
+                </a:tc>
+                <a:tc>
+                  <a:txBody>
+                    <a:bodyPr/>
+                    <a:lstStyle/>
+                    <a:p>
+                      <a:pPr algn="ctr">
+                        <a:buNone/>
+                      </a:pPr>
+                      <a:r>
+                        <a:rPr lang="es-ES" sz="900">
+                          <a:effectLst/>
+                          <a:latin typeface="Times New Roman" panose="02020603050405020304" pitchFamily="18" charset="0"/>
+                          <a:ea typeface="Times New Roman" panose="02020603050405020304" pitchFamily="18" charset="0"/>
+                          <a:cs typeface="Times New Roman" panose="02020603050405020304" pitchFamily="18" charset="0"/>
+                        </a:rPr>
+                        <a:t>2.13</a:t>
+                      </a:r>
+                      <a:endParaRPr lang="de-DE" sz="900">
+                        <a:effectLst/>
+                        <a:latin typeface="Times New Roman" panose="02020603050405020304" pitchFamily="18" charset="0"/>
+                        <a:ea typeface="Times New Roman" panose="02020603050405020304" pitchFamily="18" charset="0"/>
+                        <a:cs typeface="Times New Roman" panose="02020603050405020304" pitchFamily="18" charset="0"/>
+                      </a:endParaRPr>
+                    </a:p>
+                  </a:txBody>
+                  <a:tcPr marL="68580" marR="68580" marT="0" marB="0">
+                    <a:noFill/>
+                  </a:tcPr>
+                </a:tc>
+                <a:tc>
+                  <a:txBody>
+                    <a:bodyPr/>
+                    <a:lstStyle/>
+                    <a:p>
+                      <a:pPr algn="ctr">
+                        <a:buNone/>
+                      </a:pPr>
+                      <a:r>
+                        <a:rPr lang="es-ES" sz="900">
+                          <a:effectLst/>
+                          <a:latin typeface="Times New Roman" panose="02020603050405020304" pitchFamily="18" charset="0"/>
+                          <a:ea typeface="Times New Roman" panose="02020603050405020304" pitchFamily="18" charset="0"/>
+                          <a:cs typeface="Times New Roman" panose="02020603050405020304" pitchFamily="18" charset="0"/>
+                        </a:rPr>
+                        <a:t>24.95</a:t>
+                      </a:r>
+                      <a:endParaRPr lang="de-DE" sz="900">
+                        <a:effectLst/>
+                        <a:latin typeface="Times New Roman" panose="02020603050405020304" pitchFamily="18" charset="0"/>
+                        <a:ea typeface="Times New Roman" panose="02020603050405020304" pitchFamily="18" charset="0"/>
+                        <a:cs typeface="Times New Roman" panose="02020603050405020304" pitchFamily="18" charset="0"/>
+                      </a:endParaRPr>
+                    </a:p>
+                  </a:txBody>
+                  <a:tcPr marL="68580" marR="68580" marT="0" marB="0">
+                    <a:noFill/>
+                  </a:tcPr>
+                </a:tc>
+                <a:tc>
+                  <a:txBody>
+                    <a:bodyPr/>
+                    <a:lstStyle/>
+                    <a:p>
+                      <a:pPr algn="ctr">
+                        <a:buNone/>
+                      </a:pPr>
+                      <a:r>
+                        <a:rPr lang="es-ES" sz="900">
+                          <a:effectLst/>
+                          <a:latin typeface="Times New Roman" panose="02020603050405020304" pitchFamily="18" charset="0"/>
+                          <a:ea typeface="Times New Roman" panose="02020603050405020304" pitchFamily="18" charset="0"/>
+                          <a:cs typeface="Times New Roman" panose="02020603050405020304" pitchFamily="18" charset="0"/>
+                        </a:rPr>
+                        <a:t>5.03</a:t>
+                      </a:r>
+                      <a:endParaRPr lang="de-DE" sz="900">
+                        <a:effectLst/>
+                        <a:latin typeface="Times New Roman" panose="02020603050405020304" pitchFamily="18" charset="0"/>
+                        <a:ea typeface="Times New Roman" panose="02020603050405020304" pitchFamily="18" charset="0"/>
+                        <a:cs typeface="Times New Roman" panose="02020603050405020304" pitchFamily="18" charset="0"/>
+                      </a:endParaRPr>
+                    </a:p>
+                  </a:txBody>
+                  <a:tcPr marL="68580" marR="68580" marT="0" marB="0">
+                    <a:noFill/>
+                  </a:tcPr>
+                </a:tc>
+                <a:tc>
+                  <a:txBody>
+                    <a:bodyPr/>
+                    <a:lstStyle/>
+                    <a:p>
+                      <a:pPr algn="ctr">
+                        <a:buNone/>
+                      </a:pPr>
+                      <a:r>
+                        <a:rPr lang="es-ES" sz="900" dirty="0">
+                          <a:effectLst/>
+                          <a:latin typeface="Times New Roman" panose="02020603050405020304" pitchFamily="18" charset="0"/>
+                          <a:ea typeface="Times New Roman" panose="02020603050405020304" pitchFamily="18" charset="0"/>
+                          <a:cs typeface="Times New Roman" panose="02020603050405020304" pitchFamily="18" charset="0"/>
+                        </a:rPr>
+                        <a:t>55.35</a:t>
+                      </a:r>
+                      <a:endParaRPr lang="de-DE" sz="900" dirty="0">
+                        <a:effectLst/>
+                        <a:latin typeface="Times New Roman" panose="02020603050405020304" pitchFamily="18" charset="0"/>
+                        <a:ea typeface="Times New Roman" panose="02020603050405020304" pitchFamily="18" charset="0"/>
+                        <a:cs typeface="Times New Roman" panose="02020603050405020304" pitchFamily="18" charset="0"/>
+                      </a:endParaRPr>
+                    </a:p>
+                  </a:txBody>
+                  <a:tcPr marL="68580" marR="68580" marT="0" marB="0">
                     <a:noFill/>
                   </a:tcPr>
                 </a:tc>
